--- a/DOC/台股美股投資模擬競賽_使用手冊.pptx
+++ b/DOC/台股美股投資模擬競賽_使用手冊.pptx
@@ -4,6 +4,9 @@
   <p:sldMasterIdLst>
     <p:sldMasterId id="2147483648" r:id="rId1"/>
   </p:sldMasterIdLst>
+  <p:notesMasterIdLst>
+    <p:notesMasterId r:id="rId34"/>
+  </p:notesMasterIdLst>
   <p:sldIdLst>
     <p:sldId id="256" r:id="rId2"/>
     <p:sldId id="257" r:id="rId3"/>
@@ -38,9 +41,6 @@
     <p:sldId id="286" r:id="rId32"/>
     <p:sldId id="287" r:id="rId33"/>
   </p:sldIdLst>
-  <p:notesMasterIdLst>
-    <p:notesMasterId r:id="rId34"/>
-  </p:notesMasterIdLst>
   <p:sldSz cx="12192000" cy="6858000"/>
   <p:notesSz cx="6858000" cy="12192000"/>
   <p:defaultTextStyle>
@@ -135,6 +135,11 @@
       </a:defRPr>
     </a:lvl9pPr>
   </p:defaultTextStyle>
+  <p:extLst>
+    <p:ext uri="{EFAFB233-063F-42B5-8137-9DF3F51BA10A}">
+      <p15:sldGuideLst xmlns:p15="http://schemas.microsoft.com/office/powerpoint/2012/main"/>
+    </p:ext>
+  </p:extLst>
 </p:presentation>
 </file>
 
@@ -160,234 +165,10 @@
           <a:chExt cx="0" cy="0"/>
         </a:xfrm>
       </p:grpSpPr>
-      <p:sp>
-        <p:nvSpPr>
-          <p:cNvPr id="2" name="Header Placeholder 1"/>
-          <p:cNvSpPr>
-            <a:spLocks noGrp="1"/>
-          </p:cNvSpPr>
-          <p:nvPr>
-            <p:ph type="hdr" sz="quarter"/>
-          </p:nvPr>
-        </p:nvSpPr>
-        <p:spPr>
-          <a:xfrm>
-            <a:off x="0" y="0"/>
-            <a:ext cx="2971800" cy="458788"/>
-          </a:xfrm>
-          <a:prstGeom prst="rect">
-            <a:avLst/>
-          </a:prstGeom>
-        </p:spPr>
-        <p:txBody>
-          <a:bodyPr vert="horz" lIns="91440" tIns="45720" rIns="91440" bIns="45720" rtlCol="0"/>
-          <a:lstStyle>
-            <a:lvl1pPr algn="l">
-              <a:defRPr sz="1200"/>
-            </a:lvl1pPr>
-          </a:lstStyle>
-          <a:p>
-            <a:endParaRPr lang="en-US"/>
-          </a:p>
-        </p:txBody>
-      </p:sp>
-      <p:sp>
-        <p:nvSpPr>
-          <p:cNvPr id="3" name="Date Placeholder 2"/>
-          <p:cNvSpPr>
-            <a:spLocks noGrp="1"/>
-          </p:cNvSpPr>
-          <p:nvPr>
-            <p:ph type="dt" idx="1"/>
-          </p:nvPr>
-        </p:nvSpPr>
-        <p:spPr>
-          <a:xfrm>
-            <a:off x="3884613" y="0"/>
-            <a:ext cx="2971800" cy="458788"/>
-          </a:xfrm>
-          <a:prstGeom prst="rect">
-            <a:avLst/>
-          </a:prstGeom>
-        </p:spPr>
-        <p:txBody>
-          <a:bodyPr vert="horz" lIns="91440" tIns="45720" rIns="91440" bIns="45720" rtlCol="0"/>
-          <a:lstStyle>
-            <a:lvl1pPr algn="r">
-              <a:defRPr sz="1200"/>
-            </a:lvl1pPr>
-          </a:lstStyle>
-          <a:p>
-            <a:fld id="{5282F153-3F37-0F45-9E97-73ACFA13230C}" type="datetimeFigureOut">
-              <a:rPr lang="en-US"/>
-              <a:t>7/23/19</a:t>
-            </a:fld>
-            <a:endParaRPr lang="en-US"/>
-          </a:p>
-        </p:txBody>
-      </p:sp>
-      <p:sp>
-        <p:nvSpPr>
-          <p:cNvPr id="4" name="Slide Image Placeholder 3"/>
-          <p:cNvSpPr>
-            <a:spLocks noGrp="1" noRot="1" noChangeAspect="1"/>
-          </p:cNvSpPr>
-          <p:nvPr>
-            <p:ph type="sldImg" idx="2"/>
-          </p:nvPr>
-        </p:nvSpPr>
-        <p:spPr>
-          <a:xfrm>
-            <a:off x="685800" y="1143000"/>
-            <a:ext cx="5486400" cy="3086100"/>
-          </a:xfrm>
-          <a:prstGeom prst="rect">
-            <a:avLst/>
-          </a:prstGeom>
-          <a:noFill/>
-          <a:ln w="12700">
-            <a:solidFill>
-              <a:prstClr val="black"/>
-            </a:solidFill>
-          </a:ln>
-        </p:spPr>
-        <p:txBody>
-          <a:bodyPr vert="horz" lIns="91440" tIns="45720" rIns="91440" bIns="45720" rtlCol="0" anchor="ctr"/>
-          <a:lstStyle/>
-          <a:p>
-            <a:endParaRPr lang="en-US"/>
-          </a:p>
-        </p:txBody>
-      </p:sp>
-      <p:sp>
-        <p:nvSpPr>
-          <p:cNvPr id="5" name="Notes Placeholder 4"/>
-          <p:cNvSpPr>
-            <a:spLocks noGrp="1"/>
-          </p:cNvSpPr>
-          <p:nvPr>
-            <p:ph type="body" sz="quarter" idx="3"/>
-          </p:nvPr>
-        </p:nvSpPr>
-        <p:spPr>
-          <a:xfrm>
-            <a:off x="685800" y="4400550"/>
-            <a:ext cx="5486400" cy="3600450"/>
-          </a:xfrm>
-          <a:prstGeom prst="rect">
-            <a:avLst/>
-          </a:prstGeom>
-        </p:spPr>
-        <p:txBody>
-          <a:bodyPr vert="horz" lIns="91440" tIns="45720" rIns="91440" bIns="45720" rtlCol="0"/>
-          <a:lstStyle/>
-          <a:p>
-            <a:pPr lvl="0"/>
-            <a:r>
-              <a:rPr lang="en-US"/>
-              <a:t>Click to edit Master text styles</a:t>
-            </a:r>
-          </a:p>
-          <a:p>
-            <a:pPr lvl="1"/>
-            <a:r>
-              <a:rPr lang="en-US"/>
-              <a:t>Second level</a:t>
-            </a:r>
-          </a:p>
-          <a:p>
-            <a:pPr lvl="2"/>
-            <a:r>
-              <a:rPr lang="en-US"/>
-              <a:t>Third level</a:t>
-            </a:r>
-          </a:p>
-          <a:p>
-            <a:pPr lvl="3"/>
-            <a:r>
-              <a:rPr lang="en-US"/>
-              <a:t>Fourth level</a:t>
-            </a:r>
-          </a:p>
-          <a:p>
-            <a:pPr lvl="4"/>
-            <a:r>
-              <a:rPr lang="en-US"/>
-              <a:t>Fifth level</a:t>
-            </a:r>
-          </a:p>
-        </p:txBody>
-      </p:sp>
-      <p:sp>
-        <p:nvSpPr>
-          <p:cNvPr id="6" name="Footer Placeholder 5"/>
-          <p:cNvSpPr>
-            <a:spLocks noGrp="1"/>
-          </p:cNvSpPr>
-          <p:nvPr>
-            <p:ph type="ftr" sz="quarter" idx="4"/>
-          </p:nvPr>
-        </p:nvSpPr>
-        <p:spPr>
-          <a:xfrm>
-            <a:off x="0" y="8685213"/>
-            <a:ext cx="2971800" cy="458787"/>
-          </a:xfrm>
-          <a:prstGeom prst="rect">
-            <a:avLst/>
-          </a:prstGeom>
-        </p:spPr>
-        <p:txBody>
-          <a:bodyPr vert="horz" lIns="91440" tIns="45720" rIns="91440" bIns="45720" rtlCol="0" anchor="b"/>
-          <a:lstStyle>
-            <a:lvl1pPr algn="l">
-              <a:defRPr sz="1200"/>
-            </a:lvl1pPr>
-          </a:lstStyle>
-          <a:p>
-            <a:endParaRPr lang="en-US"/>
-          </a:p>
-        </p:txBody>
-      </p:sp>
-      <p:sp>
-        <p:nvSpPr>
-          <p:cNvPr id="7" name="Slide Number Placeholder 6"/>
-          <p:cNvSpPr>
-            <a:spLocks noGrp="1"/>
-          </p:cNvSpPr>
-          <p:nvPr>
-            <p:ph type="sldNum" sz="quarter" idx="5"/>
-          </p:nvPr>
-        </p:nvSpPr>
-        <p:spPr>
-          <a:xfrm>
-            <a:off x="3884613" y="8685213"/>
-            <a:ext cx="2971800" cy="458787"/>
-          </a:xfrm>
-          <a:prstGeom prst="rect">
-            <a:avLst/>
-          </a:prstGeom>
-        </p:spPr>
-        <p:txBody>
-          <a:bodyPr vert="horz" lIns="91440" tIns="45720" rIns="91440" bIns="45720" rtlCol="0" anchor="b"/>
-          <a:lstStyle>
-            <a:lvl1pPr algn="r">
-              <a:defRPr sz="1200"/>
-            </a:lvl1pPr>
-          </a:lstStyle>
-          <a:p>
-            <a:fld id="{CE5E9CC1-C706-0F49-92D6-E571CC5EEA8F}" type="slidenum">
-              <a:rPr lang="en-US"/>
-              <a:t>‹#›</a:t>
-            </a:fld>
-            <a:endParaRPr lang="en-US"/>
-          </a:p>
-        </p:txBody>
-      </p:sp>
     </p:spTree>
     <p:extLst>
       <p:ext uri="{BB962C8B-B14F-4D97-AF65-F5344CB8AC3E}">
-        <p14:creationId xmlns:p14="http://schemas.microsoft.com/office/powerpoint/2010/main" val="1024086991"/>
+        <p14:creationId xmlns:p14="http://schemas.microsoft.com/office/powerpoint/2010/main" val="3776246632"/>
       </p:ext>
     </p:extLst>
   </p:cSld>
@@ -535,7 +316,6 @@
               <a:rPr lang="en-US" dirty="0"/>
               <a:t>開場：說明這是用真實股價與真實費率跑的模擬競賽，不是虛擬報價。</a:t>
             </a:r>
-            <a:endParaRPr lang="en-US" dirty="0"/>
           </a:p>
         </p:txBody>
       </p:sp>
@@ -619,10 +399,6 @@
           <a:bodyPr/>
           <a:lstStyle/>
           <a:p>
-            <a:r>
-              <a:rPr lang="en-US" dirty="0"/>
-              <a:t/>
-            </a:r>
             <a:endParaRPr lang="en-US" dirty="0"/>
           </a:p>
         </p:txBody>
@@ -711,7 +487,6 @@
               <a:rPr lang="en-US" dirty="0"/>
               <a:t>要求同學遇到灰色按鈕時先讀訊息，不要直接說「壞掉了」。</a:t>
             </a:r>
-            <a:endParaRPr lang="en-US" dirty="0"/>
           </a:p>
         </p:txBody>
       </p:sp>
@@ -795,10 +570,6 @@
           <a:bodyPr/>
           <a:lstStyle/>
           <a:p>
-            <a:r>
-              <a:rPr lang="en-US" dirty="0"/>
-              <a:t/>
-            </a:r>
             <a:endParaRPr lang="en-US" dirty="0"/>
           </a:p>
         </p:txBody>
@@ -883,10 +654,6 @@
           <a:bodyPr/>
           <a:lstStyle/>
           <a:p>
-            <a:r>
-              <a:rPr lang="en-US" dirty="0"/>
-              <a:t/>
-            </a:r>
             <a:endParaRPr lang="en-US" dirty="0"/>
           </a:p>
         </p:txBody>
@@ -975,7 +742,6 @@
               <a:rPr lang="en-US" dirty="0"/>
               <a:t>可以帶到匯率避險、以及為什麼有些 ETF 有「匯率避險」版本。</a:t>
             </a:r>
-            <a:endParaRPr lang="en-US" dirty="0"/>
           </a:p>
         </p:txBody>
       </p:sp>
@@ -1059,10 +825,6 @@
           <a:bodyPr/>
           <a:lstStyle/>
           <a:p>
-            <a:r>
-              <a:rPr lang="en-US" dirty="0"/>
-              <a:t/>
-            </a:r>
             <a:endParaRPr lang="en-US" dirty="0"/>
           </a:p>
         </p:txBody>
@@ -1147,10 +909,6 @@
           <a:bodyPr/>
           <a:lstStyle/>
           <a:p>
-            <a:r>
-              <a:rPr lang="en-US" dirty="0"/>
-              <a:t/>
-            </a:r>
             <a:endParaRPr lang="en-US" dirty="0"/>
           </a:p>
         </p:txBody>
@@ -1235,10 +993,6 @@
           <a:bodyPr/>
           <a:lstStyle/>
           <a:p>
-            <a:r>
-              <a:rPr lang="en-US" dirty="0"/>
-              <a:t/>
-            </a:r>
             <a:endParaRPr lang="en-US" dirty="0"/>
           </a:p>
         </p:txBody>
@@ -1327,7 +1081,6 @@
               <a:rPr lang="en-US" dirty="0"/>
               <a:t>這頁是整份簡報最重要的觀念之一：交易成本。</a:t>
             </a:r>
-            <a:endParaRPr lang="en-US" dirty="0"/>
           </a:p>
         </p:txBody>
       </p:sp>
@@ -1411,10 +1164,6 @@
           <a:bodyPr/>
           <a:lstStyle/>
           <a:p>
-            <a:r>
-              <a:rPr lang="en-US" dirty="0"/>
-              <a:t/>
-            </a:r>
             <a:endParaRPr lang="en-US" dirty="0"/>
           </a:p>
         </p:txBody>
@@ -1499,10 +1248,6 @@
           <a:bodyPr/>
           <a:lstStyle/>
           <a:p>
-            <a:r>
-              <a:rPr lang="en-US" dirty="0"/>
-              <a:t/>
-            </a:r>
             <a:endParaRPr lang="en-US" dirty="0"/>
           </a:p>
         </p:txBody>
@@ -1587,10 +1332,6 @@
           <a:bodyPr/>
           <a:lstStyle/>
           <a:p>
-            <a:r>
-              <a:rPr lang="en-US" dirty="0"/>
-              <a:t/>
-            </a:r>
             <a:endParaRPr lang="en-US" dirty="0"/>
           </a:p>
         </p:txBody>
@@ -1675,10 +1416,6 @@
           <a:bodyPr/>
           <a:lstStyle/>
           <a:p>
-            <a:r>
-              <a:rPr lang="en-US" dirty="0"/>
-              <a:t/>
-            </a:r>
             <a:endParaRPr lang="en-US" dirty="0"/>
           </a:p>
         </p:txBody>
@@ -1763,10 +1500,6 @@
           <a:bodyPr/>
           <a:lstStyle/>
           <a:p>
-            <a:r>
-              <a:rPr lang="en-US" dirty="0"/>
-              <a:t/>
-            </a:r>
             <a:endParaRPr lang="en-US" dirty="0"/>
           </a:p>
         </p:txBody>
@@ -1851,10 +1584,6 @@
           <a:bodyPr/>
           <a:lstStyle/>
           <a:p>
-            <a:r>
-              <a:rPr lang="en-US" dirty="0"/>
-              <a:t/>
-            </a:r>
             <a:endParaRPr lang="en-US" dirty="0"/>
           </a:p>
         </p:txBody>
@@ -1939,10 +1668,6 @@
           <a:bodyPr/>
           <a:lstStyle/>
           <a:p>
-            <a:r>
-              <a:rPr lang="en-US" dirty="0"/>
-              <a:t/>
-            </a:r>
             <a:endParaRPr lang="en-US" dirty="0"/>
           </a:p>
         </p:txBody>
@@ -2027,10 +1752,6 @@
           <a:bodyPr/>
           <a:lstStyle/>
           <a:p>
-            <a:r>
-              <a:rPr lang="en-US" dirty="0"/>
-              <a:t/>
-            </a:r>
             <a:endParaRPr lang="en-US" dirty="0"/>
           </a:p>
         </p:txBody>
@@ -2115,10 +1836,6 @@
           <a:bodyPr/>
           <a:lstStyle/>
           <a:p>
-            <a:r>
-              <a:rPr lang="en-US" dirty="0"/>
-              <a:t/>
-            </a:r>
             <a:endParaRPr lang="en-US" dirty="0"/>
           </a:p>
         </p:txBody>
@@ -2203,10 +1920,6 @@
           <a:bodyPr/>
           <a:lstStyle/>
           <a:p>
-            <a:r>
-              <a:rPr lang="en-US" dirty="0"/>
-              <a:t/>
-            </a:r>
             <a:endParaRPr lang="en-US" dirty="0"/>
           </a:p>
         </p:txBody>
@@ -2291,10 +2004,6 @@
           <a:bodyPr/>
           <a:lstStyle/>
           <a:p>
-            <a:r>
-              <a:rPr lang="en-US" dirty="0"/>
-              <a:t/>
-            </a:r>
             <a:endParaRPr lang="en-US" dirty="0"/>
           </a:p>
         </p:txBody>
@@ -2379,10 +2088,6 @@
           <a:bodyPr/>
           <a:lstStyle/>
           <a:p>
-            <a:r>
-              <a:rPr lang="en-US" dirty="0"/>
-              <a:t/>
-            </a:r>
             <a:endParaRPr lang="en-US" dirty="0"/>
           </a:p>
         </p:txBody>
@@ -2467,10 +2172,6 @@
           <a:bodyPr/>
           <a:lstStyle/>
           <a:p>
-            <a:r>
-              <a:rPr lang="en-US" dirty="0"/>
-              <a:t/>
-            </a:r>
             <a:endParaRPr lang="en-US" dirty="0"/>
           </a:p>
         </p:txBody>
@@ -2555,10 +2256,6 @@
           <a:bodyPr/>
           <a:lstStyle/>
           <a:p>
-            <a:r>
-              <a:rPr lang="en-US" dirty="0"/>
-              <a:t/>
-            </a:r>
             <a:endParaRPr lang="en-US" dirty="0"/>
           </a:p>
         </p:txBody>
@@ -2643,10 +2340,6 @@
           <a:bodyPr/>
           <a:lstStyle/>
           <a:p>
-            <a:r>
-              <a:rPr lang="en-US" dirty="0"/>
-              <a:t/>
-            </a:r>
             <a:endParaRPr lang="en-US" dirty="0"/>
           </a:p>
         </p:txBody>
@@ -2731,10 +2424,6 @@
           <a:bodyPr/>
           <a:lstStyle/>
           <a:p>
-            <a:r>
-              <a:rPr lang="en-US" dirty="0"/>
-              <a:t/>
-            </a:r>
             <a:endParaRPr lang="en-US" dirty="0"/>
           </a:p>
         </p:txBody>
@@ -2819,10 +2508,6 @@
           <a:bodyPr/>
           <a:lstStyle/>
           <a:p>
-            <a:r>
-              <a:rPr lang="en-US" dirty="0"/>
-              <a:t/>
-            </a:r>
             <a:endParaRPr lang="en-US" dirty="0"/>
           </a:p>
         </p:txBody>
@@ -2911,7 +2596,6 @@
               <a:rPr lang="en-US" dirty="0"/>
               <a:t>提醒同學認證碼要抄下來；註冊完直接就登入了。</a:t>
             </a:r>
-            <a:endParaRPr lang="en-US" dirty="0"/>
           </a:p>
         </p:txBody>
       </p:sp>
@@ -2999,7 +2683,6 @@
               <a:rPr lang="en-US" dirty="0"/>
               <a:t>強調密碼要記住，系統沒有寄信重設的功能。</a:t>
             </a:r>
-            <a:endParaRPr lang="en-US" dirty="0"/>
           </a:p>
         </p:txBody>
       </p:sp>
@@ -3083,10 +2766,6 @@
           <a:bodyPr/>
           <a:lstStyle/>
           <a:p>
-            <a:r>
-              <a:rPr lang="en-US" dirty="0"/>
-              <a:t/>
-            </a:r>
             <a:endParaRPr lang="en-US" dirty="0"/>
           </a:p>
         </p:txBody>
@@ -3175,7 +2854,6 @@
               <a:rPr lang="en-US" dirty="0"/>
               <a:t>打敗大盤是投資最基本的評分標準，可以在這裡帶出被動投資的討論。</a:t>
             </a:r>
-            <a:endParaRPr lang="en-US" dirty="0"/>
           </a:p>
         </p:txBody>
       </p:sp>
@@ -3259,10 +2937,6 @@
           <a:bodyPr/>
           <a:lstStyle/>
           <a:p>
-            <a:r>
-              <a:rPr lang="en-US" dirty="0"/>
-              <a:t/>
-            </a:r>
             <a:endParaRPr lang="en-US" dirty="0"/>
           </a:p>
         </p:txBody>
@@ -3336,6 +3010,11 @@
 <file path=ppt/slideMasters/slideMaster1.xml><?xml version="1.0" encoding="utf-8"?>
 <p:sldMaster xmlns:a="http://schemas.openxmlformats.org/drawingml/2006/main" xmlns:r="http://schemas.openxmlformats.org/officeDocument/2006/relationships" xmlns:p="http://schemas.openxmlformats.org/presentationml/2006/main">
   <p:cSld>
+    <p:bg>
+      <p:bgRef idx="1001">
+        <a:schemeClr val="bg1"/>
+      </p:bgRef>
+    </p:bg>
     <p:spTree>
       <p:nvGrpSpPr>
         <p:cNvPr id="1" name=""/>
@@ -3618,6 +3297,7 @@
         <a:solidFill>
           <a:srgbClr val="08355E"/>
         </a:solidFill>
+        <a:effectLst/>
       </p:bgPr>
     </p:bg>
     <p:spTree>
@@ -3702,14 +3382,14 @@
       </p:sp>
       <p:pic>
         <p:nvPicPr>
-          <p:cNvPr id="5" name="Image 0" descr="D:\SourceCode\ntust_InvestmentSimulation\DOC\NTUST.jpg">    </p:cNvPr>
+          <p:cNvPr id="5" name="Image 0" descr="D:\SourceCode\ntust_InvestmentSimulation\DOC\NTUST.jpg"/>
           <p:cNvPicPr>
             <a:picLocks noChangeAspect="1"/>
           </p:cNvPicPr>
           <p:nvPr/>
         </p:nvPicPr>
         <p:blipFill>
-          <a:blip r:embed="rId1"/>
+          <a:blip r:embed="rId3"/>
           <a:stretch>
             <a:fillRect/>
           </a:stretch>
@@ -3745,7 +3425,7 @@
           <a:bodyPr wrap="square" lIns="0" tIns="0" rIns="0" bIns="0" rtlCol="0" anchor="ctr"/>
           <a:lstStyle/>
           <a:p>
-            <a:pPr indent="0" marL="0">
+            <a:pPr marL="0" indent="0">
               <a:buNone/>
             </a:pPr>
             <a:r>
@@ -3784,7 +3464,7 @@
           <a:bodyPr wrap="square" lIns="0" tIns="0" rIns="0" bIns="0" rtlCol="0" anchor="ctr"/>
           <a:lstStyle/>
           <a:p>
-            <a:pPr indent="0" marL="0">
+            <a:pPr marL="0" indent="0">
               <a:buNone/>
             </a:pPr>
             <a:r>
@@ -3823,7 +3503,7 @@
           <a:bodyPr wrap="square" lIns="0" tIns="0" rIns="0" bIns="0" rtlCol="0" anchor="ctr"/>
           <a:lstStyle/>
           <a:p>
-            <a:pPr indent="0" marL="0">
+            <a:pPr marL="0" indent="0">
               <a:lnSpc>
                 <a:spcPct val="105000"/>
               </a:lnSpc>
@@ -3843,7 +3523,7 @@
             <a:endParaRPr lang="en-US" sz="5200" dirty="0"/>
           </a:p>
           <a:p>
-            <a:pPr indent="0" marL="0">
+            <a:pPr marL="0" indent="0">
               <a:lnSpc>
                 <a:spcPct val="105000"/>
               </a:lnSpc>
@@ -3885,9 +3565,20 @@
           <a:bodyPr wrap="square" lIns="0" tIns="0" rIns="0" bIns="0" rtlCol="0" anchor="ctr"/>
           <a:lstStyle/>
           <a:p>
-            <a:pPr indent="0" marL="0">
-              <a:buNone/>
-            </a:pPr>
+            <a:pPr marL="0" indent="0">
+              <a:buNone/>
+            </a:pPr>
+            <a:r>
+              <a:rPr lang="en-US" sz="2200" dirty="0" err="1">
+                <a:solidFill>
+                  <a:srgbClr val="3F87C8"/>
+                </a:solidFill>
+                <a:latin typeface="Microsoft JhengHei" pitchFamily="34" charset="0"/>
+                <a:ea typeface="Microsoft JhengHei" pitchFamily="34" charset="-122"/>
+                <a:cs typeface="Microsoft JhengHei" pitchFamily="34" charset="-120"/>
+              </a:rPr>
+              <a:t>使用手冊</a:t>
+            </a:r>
             <a:r>
               <a:rPr lang="en-US" sz="2200" dirty="0">
                 <a:solidFill>
@@ -3897,9 +3588,42 @@
                 <a:ea typeface="Microsoft JhengHei" pitchFamily="34" charset="-122"/>
                 <a:cs typeface="Microsoft JhengHei" pitchFamily="34" charset="-120"/>
               </a:rPr>
-              <a:t>使用手冊</a:t>
-            </a:r>
-            <a:endParaRPr lang="en-US" sz="2200" dirty="0"/>
+              <a:t>                                                        </a:t>
+            </a:r>
+            <a:r>
+              <a:rPr lang="en-US" sz="1200" dirty="0">
+                <a:solidFill>
+                  <a:srgbClr val="3F87C8"/>
+                </a:solidFill>
+                <a:latin typeface="Microsoft JhengHei" pitchFamily="34" charset="0"/>
+                <a:ea typeface="Microsoft JhengHei" pitchFamily="34" charset="-122"/>
+                <a:cs typeface="Microsoft JhengHei" pitchFamily="34" charset="-120"/>
+              </a:rPr>
+              <a:t>(</a:t>
+            </a:r>
+            <a:r>
+              <a:rPr lang="en-US" sz="1200" dirty="0" err="1">
+                <a:solidFill>
+                  <a:srgbClr val="3F87C8"/>
+                </a:solidFill>
+                <a:latin typeface="Microsoft JhengHei" pitchFamily="34" charset="0"/>
+                <a:ea typeface="Microsoft JhengHei" pitchFamily="34" charset="-122"/>
+                <a:cs typeface="Microsoft JhengHei" pitchFamily="34" charset="-120"/>
+              </a:rPr>
+              <a:t>Author:MaxHsiao</a:t>
+            </a:r>
+            <a:r>
+              <a:rPr lang="en-US" sz="1200" dirty="0">
+                <a:solidFill>
+                  <a:srgbClr val="3F87C8"/>
+                </a:solidFill>
+                <a:latin typeface="Microsoft JhengHei" pitchFamily="34" charset="0"/>
+                <a:ea typeface="Microsoft JhengHei" pitchFamily="34" charset="-122"/>
+                <a:cs typeface="Microsoft JhengHei" pitchFamily="34" charset="-120"/>
+              </a:rPr>
+              <a:t>)</a:t>
+            </a:r>
+            <a:endParaRPr lang="en-US" sz="1200" dirty="0"/>
           </a:p>
         </p:txBody>
       </p:sp>
@@ -3946,7 +3670,7 @@
           <a:bodyPr wrap="square" lIns="0" tIns="0" rIns="0" bIns="0" rtlCol="0" anchor="ctr"/>
           <a:lstStyle/>
           <a:p>
-            <a:pPr algn="ctr" indent="0" marL="0">
+            <a:pPr marL="0" indent="0" algn="ctr">
               <a:buNone/>
             </a:pPr>
             <a:r>
@@ -3985,7 +3709,7 @@
           <a:bodyPr wrap="square" lIns="0" tIns="0" rIns="0" bIns="0" rtlCol="0" anchor="ctr"/>
           <a:lstStyle/>
           <a:p>
-            <a:pPr indent="0" marL="0">
+            <a:pPr marL="0" indent="0">
               <a:buNone/>
             </a:pPr>
             <a:r>
@@ -4019,6 +3743,7 @@
         <a:solidFill>
           <a:srgbClr val="FFFFFF"/>
         </a:solidFill>
+        <a:effectLst/>
       </p:bgPr>
     </p:bg>
     <p:spTree>
@@ -4056,11 +3781,11 @@
           <a:bodyPr wrap="square" lIns="0" tIns="0" rIns="0" bIns="0" rtlCol="0" anchor="ctr"/>
           <a:lstStyle/>
           <a:p>
-            <a:pPr indent="0" marL="0">
-              <a:buNone/>
-            </a:pPr>
-            <a:r>
-              <a:rPr lang="en-US" sz="1200" b="1" spc="200" kern="0" dirty="0">
+            <a:pPr marL="0" indent="0">
+              <a:buNone/>
+            </a:pPr>
+            <a:r>
+              <a:rPr lang="en-US" sz="1200" b="1" kern="0" spc="200" dirty="0">
                 <a:solidFill>
                   <a:srgbClr val="0B5EA8"/>
                 </a:solidFill>
@@ -4095,7 +3820,7 @@
           <a:bodyPr wrap="square" lIns="0" tIns="0" rIns="0" bIns="0" rtlCol="0" anchor="t"/>
           <a:lstStyle/>
           <a:p>
-            <a:pPr indent="0" marL="0">
+            <a:pPr marL="0" indent="0">
               <a:buNone/>
             </a:pPr>
             <a:r>
@@ -4115,14 +3840,14 @@
       </p:sp>
       <p:pic>
         <p:nvPicPr>
-          <p:cNvPr id="4" name="Image 0" descr="C:\TEMP\claude\D--SourceCode-ntust-InvestmentSimulation\a4c87170-020d-4b6b-adfe-2a756176eb57\scratchpad\ppt\img\trade-stock-tw.png">    </p:cNvPr>
+          <p:cNvPr id="4" name="Image 0" descr="C:\TEMP\claude\D--SourceCode-ntust-InvestmentSimulation\a4c87170-020d-4b6b-adfe-2a756176eb57\scratchpad\ppt\img\trade-stock-tw.png"/>
           <p:cNvPicPr>
             <a:picLocks noChangeAspect="1"/>
           </p:cNvPicPr>
           <p:nvPr/>
         </p:nvPicPr>
         <p:blipFill>
-          <a:blip r:embed="rId1"/>
+          <a:blip r:embed="rId3"/>
           <a:stretch>
             <a:fillRect/>
           </a:stretch>
@@ -4136,7 +3861,7 @@
             <a:avLst/>
           </a:prstGeom>
           <a:effectLst>
-            <a:outerShdw sx="100000" sy="100000" kx="0" ky="0" algn="bl" rotWithShape="0" blurRad="177800" dist="38100" dir="5400000">
+            <a:outerShdw blurRad="177800" dist="38100" dir="5400000" algn="bl" rotWithShape="0">
               <a:srgbClr val="0B2545">
                 <a:alpha val="18000"/>
               </a:srgbClr>
@@ -4185,7 +3910,7 @@
           <a:bodyPr wrap="square" lIns="0" tIns="0" rIns="0" bIns="0" rtlCol="0" anchor="ctr"/>
           <a:lstStyle/>
           <a:p>
-            <a:pPr algn="ctr" indent="0" marL="0">
+            <a:pPr marL="0" indent="0" algn="ctr">
               <a:buNone/>
             </a:pPr>
             <a:r>
@@ -4224,7 +3949,7 @@
           <a:bodyPr wrap="square" lIns="0" tIns="0" rIns="0" bIns="0" rtlCol="0" anchor="ctr"/>
           <a:lstStyle/>
           <a:p>
-            <a:pPr indent="0" marL="0">
+            <a:pPr marL="0" indent="0">
               <a:buNone/>
             </a:pPr>
             <a:r>
@@ -4263,7 +3988,7 @@
           <a:bodyPr wrap="square" lIns="0" tIns="0" rIns="0" bIns="0" rtlCol="0" anchor="ctr"/>
           <a:lstStyle/>
           <a:p>
-            <a:pPr indent="0" marL="0">
+            <a:pPr marL="0" indent="0">
               <a:lnSpc>
                 <a:spcPct val="115000"/>
               </a:lnSpc>
@@ -4283,7 +4008,7 @@
             <a:endParaRPr lang="en-US" sz="1250" dirty="0"/>
           </a:p>
           <a:p>
-            <a:pPr indent="0" marL="0">
+            <a:pPr marL="0" indent="0">
               <a:lnSpc>
                 <a:spcPct val="115000"/>
               </a:lnSpc>
@@ -4345,7 +4070,7 @@
           <a:bodyPr wrap="square" lIns="0" tIns="0" rIns="0" bIns="0" rtlCol="0" anchor="ctr"/>
           <a:lstStyle/>
           <a:p>
-            <a:pPr algn="ctr" indent="0" marL="0">
+            <a:pPr marL="0" indent="0" algn="ctr">
               <a:buNone/>
             </a:pPr>
             <a:r>
@@ -4384,7 +4109,7 @@
           <a:bodyPr wrap="square" lIns="0" tIns="0" rIns="0" bIns="0" rtlCol="0" anchor="ctr"/>
           <a:lstStyle/>
           <a:p>
-            <a:pPr indent="0" marL="0">
+            <a:pPr marL="0" indent="0">
               <a:buNone/>
             </a:pPr>
             <a:r>
@@ -4423,7 +4148,7 @@
           <a:bodyPr wrap="square" lIns="0" tIns="0" rIns="0" bIns="0" rtlCol="0" anchor="ctr"/>
           <a:lstStyle/>
           <a:p>
-            <a:pPr indent="0" marL="0">
+            <a:pPr marL="0" indent="0">
               <a:lnSpc>
                 <a:spcPct val="115000"/>
               </a:lnSpc>
@@ -4443,7 +4168,7 @@
             <a:endParaRPr lang="en-US" sz="1250" dirty="0"/>
           </a:p>
           <a:p>
-            <a:pPr indent="0" marL="0">
+            <a:pPr marL="0" indent="0">
               <a:lnSpc>
                 <a:spcPct val="115000"/>
               </a:lnSpc>
@@ -4505,7 +4230,7 @@
           <a:bodyPr wrap="square" lIns="0" tIns="0" rIns="0" bIns="0" rtlCol="0" anchor="ctr"/>
           <a:lstStyle/>
           <a:p>
-            <a:pPr algn="ctr" indent="0" marL="0">
+            <a:pPr marL="0" indent="0" algn="ctr">
               <a:buNone/>
             </a:pPr>
             <a:r>
@@ -4544,7 +4269,7 @@
           <a:bodyPr wrap="square" lIns="0" tIns="0" rIns="0" bIns="0" rtlCol="0" anchor="ctr"/>
           <a:lstStyle/>
           <a:p>
-            <a:pPr indent="0" marL="0">
+            <a:pPr marL="0" indent="0">
               <a:buNone/>
             </a:pPr>
             <a:r>
@@ -4583,7 +4308,7 @@
           <a:bodyPr wrap="square" lIns="0" tIns="0" rIns="0" bIns="0" rtlCol="0" anchor="ctr"/>
           <a:lstStyle/>
           <a:p>
-            <a:pPr indent="0" marL="0">
+            <a:pPr marL="0" indent="0">
               <a:lnSpc>
                 <a:spcPct val="115000"/>
               </a:lnSpc>
@@ -4603,7 +4328,7 @@
             <a:endParaRPr lang="en-US" sz="1250" dirty="0"/>
           </a:p>
           <a:p>
-            <a:pPr indent="0" marL="0">
+            <a:pPr marL="0" indent="0">
               <a:lnSpc>
                 <a:spcPct val="115000"/>
               </a:lnSpc>
@@ -4672,7 +4397,7 @@
           <a:bodyPr wrap="square" lIns="0" tIns="0" rIns="0" bIns="0" rtlCol="0" anchor="ctr"/>
           <a:lstStyle/>
           <a:p>
-            <a:pPr indent="0" marL="0">
+            <a:pPr marL="0" indent="0">
               <a:lnSpc>
                 <a:spcPct val="120000"/>
               </a:lnSpc>
@@ -4709,6 +4434,7 @@
         <a:solidFill>
           <a:srgbClr val="FFFFFF"/>
         </a:solidFill>
+        <a:effectLst/>
       </p:bgPr>
     </p:bg>
     <p:spTree>
@@ -4746,11 +4472,11 @@
           <a:bodyPr wrap="square" lIns="0" tIns="0" rIns="0" bIns="0" rtlCol="0" anchor="ctr"/>
           <a:lstStyle/>
           <a:p>
-            <a:pPr indent="0" marL="0">
-              <a:buNone/>
-            </a:pPr>
-            <a:r>
-              <a:rPr lang="en-US" sz="1200" b="1" spc="200" kern="0" dirty="0">
+            <a:pPr marL="0" indent="0">
+              <a:buNone/>
+            </a:pPr>
+            <a:r>
+              <a:rPr lang="en-US" sz="1200" b="1" kern="0" spc="200" dirty="0">
                 <a:solidFill>
                   <a:srgbClr val="0B5EA8"/>
                 </a:solidFill>
@@ -4785,7 +4511,7 @@
           <a:bodyPr wrap="square" lIns="0" tIns="0" rIns="0" bIns="0" rtlCol="0" anchor="t"/>
           <a:lstStyle/>
           <a:p>
-            <a:pPr indent="0" marL="0">
+            <a:pPr marL="0" indent="0">
               <a:buNone/>
             </a:pPr>
             <a:r>
@@ -4805,14 +4531,14 @@
       </p:sp>
       <p:pic>
         <p:nvPicPr>
-          <p:cNvPr id="4" name="Image 0" descr="C:\TEMP\claude\D--SourceCode-ntust-InvestmentSimulation\a4c87170-020d-4b6b-adfe-2a756176eb57\scratchpad\ppt\img\trade-panel-tw.png">    </p:cNvPr>
+          <p:cNvPr id="4" name="Image 0" descr="C:\TEMP\claude\D--SourceCode-ntust-InvestmentSimulation\a4c87170-020d-4b6b-adfe-2a756176eb57\scratchpad\ppt\img\trade-panel-tw.png"/>
           <p:cNvPicPr>
             <a:picLocks noChangeAspect="1"/>
           </p:cNvPicPr>
           <p:nvPr/>
         </p:nvPicPr>
         <p:blipFill>
-          <a:blip r:embed="rId1"/>
+          <a:blip r:embed="rId3"/>
           <a:stretch>
             <a:fillRect/>
           </a:stretch>
@@ -4826,7 +4552,7 @@
             <a:avLst/>
           </a:prstGeom>
           <a:effectLst>
-            <a:outerShdw sx="100000" sy="100000" kx="0" ky="0" algn="bl" rotWithShape="0" blurRad="177800" dist="38100" dir="5400000">
+            <a:outerShdw blurRad="177800" dist="38100" dir="5400000" algn="bl" rotWithShape="0">
               <a:srgbClr val="0B2545">
                 <a:alpha val="18000"/>
               </a:srgbClr>
@@ -4855,7 +4581,7 @@
           <a:bodyPr wrap="square" lIns="0" tIns="0" rIns="0" bIns="0" rtlCol="0" anchor="ctr"/>
           <a:lstStyle/>
           <a:p>
-            <a:pPr indent="0" marL="0">
+            <a:pPr marL="0" indent="0">
               <a:buNone/>
             </a:pPr>
             <a:r>
@@ -4896,8 +4622,20 @@
             <a:tbl>
               <a:tblPr/>
               <a:tblGrid>
-                <a:gridCol w="3931920"/>
-                <a:gridCol w="3474720"/>
+                <a:gridCol w="3931920">
+                  <a:extLst>
+                    <a:ext uri="{9D8B030D-6E8A-4147-A177-3AD203B41FA5}">
+                      <a16:colId xmlns:a16="http://schemas.microsoft.com/office/drawing/2014/main" val="20000"/>
+                    </a:ext>
+                  </a:extLst>
+                </a:gridCol>
+                <a:gridCol w="3474720">
+                  <a:extLst>
+                    <a:ext uri="{9D8B030D-6E8A-4147-A177-3AD203B41FA5}">
+                      <a16:colId xmlns:a16="http://schemas.microsoft.com/office/drawing/2014/main" val="20001"/>
+                    </a:ext>
+                  </a:extLst>
+                </a:gridCol>
               </a:tblGrid>
               <a:tr h="402336">
                 <a:tc>
@@ -4905,7 +4643,7 @@
                     <a:bodyPr/>
                     <a:lstStyle/>
                     <a:p>
-                      <a:pPr indent="0" marL="0">
+                      <a:pPr marL="0" indent="0">
                         <a:buNone/>
                       </a:pPr>
                       <a:r>
@@ -4926,7 +4664,7 @@
                       </a:endParaRPr>
                     </a:p>
                   </a:txBody>
-                  <a:tcPr marL="91440" marR="91440" marT="45720" marB="45720" anchor="ctr">
+                  <a:tcPr anchor="ctr">
                     <a:lnL w="12700" cap="flat" cmpd="sng" algn="ctr">
                       <a:solidFill>
                         <a:srgbClr val="DCE5EE"/>
@@ -4973,7 +4711,7 @@
                     <a:bodyPr/>
                     <a:lstStyle/>
                     <a:p>
-                      <a:pPr indent="0" marL="0">
+                      <a:pPr marL="0" indent="0">
                         <a:buNone/>
                       </a:pPr>
                       <a:r>
@@ -4994,7 +4732,7 @@
                       </a:endParaRPr>
                     </a:p>
                   </a:txBody>
-                  <a:tcPr marL="91440" marR="91440" marT="45720" marB="45720" anchor="ctr">
+                  <a:tcPr anchor="ctr">
                     <a:lnL w="12700" cap="flat" cmpd="sng" algn="ctr">
                       <a:solidFill>
                         <a:srgbClr val="DCE5EE"/>
@@ -5036,6 +4774,11 @@
                     </a:solidFill>
                   </a:tcPr>
                 </a:tc>
+                <a:extLst>
+                  <a:ext uri="{0D108BD9-81ED-4DB2-BD59-A6C34878D82A}">
+                    <a16:rowId xmlns:a16="http://schemas.microsoft.com/office/drawing/2014/main" val="10000"/>
+                  </a:ext>
+                </a:extLst>
               </a:tr>
               <a:tr h="402336">
                 <a:tc>
@@ -5043,7 +4786,7 @@
                     <a:bodyPr/>
                     <a:lstStyle/>
                     <a:p>
-                      <a:pPr indent="0" marL="0">
+                      <a:pPr marL="0" indent="0">
                         <a:buNone/>
                       </a:pPr>
                       <a:r>
@@ -5064,7 +4807,7 @@
                       </a:endParaRPr>
                     </a:p>
                   </a:txBody>
-                  <a:tcPr marL="91440" marR="91440" marT="45720" marB="45720" anchor="ctr">
+                  <a:tcPr anchor="ctr">
                     <a:lnL w="12700" cap="flat" cmpd="sng" algn="ctr">
                       <a:solidFill>
                         <a:srgbClr val="DCE5EE"/>
@@ -5111,7 +4854,7 @@
                     <a:bodyPr/>
                     <a:lstStyle/>
                     <a:p>
-                      <a:pPr indent="0" marL="0">
+                      <a:pPr marL="0" indent="0">
                         <a:buNone/>
                       </a:pPr>
                       <a:r>
@@ -5132,7 +4875,7 @@
                       </a:endParaRPr>
                     </a:p>
                   </a:txBody>
-                  <a:tcPr marL="91440" marR="91440" marT="45720" marB="45720" anchor="ctr">
+                  <a:tcPr anchor="ctr">
                     <a:lnL w="12700" cap="flat" cmpd="sng" algn="ctr">
                       <a:solidFill>
                         <a:srgbClr val="DCE5EE"/>
@@ -5174,6 +4917,11 @@
                     </a:solidFill>
                   </a:tcPr>
                 </a:tc>
+                <a:extLst>
+                  <a:ext uri="{0D108BD9-81ED-4DB2-BD59-A6C34878D82A}">
+                    <a16:rowId xmlns:a16="http://schemas.microsoft.com/office/drawing/2014/main" val="10001"/>
+                  </a:ext>
+                </a:extLst>
               </a:tr>
               <a:tr h="402336">
                 <a:tc>
@@ -5181,7 +4929,7 @@
                     <a:bodyPr/>
                     <a:lstStyle/>
                     <a:p>
-                      <a:pPr indent="0" marL="0">
+                      <a:pPr marL="0" indent="0">
                         <a:buNone/>
                       </a:pPr>
                       <a:r>
@@ -5202,7 +4950,7 @@
                       </a:endParaRPr>
                     </a:p>
                   </a:txBody>
-                  <a:tcPr marL="91440" marR="91440" marT="45720" marB="45720" anchor="ctr">
+                  <a:tcPr anchor="ctr">
                     <a:lnL w="12700" cap="flat" cmpd="sng" algn="ctr">
                       <a:solidFill>
                         <a:srgbClr val="DCE5EE"/>
@@ -5249,7 +4997,7 @@
                     <a:bodyPr/>
                     <a:lstStyle/>
                     <a:p>
-                      <a:pPr indent="0" marL="0">
+                      <a:pPr marL="0" indent="0">
                         <a:buNone/>
                       </a:pPr>
                       <a:r>
@@ -5270,7 +5018,7 @@
                       </a:endParaRPr>
                     </a:p>
                   </a:txBody>
-                  <a:tcPr marL="91440" marR="91440" marT="45720" marB="45720" anchor="ctr">
+                  <a:tcPr anchor="ctr">
                     <a:lnL w="12700" cap="flat" cmpd="sng" algn="ctr">
                       <a:solidFill>
                         <a:srgbClr val="DCE5EE"/>
@@ -5312,6 +5060,11 @@
                     </a:solidFill>
                   </a:tcPr>
                 </a:tc>
+                <a:extLst>
+                  <a:ext uri="{0D108BD9-81ED-4DB2-BD59-A6C34878D82A}">
+                    <a16:rowId xmlns:a16="http://schemas.microsoft.com/office/drawing/2014/main" val="10002"/>
+                  </a:ext>
+                </a:extLst>
               </a:tr>
               <a:tr h="402336">
                 <a:tc>
@@ -5319,7 +5072,7 @@
                     <a:bodyPr/>
                     <a:lstStyle/>
                     <a:p>
-                      <a:pPr indent="0" marL="0">
+                      <a:pPr marL="0" indent="0">
                         <a:buNone/>
                       </a:pPr>
                       <a:r>
@@ -5340,7 +5093,7 @@
                       </a:endParaRPr>
                     </a:p>
                   </a:txBody>
-                  <a:tcPr marL="91440" marR="91440" marT="45720" marB="45720" anchor="ctr">
+                  <a:tcPr anchor="ctr">
                     <a:lnL w="12700" cap="flat" cmpd="sng" algn="ctr">
                       <a:solidFill>
                         <a:srgbClr val="DCE5EE"/>
@@ -5387,7 +5140,7 @@
                     <a:bodyPr/>
                     <a:lstStyle/>
                     <a:p>
-                      <a:pPr indent="0" marL="0">
+                      <a:pPr marL="0" indent="0">
                         <a:buNone/>
                       </a:pPr>
                       <a:r>
@@ -5408,7 +5161,7 @@
                       </a:endParaRPr>
                     </a:p>
                   </a:txBody>
-                  <a:tcPr marL="91440" marR="91440" marT="45720" marB="45720" anchor="ctr">
+                  <a:tcPr anchor="ctr">
                     <a:lnL w="12700" cap="flat" cmpd="sng" algn="ctr">
                       <a:solidFill>
                         <a:srgbClr val="DCE5EE"/>
@@ -5450,6 +5203,11 @@
                     </a:solidFill>
                   </a:tcPr>
                 </a:tc>
+                <a:extLst>
+                  <a:ext uri="{0D108BD9-81ED-4DB2-BD59-A6C34878D82A}">
+                    <a16:rowId xmlns:a16="http://schemas.microsoft.com/office/drawing/2014/main" val="10003"/>
+                  </a:ext>
+                </a:extLst>
               </a:tr>
               <a:tr h="402336">
                 <a:tc>
@@ -5457,7 +5215,7 @@
                     <a:bodyPr/>
                     <a:lstStyle/>
                     <a:p>
-                      <a:pPr indent="0" marL="0">
+                      <a:pPr marL="0" indent="0">
                         <a:buNone/>
                       </a:pPr>
                       <a:r>
@@ -5478,7 +5236,7 @@
                       </a:endParaRPr>
                     </a:p>
                   </a:txBody>
-                  <a:tcPr marL="91440" marR="91440" marT="45720" marB="45720" anchor="ctr">
+                  <a:tcPr anchor="ctr">
                     <a:lnL w="12700" cap="flat" cmpd="sng" algn="ctr">
                       <a:solidFill>
                         <a:srgbClr val="DCE5EE"/>
@@ -5525,7 +5283,7 @@
                     <a:bodyPr/>
                     <a:lstStyle/>
                     <a:p>
-                      <a:pPr indent="0" marL="0">
+                      <a:pPr marL="0" indent="0">
                         <a:buNone/>
                       </a:pPr>
                       <a:r>
@@ -5546,7 +5304,7 @@
                       </a:endParaRPr>
                     </a:p>
                   </a:txBody>
-                  <a:tcPr marL="91440" marR="91440" marT="45720" marB="45720" anchor="ctr">
+                  <a:tcPr anchor="ctr">
                     <a:lnL w="12700" cap="flat" cmpd="sng" algn="ctr">
                       <a:solidFill>
                         <a:srgbClr val="DCE5EE"/>
@@ -5588,6 +5346,11 @@
                     </a:solidFill>
                   </a:tcPr>
                 </a:tc>
+                <a:extLst>
+                  <a:ext uri="{0D108BD9-81ED-4DB2-BD59-A6C34878D82A}">
+                    <a16:rowId xmlns:a16="http://schemas.microsoft.com/office/drawing/2014/main" val="10004"/>
+                  </a:ext>
+                </a:extLst>
               </a:tr>
               <a:tr h="402336">
                 <a:tc>
@@ -5595,7 +5358,7 @@
                     <a:bodyPr/>
                     <a:lstStyle/>
                     <a:p>
-                      <a:pPr indent="0" marL="0">
+                      <a:pPr marL="0" indent="0">
                         <a:buNone/>
                       </a:pPr>
                       <a:r>
@@ -5616,7 +5379,7 @@
                       </a:endParaRPr>
                     </a:p>
                   </a:txBody>
-                  <a:tcPr marL="91440" marR="91440" marT="45720" marB="45720" anchor="ctr">
+                  <a:tcPr anchor="ctr">
                     <a:lnL w="12700" cap="flat" cmpd="sng" algn="ctr">
                       <a:solidFill>
                         <a:srgbClr val="DCE5EE"/>
@@ -5663,7 +5426,7 @@
                     <a:bodyPr/>
                     <a:lstStyle/>
                     <a:p>
-                      <a:pPr indent="0" marL="0">
+                      <a:pPr marL="0" indent="0">
                         <a:buNone/>
                       </a:pPr>
                       <a:r>
@@ -5684,7 +5447,7 @@
                       </a:endParaRPr>
                     </a:p>
                   </a:txBody>
-                  <a:tcPr marL="91440" marR="91440" marT="45720" marB="45720" anchor="ctr">
+                  <a:tcPr anchor="ctr">
                     <a:lnL w="12700" cap="flat" cmpd="sng" algn="ctr">
                       <a:solidFill>
                         <a:srgbClr val="DCE5EE"/>
@@ -5726,6 +5489,11 @@
                     </a:solidFill>
                   </a:tcPr>
                 </a:tc>
+                <a:extLst>
+                  <a:ext uri="{0D108BD9-81ED-4DB2-BD59-A6C34878D82A}">
+                    <a16:rowId xmlns:a16="http://schemas.microsoft.com/office/drawing/2014/main" val="10005"/>
+                  </a:ext>
+                </a:extLst>
               </a:tr>
               <a:tr h="402336">
                 <a:tc>
@@ -5733,7 +5501,7 @@
                     <a:bodyPr/>
                     <a:lstStyle/>
                     <a:p>
-                      <a:pPr indent="0" marL="0">
+                      <a:pPr marL="0" indent="0">
                         <a:buNone/>
                       </a:pPr>
                       <a:r>
@@ -5754,7 +5522,7 @@
                       </a:endParaRPr>
                     </a:p>
                   </a:txBody>
-                  <a:tcPr marL="91440" marR="91440" marT="45720" marB="45720" anchor="ctr">
+                  <a:tcPr anchor="ctr">
                     <a:lnL w="12700" cap="flat" cmpd="sng" algn="ctr">
                       <a:solidFill>
                         <a:srgbClr val="DCE5EE"/>
@@ -5801,7 +5569,7 @@
                     <a:bodyPr/>
                     <a:lstStyle/>
                     <a:p>
-                      <a:pPr indent="0" marL="0">
+                      <a:pPr marL="0" indent="0">
                         <a:buNone/>
                       </a:pPr>
                       <a:r>
@@ -5822,7 +5590,7 @@
                       </a:endParaRPr>
                     </a:p>
                   </a:txBody>
-                  <a:tcPr marL="91440" marR="91440" marT="45720" marB="45720" anchor="ctr">
+                  <a:tcPr anchor="ctr">
                     <a:lnL w="12700" cap="flat" cmpd="sng" algn="ctr">
                       <a:solidFill>
                         <a:srgbClr val="DCE5EE"/>
@@ -5864,6 +5632,11 @@
                     </a:solidFill>
                   </a:tcPr>
                 </a:tc>
+                <a:extLst>
+                  <a:ext uri="{0D108BD9-81ED-4DB2-BD59-A6C34878D82A}">
+                    <a16:rowId xmlns:a16="http://schemas.microsoft.com/office/drawing/2014/main" val="10006"/>
+                  </a:ext>
+                </a:extLst>
               </a:tr>
             </a:tbl>
           </a:graphicData>
@@ -5885,6 +5658,7 @@
         <a:solidFill>
           <a:srgbClr val="FFFFFF"/>
         </a:solidFill>
+        <a:effectLst/>
       </p:bgPr>
     </p:bg>
     <p:spTree>
@@ -5922,11 +5696,11 @@
           <a:bodyPr wrap="square" lIns="0" tIns="0" rIns="0" bIns="0" rtlCol="0" anchor="ctr"/>
           <a:lstStyle/>
           <a:p>
-            <a:pPr indent="0" marL="0">
-              <a:buNone/>
-            </a:pPr>
-            <a:r>
-              <a:rPr lang="en-US" sz="1200" b="1" spc="200" kern="0" dirty="0">
+            <a:pPr marL="0" indent="0">
+              <a:buNone/>
+            </a:pPr>
+            <a:r>
+              <a:rPr lang="en-US" sz="1200" b="1" kern="0" spc="200" dirty="0">
                 <a:solidFill>
                   <a:srgbClr val="0B5EA8"/>
                 </a:solidFill>
@@ -5961,7 +5735,7 @@
           <a:bodyPr wrap="square" lIns="0" tIns="0" rIns="0" bIns="0" rtlCol="0" anchor="t"/>
           <a:lstStyle/>
           <a:p>
-            <a:pPr indent="0" marL="0">
+            <a:pPr marL="0" indent="0">
               <a:buNone/>
             </a:pPr>
             <a:r>
@@ -5981,14 +5755,14 @@
       </p:sp>
       <p:pic>
         <p:nvPicPr>
-          <p:cNvPr id="4" name="Image 0" descr="C:\TEMP\claude\D--SourceCode-ntust-InvestmentSimulation\a4c87170-020d-4b6b-adfe-2a756176eb57\scratchpad\ppt\img\trade-stock-us.png">    </p:cNvPr>
+          <p:cNvPr id="4" name="Image 0" descr="C:\TEMP\claude\D--SourceCode-ntust-InvestmentSimulation\a4c87170-020d-4b6b-adfe-2a756176eb57\scratchpad\ppt\img\trade-stock-us.png"/>
           <p:cNvPicPr>
             <a:picLocks noChangeAspect="1"/>
           </p:cNvPicPr>
           <p:nvPr/>
         </p:nvPicPr>
         <p:blipFill>
-          <a:blip r:embed="rId1"/>
+          <a:blip r:embed="rId3"/>
           <a:stretch>
             <a:fillRect/>
           </a:stretch>
@@ -6002,7 +5776,7 @@
             <a:avLst/>
           </a:prstGeom>
           <a:effectLst>
-            <a:outerShdw sx="100000" sy="100000" kx="0" ky="0" algn="bl" rotWithShape="0" blurRad="177800" dist="38100" dir="5400000">
+            <a:outerShdw blurRad="177800" dist="38100" dir="5400000" algn="bl" rotWithShape="0">
               <a:srgbClr val="0B2545">
                 <a:alpha val="18000"/>
               </a:srgbClr>
@@ -6012,14 +5786,14 @@
       </p:pic>
       <p:pic>
         <p:nvPicPr>
-          <p:cNvPr id="5" name="Image 1" descr="C:\TEMP\claude\D--SourceCode-ntust-InvestmentSimulation\a4c87170-020d-4b6b-adfe-2a756176eb57\scratchpad\ppt\img\trade-panel-us.png">    </p:cNvPr>
+          <p:cNvPr id="5" name="Image 1" descr="C:\TEMP\claude\D--SourceCode-ntust-InvestmentSimulation\a4c87170-020d-4b6b-adfe-2a756176eb57\scratchpad\ppt\img\trade-panel-us.png"/>
           <p:cNvPicPr>
             <a:picLocks noChangeAspect="1"/>
           </p:cNvPicPr>
           <p:nvPr/>
         </p:nvPicPr>
         <p:blipFill>
-          <a:blip r:embed="rId2"/>
+          <a:blip r:embed="rId4"/>
           <a:stretch>
             <a:fillRect/>
           </a:stretch>
@@ -6033,7 +5807,7 @@
             <a:avLst/>
           </a:prstGeom>
           <a:effectLst>
-            <a:outerShdw sx="100000" sy="100000" kx="0" ky="0" algn="bl" rotWithShape="0" blurRad="177800" dist="38100" dir="5400000">
+            <a:outerShdw blurRad="177800" dist="38100" dir="5400000" algn="bl" rotWithShape="0">
               <a:srgbClr val="0B2545">
                 <a:alpha val="18000"/>
               </a:srgbClr>
@@ -6089,7 +5863,7 @@
           <a:bodyPr wrap="square" lIns="0" tIns="0" rIns="0" bIns="0" rtlCol="0" anchor="ctr"/>
           <a:lstStyle/>
           <a:p>
-            <a:pPr indent="0" marL="0">
+            <a:pPr marL="0" indent="0">
               <a:buNone/>
             </a:pPr>
             <a:r>
@@ -6128,7 +5902,7 @@
           <a:bodyPr wrap="square" lIns="0" tIns="0" rIns="0" bIns="0" rtlCol="0" anchor="ctr"/>
           <a:lstStyle/>
           <a:p>
-            <a:pPr indent="0" marL="0">
+            <a:pPr marL="0" indent="0">
               <a:lnSpc>
                 <a:spcPct val="120000"/>
               </a:lnSpc>
@@ -6148,7 +5922,7 @@
             <a:endParaRPr lang="en-US" sz="1200" dirty="0"/>
           </a:p>
           <a:p>
-            <a:pPr indent="0" marL="0">
+            <a:pPr marL="0" indent="0">
               <a:lnSpc>
                 <a:spcPct val="120000"/>
               </a:lnSpc>
@@ -6168,7 +5942,7 @@
             <a:endParaRPr lang="en-US" sz="1200" dirty="0"/>
           </a:p>
           <a:p>
-            <a:pPr indent="0" marL="0">
+            <a:pPr marL="0" indent="0">
               <a:lnSpc>
                 <a:spcPct val="120000"/>
               </a:lnSpc>
@@ -6177,7 +5951,7 @@
             <a:endParaRPr lang="en-US" sz="1200" dirty="0"/>
           </a:p>
           <a:p>
-            <a:pPr indent="0" marL="0">
+            <a:pPr marL="0" indent="0">
               <a:lnSpc>
                 <a:spcPct val="120000"/>
               </a:lnSpc>
@@ -6197,7 +5971,7 @@
             <a:endParaRPr lang="en-US" sz="1200" dirty="0"/>
           </a:p>
           <a:p>
-            <a:pPr indent="0" marL="0">
+            <a:pPr marL="0" indent="0">
               <a:lnSpc>
                 <a:spcPct val="120000"/>
               </a:lnSpc>
@@ -6206,7 +5980,7 @@
             <a:endParaRPr lang="en-US" sz="1200" dirty="0"/>
           </a:p>
           <a:p>
-            <a:pPr indent="0" marL="0">
+            <a:pPr marL="0" indent="0">
               <a:lnSpc>
                 <a:spcPct val="120000"/>
               </a:lnSpc>
@@ -6226,7 +6000,7 @@
             <a:endParaRPr lang="en-US" sz="1200" dirty="0"/>
           </a:p>
           <a:p>
-            <a:pPr indent="0" marL="0">
+            <a:pPr marL="0" indent="0">
               <a:lnSpc>
                 <a:spcPct val="120000"/>
               </a:lnSpc>
@@ -6246,7 +6020,7 @@
             <a:endParaRPr lang="en-US" sz="1200" dirty="0"/>
           </a:p>
           <a:p>
-            <a:pPr indent="0" marL="0">
+            <a:pPr marL="0" indent="0">
               <a:lnSpc>
                 <a:spcPct val="120000"/>
               </a:lnSpc>
@@ -6266,7 +6040,7 @@
             <a:endParaRPr lang="en-US" sz="1200" dirty="0"/>
           </a:p>
           <a:p>
-            <a:pPr indent="0" marL="0">
+            <a:pPr marL="0" indent="0">
               <a:lnSpc>
                 <a:spcPct val="120000"/>
               </a:lnSpc>
@@ -6275,7 +6049,7 @@
             <a:endParaRPr lang="en-US" sz="1200" dirty="0"/>
           </a:p>
           <a:p>
-            <a:pPr indent="0" marL="0">
+            <a:pPr marL="0" indent="0">
               <a:lnSpc>
                 <a:spcPct val="120000"/>
               </a:lnSpc>
@@ -6295,7 +6069,7 @@
             <a:endParaRPr lang="en-US" sz="1200" dirty="0"/>
           </a:p>
           <a:p>
-            <a:pPr indent="0" marL="0">
+            <a:pPr marL="0" indent="0">
               <a:lnSpc>
                 <a:spcPct val="120000"/>
               </a:lnSpc>
@@ -6304,7 +6078,7 @@
             <a:endParaRPr lang="en-US" sz="1200" dirty="0"/>
           </a:p>
           <a:p>
-            <a:pPr indent="0" marL="0">
+            <a:pPr marL="0" indent="0">
               <a:lnSpc>
                 <a:spcPct val="120000"/>
               </a:lnSpc>
@@ -6346,7 +6120,7 @@
           <a:bodyPr wrap="square" lIns="0" tIns="0" rIns="0" bIns="0" rtlCol="0" anchor="ctr"/>
           <a:lstStyle/>
           <a:p>
-            <a:pPr indent="0" marL="0">
+            <a:pPr marL="0" indent="0">
               <a:buNone/>
             </a:pPr>
             <a:r>
@@ -6380,6 +6154,7 @@
         <a:solidFill>
           <a:srgbClr val="FFFFFF"/>
         </a:solidFill>
+        <a:effectLst/>
       </p:bgPr>
     </p:bg>
     <p:spTree>
@@ -6417,11 +6192,11 @@
           <a:bodyPr wrap="square" lIns="0" tIns="0" rIns="0" bIns="0" rtlCol="0" anchor="ctr"/>
           <a:lstStyle/>
           <a:p>
-            <a:pPr indent="0" marL="0">
-              <a:buNone/>
-            </a:pPr>
-            <a:r>
-              <a:rPr lang="en-US" sz="1200" b="1" spc="200" kern="0" dirty="0">
+            <a:pPr marL="0" indent="0">
+              <a:buNone/>
+            </a:pPr>
+            <a:r>
+              <a:rPr lang="en-US" sz="1200" b="1" kern="0" spc="200" dirty="0">
                 <a:solidFill>
                   <a:srgbClr val="0B5EA8"/>
                 </a:solidFill>
@@ -6456,7 +6231,7 @@
           <a:bodyPr wrap="square" lIns="0" tIns="0" rIns="0" bIns="0" rtlCol="0" anchor="t"/>
           <a:lstStyle/>
           <a:p>
-            <a:pPr indent="0" marL="0">
+            <a:pPr marL="0" indent="0">
               <a:buNone/>
             </a:pPr>
             <a:r>
@@ -6522,7 +6297,7 @@
           <a:bodyPr wrap="square" lIns="0" tIns="0" rIns="0" bIns="0" rtlCol="0" anchor="ctr"/>
           <a:lstStyle/>
           <a:p>
-            <a:pPr algn="ctr" indent="0" marL="0">
+            <a:pPr marL="0" indent="0" algn="ctr">
               <a:buNone/>
             </a:pPr>
             <a:r>
@@ -6561,7 +6336,7 @@
           <a:bodyPr wrap="square" lIns="0" tIns="0" rIns="0" bIns="0" rtlCol="0" anchor="ctr"/>
           <a:lstStyle/>
           <a:p>
-            <a:pPr indent="0" marL="0">
+            <a:pPr marL="0" indent="0">
               <a:buNone/>
             </a:pPr>
             <a:r>
@@ -6602,8 +6377,20 @@
             <a:tbl>
               <a:tblPr/>
               <a:tblGrid>
-                <a:gridCol w="3017520"/>
-                <a:gridCol w="2286000"/>
+                <a:gridCol w="3017520">
+                  <a:extLst>
+                    <a:ext uri="{9D8B030D-6E8A-4147-A177-3AD203B41FA5}">
+                      <a16:colId xmlns:a16="http://schemas.microsoft.com/office/drawing/2014/main" val="20000"/>
+                    </a:ext>
+                  </a:extLst>
+                </a:gridCol>
+                <a:gridCol w="2286000">
+                  <a:extLst>
+                    <a:ext uri="{9D8B030D-6E8A-4147-A177-3AD203B41FA5}">
+                      <a16:colId xmlns:a16="http://schemas.microsoft.com/office/drawing/2014/main" val="20001"/>
+                    </a:ext>
+                  </a:extLst>
+                </a:gridCol>
               </a:tblGrid>
               <a:tr h="420624">
                 <a:tc>
@@ -6611,7 +6398,7 @@
                     <a:bodyPr/>
                     <a:lstStyle/>
                     <a:p>
-                      <a:pPr indent="0" marL="0">
+                      <a:pPr marL="0" indent="0">
                         <a:buNone/>
                       </a:pPr>
                       <a:r>
@@ -6632,7 +6419,7 @@
                       </a:endParaRPr>
                     </a:p>
                   </a:txBody>
-                  <a:tcPr marL="91440" marR="91440" marT="45720" marB="45720" anchor="ctr">
+                  <a:tcPr anchor="ctr">
                     <a:lnL w="12700" cap="flat" cmpd="sng" algn="ctr">
                       <a:solidFill>
                         <a:srgbClr val="DCE5EE"/>
@@ -6679,7 +6466,7 @@
                     <a:bodyPr/>
                     <a:lstStyle/>
                     <a:p>
-                      <a:pPr indent="0" marL="0">
+                      <a:pPr marL="0" indent="0">
                         <a:buNone/>
                       </a:pPr>
                       <a:r>
@@ -6700,7 +6487,7 @@
                       </a:endParaRPr>
                     </a:p>
                   </a:txBody>
-                  <a:tcPr marL="91440" marR="91440" marT="45720" marB="45720" anchor="ctr">
+                  <a:tcPr anchor="ctr">
                     <a:lnL w="12700" cap="flat" cmpd="sng" algn="ctr">
                       <a:solidFill>
                         <a:srgbClr val="DCE5EE"/>
@@ -6742,6 +6529,11 @@
                     </a:solidFill>
                   </a:tcPr>
                 </a:tc>
+                <a:extLst>
+                  <a:ext uri="{0D108BD9-81ED-4DB2-BD59-A6C34878D82A}">
+                    <a16:rowId xmlns:a16="http://schemas.microsoft.com/office/drawing/2014/main" val="10000"/>
+                  </a:ext>
+                </a:extLst>
               </a:tr>
               <a:tr h="420624">
                 <a:tc>
@@ -6749,7 +6541,7 @@
                     <a:bodyPr/>
                     <a:lstStyle/>
                     <a:p>
-                      <a:pPr indent="0" marL="0">
+                      <a:pPr marL="0" indent="0">
                         <a:buNone/>
                       </a:pPr>
                       <a:r>
@@ -6770,7 +6562,7 @@
                       </a:endParaRPr>
                     </a:p>
                   </a:txBody>
-                  <a:tcPr marL="91440" marR="91440" marT="45720" marB="45720" anchor="ctr">
+                  <a:tcPr anchor="ctr">
                     <a:lnL w="12700" cap="flat" cmpd="sng" algn="ctr">
                       <a:solidFill>
                         <a:srgbClr val="DCE5EE"/>
@@ -6817,7 +6609,7 @@
                     <a:bodyPr/>
                     <a:lstStyle/>
                     <a:p>
-                      <a:pPr indent="0" marL="0">
+                      <a:pPr marL="0" indent="0">
                         <a:buNone/>
                       </a:pPr>
                       <a:r>
@@ -6838,7 +6630,7 @@
                       </a:endParaRPr>
                     </a:p>
                   </a:txBody>
-                  <a:tcPr marL="91440" marR="91440" marT="45720" marB="45720" anchor="ctr">
+                  <a:tcPr anchor="ctr">
                     <a:lnL w="12700" cap="flat" cmpd="sng" algn="ctr">
                       <a:solidFill>
                         <a:srgbClr val="DCE5EE"/>
@@ -6880,6 +6672,11 @@
                     </a:solidFill>
                   </a:tcPr>
                 </a:tc>
+                <a:extLst>
+                  <a:ext uri="{0D108BD9-81ED-4DB2-BD59-A6C34878D82A}">
+                    <a16:rowId xmlns:a16="http://schemas.microsoft.com/office/drawing/2014/main" val="10001"/>
+                  </a:ext>
+                </a:extLst>
               </a:tr>
               <a:tr h="420624">
                 <a:tc>
@@ -6887,7 +6684,7 @@
                     <a:bodyPr/>
                     <a:lstStyle/>
                     <a:p>
-                      <a:pPr indent="0" marL="0">
+                      <a:pPr marL="0" indent="0">
                         <a:buNone/>
                       </a:pPr>
                       <a:r>
@@ -6908,7 +6705,7 @@
                       </a:endParaRPr>
                     </a:p>
                   </a:txBody>
-                  <a:tcPr marL="91440" marR="91440" marT="45720" marB="45720" anchor="ctr">
+                  <a:tcPr anchor="ctr">
                     <a:lnL w="12700" cap="flat" cmpd="sng" algn="ctr">
                       <a:solidFill>
                         <a:srgbClr val="DCE5EE"/>
@@ -6955,7 +6752,7 @@
                     <a:bodyPr/>
                     <a:lstStyle/>
                     <a:p>
-                      <a:pPr indent="0" marL="0">
+                      <a:pPr marL="0" indent="0">
                         <a:buNone/>
                       </a:pPr>
                       <a:r>
@@ -6976,7 +6773,7 @@
                       </a:endParaRPr>
                     </a:p>
                   </a:txBody>
-                  <a:tcPr marL="91440" marR="91440" marT="45720" marB="45720" anchor="ctr">
+                  <a:tcPr anchor="ctr">
                     <a:lnL w="12700" cap="flat" cmpd="sng" algn="ctr">
                       <a:solidFill>
                         <a:srgbClr val="DCE5EE"/>
@@ -7018,6 +6815,11 @@
                     </a:solidFill>
                   </a:tcPr>
                 </a:tc>
+                <a:extLst>
+                  <a:ext uri="{0D108BD9-81ED-4DB2-BD59-A6C34878D82A}">
+                    <a16:rowId xmlns:a16="http://schemas.microsoft.com/office/drawing/2014/main" val="10002"/>
+                  </a:ext>
+                </a:extLst>
               </a:tr>
               <a:tr h="420624">
                 <a:tc>
@@ -7025,7 +6827,7 @@
                     <a:bodyPr/>
                     <a:lstStyle/>
                     <a:p>
-                      <a:pPr indent="0" marL="0">
+                      <a:pPr marL="0" indent="0">
                         <a:buNone/>
                       </a:pPr>
                       <a:r>
@@ -7046,7 +6848,7 @@
                       </a:endParaRPr>
                     </a:p>
                   </a:txBody>
-                  <a:tcPr marL="91440" marR="91440" marT="45720" marB="45720" anchor="ctr">
+                  <a:tcPr anchor="ctr">
                     <a:lnL w="12700" cap="flat" cmpd="sng" algn="ctr">
                       <a:solidFill>
                         <a:srgbClr val="DCE5EE"/>
@@ -7093,7 +6895,7 @@
                     <a:bodyPr/>
                     <a:lstStyle/>
                     <a:p>
-                      <a:pPr indent="0" marL="0">
+                      <a:pPr marL="0" indent="0">
                         <a:buNone/>
                       </a:pPr>
                       <a:r>
@@ -7114,7 +6916,7 @@
                       </a:endParaRPr>
                     </a:p>
                   </a:txBody>
-                  <a:tcPr marL="91440" marR="91440" marT="45720" marB="45720" anchor="ctr">
+                  <a:tcPr anchor="ctr">
                     <a:lnL w="12700" cap="flat" cmpd="sng" algn="ctr">
                       <a:solidFill>
                         <a:srgbClr val="DCE5EE"/>
@@ -7156,6 +6958,11 @@
                     </a:solidFill>
                   </a:tcPr>
                 </a:tc>
+                <a:extLst>
+                  <a:ext uri="{0D108BD9-81ED-4DB2-BD59-A6C34878D82A}">
+                    <a16:rowId xmlns:a16="http://schemas.microsoft.com/office/drawing/2014/main" val="10003"/>
+                  </a:ext>
+                </a:extLst>
               </a:tr>
               <a:tr h="420624">
                 <a:tc>
@@ -7163,7 +6970,7 @@
                     <a:bodyPr/>
                     <a:lstStyle/>
                     <a:p>
-                      <a:pPr indent="0" marL="0">
+                      <a:pPr marL="0" indent="0">
                         <a:buNone/>
                       </a:pPr>
                       <a:r>
@@ -7184,7 +6991,7 @@
                       </a:endParaRPr>
                     </a:p>
                   </a:txBody>
-                  <a:tcPr marL="91440" marR="91440" marT="45720" marB="45720" anchor="ctr">
+                  <a:tcPr anchor="ctr">
                     <a:lnL w="12700" cap="flat" cmpd="sng" algn="ctr">
                       <a:solidFill>
                         <a:srgbClr val="DCE5EE"/>
@@ -7231,7 +7038,7 @@
                     <a:bodyPr/>
                     <a:lstStyle/>
                     <a:p>
-                      <a:pPr indent="0" marL="0">
+                      <a:pPr marL="0" indent="0">
                         <a:buNone/>
                       </a:pPr>
                       <a:r>
@@ -7252,7 +7059,7 @@
                       </a:endParaRPr>
                     </a:p>
                   </a:txBody>
-                  <a:tcPr marL="91440" marR="91440" marT="45720" marB="45720" anchor="ctr">
+                  <a:tcPr anchor="ctr">
                     <a:lnL w="12700" cap="flat" cmpd="sng" algn="ctr">
                       <a:solidFill>
                         <a:srgbClr val="DCE5EE"/>
@@ -7294,6 +7101,11 @@
                     </a:solidFill>
                   </a:tcPr>
                 </a:tc>
+                <a:extLst>
+                  <a:ext uri="{0D108BD9-81ED-4DB2-BD59-A6C34878D82A}">
+                    <a16:rowId xmlns:a16="http://schemas.microsoft.com/office/drawing/2014/main" val="10004"/>
+                  </a:ext>
+                </a:extLst>
               </a:tr>
             </a:tbl>
           </a:graphicData>
@@ -7347,7 +7159,7 @@
           <a:bodyPr wrap="square" lIns="0" tIns="0" rIns="0" bIns="0" rtlCol="0" anchor="ctr"/>
           <a:lstStyle/>
           <a:p>
-            <a:pPr indent="0" marL="0">
+            <a:pPr marL="0" indent="0">
               <a:buNone/>
             </a:pPr>
             <a:r>
@@ -7386,7 +7198,7 @@
           <a:bodyPr wrap="square" lIns="0" tIns="0" rIns="0" bIns="0" rtlCol="0" anchor="ctr"/>
           <a:lstStyle/>
           <a:p>
-            <a:pPr indent="0" marL="0">
+            <a:pPr marL="0" indent="0">
               <a:lnSpc>
                 <a:spcPct val="135000"/>
               </a:lnSpc>
@@ -7406,7 +7218,7 @@
             <a:endParaRPr lang="en-US" sz="1400" dirty="0"/>
           </a:p>
           <a:p>
-            <a:pPr indent="0" marL="0">
+            <a:pPr marL="0" indent="0">
               <a:lnSpc>
                 <a:spcPct val="135000"/>
               </a:lnSpc>
@@ -7415,7 +7227,7 @@
             <a:endParaRPr lang="en-US" sz="1400" dirty="0"/>
           </a:p>
           <a:p>
-            <a:pPr indent="0" marL="0">
+            <a:pPr marL="0" indent="0">
               <a:lnSpc>
                 <a:spcPct val="135000"/>
               </a:lnSpc>
@@ -7435,7 +7247,7 @@
             <a:endParaRPr lang="en-US" sz="1400" dirty="0"/>
           </a:p>
           <a:p>
-            <a:pPr indent="0" marL="0">
+            <a:pPr marL="0" indent="0">
               <a:lnSpc>
                 <a:spcPct val="135000"/>
               </a:lnSpc>
@@ -7472,6 +7284,7 @@
         <a:solidFill>
           <a:srgbClr val="FFFFFF"/>
         </a:solidFill>
+        <a:effectLst/>
       </p:bgPr>
     </p:bg>
     <p:spTree>
@@ -7509,11 +7322,11 @@
           <a:bodyPr wrap="square" lIns="0" tIns="0" rIns="0" bIns="0" rtlCol="0" anchor="ctr"/>
           <a:lstStyle/>
           <a:p>
-            <a:pPr indent="0" marL="0">
-              <a:buNone/>
-            </a:pPr>
-            <a:r>
-              <a:rPr lang="en-US" sz="1200" b="1" spc="200" kern="0" dirty="0">
+            <a:pPr marL="0" indent="0">
+              <a:buNone/>
+            </a:pPr>
+            <a:r>
+              <a:rPr lang="en-US" sz="1200" b="1" kern="0" spc="200" dirty="0">
                 <a:solidFill>
                   <a:srgbClr val="0B5EA8"/>
                 </a:solidFill>
@@ -7548,7 +7361,7 @@
           <a:bodyPr wrap="square" lIns="0" tIns="0" rIns="0" bIns="0" rtlCol="0" anchor="t"/>
           <a:lstStyle/>
           <a:p>
-            <a:pPr indent="0" marL="0">
+            <a:pPr marL="0" indent="0">
               <a:buNone/>
             </a:pPr>
             <a:r>
@@ -7589,10 +7402,34 @@
             <a:tbl>
               <a:tblPr/>
               <a:tblGrid>
-                <a:gridCol w="3017520"/>
-                <a:gridCol w="2377440"/>
-                <a:gridCol w="2651760"/>
-                <a:gridCol w="3017520"/>
+                <a:gridCol w="3017520">
+                  <a:extLst>
+                    <a:ext uri="{9D8B030D-6E8A-4147-A177-3AD203B41FA5}">
+                      <a16:colId xmlns:a16="http://schemas.microsoft.com/office/drawing/2014/main" val="20000"/>
+                    </a:ext>
+                  </a:extLst>
+                </a:gridCol>
+                <a:gridCol w="2377440">
+                  <a:extLst>
+                    <a:ext uri="{9D8B030D-6E8A-4147-A177-3AD203B41FA5}">
+                      <a16:colId xmlns:a16="http://schemas.microsoft.com/office/drawing/2014/main" val="20001"/>
+                    </a:ext>
+                  </a:extLst>
+                </a:gridCol>
+                <a:gridCol w="2651760">
+                  <a:extLst>
+                    <a:ext uri="{9D8B030D-6E8A-4147-A177-3AD203B41FA5}">
+                      <a16:colId xmlns:a16="http://schemas.microsoft.com/office/drawing/2014/main" val="20002"/>
+                    </a:ext>
+                  </a:extLst>
+                </a:gridCol>
+                <a:gridCol w="3017520">
+                  <a:extLst>
+                    <a:ext uri="{9D8B030D-6E8A-4147-A177-3AD203B41FA5}">
+                      <a16:colId xmlns:a16="http://schemas.microsoft.com/office/drawing/2014/main" val="20003"/>
+                    </a:ext>
+                  </a:extLst>
+                </a:gridCol>
               </a:tblGrid>
               <a:tr h="685800">
                 <a:tc>
@@ -7600,7 +7437,7 @@
                     <a:bodyPr/>
                     <a:lstStyle/>
                     <a:p>
-                      <a:pPr indent="0" marL="0">
+                      <a:pPr marL="0" indent="0">
                         <a:buNone/>
                       </a:pPr>
                       <a:r>
@@ -7621,7 +7458,7 @@
                       </a:endParaRPr>
                     </a:p>
                   </a:txBody>
-                  <a:tcPr marL="91440" marR="91440" marT="45720" marB="45720" anchor="ctr">
+                  <a:tcPr anchor="ctr">
                     <a:lnL w="12700" cap="flat" cmpd="sng" algn="ctr">
                       <a:solidFill>
                         <a:srgbClr val="DCE5EE"/>
@@ -7668,7 +7505,7 @@
                     <a:bodyPr/>
                     <a:lstStyle/>
                     <a:p>
-                      <a:pPr indent="0" marL="0">
+                      <a:pPr marL="0" indent="0">
                         <a:buNone/>
                       </a:pPr>
                       <a:r>
@@ -7689,7 +7526,7 @@
                       </a:endParaRPr>
                     </a:p>
                   </a:txBody>
-                  <a:tcPr marL="91440" marR="91440" marT="45720" marB="45720" anchor="ctr">
+                  <a:tcPr anchor="ctr">
                     <a:lnL w="12700" cap="flat" cmpd="sng" algn="ctr">
                       <a:solidFill>
                         <a:srgbClr val="DCE5EE"/>
@@ -7736,7 +7573,7 @@
                     <a:bodyPr/>
                     <a:lstStyle/>
                     <a:p>
-                      <a:pPr indent="0" marL="0">
+                      <a:pPr marL="0" indent="0">
                         <a:buNone/>
                       </a:pPr>
                       <a:r>
@@ -7757,7 +7594,7 @@
                       </a:endParaRPr>
                     </a:p>
                   </a:txBody>
-                  <a:tcPr marL="91440" marR="91440" marT="45720" marB="45720" anchor="ctr">
+                  <a:tcPr anchor="ctr">
                     <a:lnL w="12700" cap="flat" cmpd="sng" algn="ctr">
                       <a:solidFill>
                         <a:srgbClr val="DCE5EE"/>
@@ -7804,7 +7641,7 @@
                     <a:bodyPr/>
                     <a:lstStyle/>
                     <a:p>
-                      <a:pPr indent="0" marL="0">
+                      <a:pPr marL="0" indent="0">
                         <a:buNone/>
                       </a:pPr>
                       <a:r>
@@ -7825,7 +7662,7 @@
                       </a:endParaRPr>
                     </a:p>
                   </a:txBody>
-                  <a:tcPr marL="91440" marR="91440" marT="45720" marB="45720" anchor="ctr">
+                  <a:tcPr anchor="ctr">
                     <a:lnL w="12700" cap="flat" cmpd="sng" algn="ctr">
                       <a:solidFill>
                         <a:srgbClr val="DCE5EE"/>
@@ -7867,6 +7704,11 @@
                     </a:solidFill>
                   </a:tcPr>
                 </a:tc>
+                <a:extLst>
+                  <a:ext uri="{0D108BD9-81ED-4DB2-BD59-A6C34878D82A}">
+                    <a16:rowId xmlns:a16="http://schemas.microsoft.com/office/drawing/2014/main" val="10000"/>
+                  </a:ext>
+                </a:extLst>
               </a:tr>
               <a:tr h="685800">
                 <a:tc>
@@ -7874,7 +7716,7 @@
                     <a:bodyPr/>
                     <a:lstStyle/>
                     <a:p>
-                      <a:pPr indent="0" marL="0">
+                      <a:pPr marL="0" indent="0">
                         <a:buNone/>
                       </a:pPr>
                       <a:r>
@@ -7895,7 +7737,7 @@
                       </a:endParaRPr>
                     </a:p>
                   </a:txBody>
-                  <a:tcPr marL="91440" marR="91440" marT="45720" marB="45720" anchor="ctr">
+                  <a:tcPr anchor="ctr">
                     <a:lnL w="12700" cap="flat" cmpd="sng" algn="ctr">
                       <a:solidFill>
                         <a:srgbClr val="DCE5EE"/>
@@ -7942,7 +7784,7 @@
                     <a:bodyPr/>
                     <a:lstStyle/>
                     <a:p>
-                      <a:pPr indent="0" marL="0">
+                      <a:pPr marL="0" indent="0">
                         <a:buNone/>
                       </a:pPr>
                       <a:r>
@@ -7963,7 +7805,7 @@
                       </a:endParaRPr>
                     </a:p>
                   </a:txBody>
-                  <a:tcPr marL="91440" marR="91440" marT="45720" marB="45720" anchor="ctr">
+                  <a:tcPr anchor="ctr">
                     <a:lnL w="12700" cap="flat" cmpd="sng" algn="ctr">
                       <a:solidFill>
                         <a:srgbClr val="DCE5EE"/>
@@ -8010,7 +7852,7 @@
                     <a:bodyPr/>
                     <a:lstStyle/>
                     <a:p>
-                      <a:pPr indent="0" marL="0">
+                      <a:pPr marL="0" indent="0">
                         <a:buNone/>
                       </a:pPr>
                       <a:r>
@@ -8031,7 +7873,7 @@
                       </a:endParaRPr>
                     </a:p>
                   </a:txBody>
-                  <a:tcPr marL="91440" marR="91440" marT="45720" marB="45720" anchor="ctr">
+                  <a:tcPr anchor="ctr">
                     <a:lnL w="12700" cap="flat" cmpd="sng" algn="ctr">
                       <a:solidFill>
                         <a:srgbClr val="DCE5EE"/>
@@ -8078,7 +7920,7 @@
                     <a:bodyPr/>
                     <a:lstStyle/>
                     <a:p>
-                      <a:pPr indent="0" marL="0">
+                      <a:pPr marL="0" indent="0">
                         <a:buNone/>
                       </a:pPr>
                       <a:r>
@@ -8099,7 +7941,7 @@
                       </a:endParaRPr>
                     </a:p>
                   </a:txBody>
-                  <a:tcPr marL="91440" marR="91440" marT="45720" marB="45720" anchor="ctr">
+                  <a:tcPr anchor="ctr">
                     <a:lnL w="12700" cap="flat" cmpd="sng" algn="ctr">
                       <a:solidFill>
                         <a:srgbClr val="DCE5EE"/>
@@ -8141,6 +7983,11 @@
                     </a:solidFill>
                   </a:tcPr>
                 </a:tc>
+                <a:extLst>
+                  <a:ext uri="{0D108BD9-81ED-4DB2-BD59-A6C34878D82A}">
+                    <a16:rowId xmlns:a16="http://schemas.microsoft.com/office/drawing/2014/main" val="10001"/>
+                  </a:ext>
+                </a:extLst>
               </a:tr>
               <a:tr h="685800">
                 <a:tc>
@@ -8148,7 +7995,7 @@
                     <a:bodyPr/>
                     <a:lstStyle/>
                     <a:p>
-                      <a:pPr indent="0" marL="0">
+                      <a:pPr marL="0" indent="0">
                         <a:buNone/>
                       </a:pPr>
                       <a:r>
@@ -8169,7 +8016,7 @@
                       </a:endParaRPr>
                     </a:p>
                   </a:txBody>
-                  <a:tcPr marL="91440" marR="91440" marT="45720" marB="45720" anchor="ctr">
+                  <a:tcPr anchor="ctr">
                     <a:lnL w="12700" cap="flat" cmpd="sng" algn="ctr">
                       <a:solidFill>
                         <a:srgbClr val="DCE5EE"/>
@@ -8216,7 +8063,7 @@
                     <a:bodyPr/>
                     <a:lstStyle/>
                     <a:p>
-                      <a:pPr indent="0" marL="0">
+                      <a:pPr marL="0" indent="0">
                         <a:buNone/>
                       </a:pPr>
                       <a:r>
@@ -8237,7 +8084,7 @@
                       </a:endParaRPr>
                     </a:p>
                   </a:txBody>
-                  <a:tcPr marL="91440" marR="91440" marT="45720" marB="45720" anchor="ctr">
+                  <a:tcPr anchor="ctr">
                     <a:lnL w="12700" cap="flat" cmpd="sng" algn="ctr">
                       <a:solidFill>
                         <a:srgbClr val="DCE5EE"/>
@@ -8284,7 +8131,7 @@
                     <a:bodyPr/>
                     <a:lstStyle/>
                     <a:p>
-                      <a:pPr indent="0" marL="0">
+                      <a:pPr marL="0" indent="0">
                         <a:buNone/>
                       </a:pPr>
                       <a:r>
@@ -8305,7 +8152,7 @@
                       </a:endParaRPr>
                     </a:p>
                   </a:txBody>
-                  <a:tcPr marL="91440" marR="91440" marT="45720" marB="45720" anchor="ctr">
+                  <a:tcPr anchor="ctr">
                     <a:lnL w="12700" cap="flat" cmpd="sng" algn="ctr">
                       <a:solidFill>
                         <a:srgbClr val="DCE5EE"/>
@@ -8352,7 +8199,7 @@
                     <a:bodyPr/>
                     <a:lstStyle/>
                     <a:p>
-                      <a:pPr indent="0" marL="0">
+                      <a:pPr marL="0" indent="0">
                         <a:buNone/>
                       </a:pPr>
                       <a:r>
@@ -8373,7 +8220,7 @@
                       </a:endParaRPr>
                     </a:p>
                   </a:txBody>
-                  <a:tcPr marL="91440" marR="91440" marT="45720" marB="45720" anchor="ctr">
+                  <a:tcPr anchor="ctr">
                     <a:lnL w="12700" cap="flat" cmpd="sng" algn="ctr">
                       <a:solidFill>
                         <a:srgbClr val="DCE5EE"/>
@@ -8415,6 +8262,11 @@
                     </a:solidFill>
                   </a:tcPr>
                 </a:tc>
+                <a:extLst>
+                  <a:ext uri="{0D108BD9-81ED-4DB2-BD59-A6C34878D82A}">
+                    <a16:rowId xmlns:a16="http://schemas.microsoft.com/office/drawing/2014/main" val="10002"/>
+                  </a:ext>
+                </a:extLst>
               </a:tr>
               <a:tr h="685800">
                 <a:tc>
@@ -8422,7 +8274,7 @@
                     <a:bodyPr/>
                     <a:lstStyle/>
                     <a:p>
-                      <a:pPr indent="0" marL="0">
+                      <a:pPr marL="0" indent="0">
                         <a:buNone/>
                       </a:pPr>
                       <a:r>
@@ -8443,7 +8295,7 @@
                       </a:endParaRPr>
                     </a:p>
                   </a:txBody>
-                  <a:tcPr marL="91440" marR="91440" marT="45720" marB="45720" anchor="ctr">
+                  <a:tcPr anchor="ctr">
                     <a:lnL w="12700" cap="flat" cmpd="sng" algn="ctr">
                       <a:solidFill>
                         <a:srgbClr val="DCE5EE"/>
@@ -8490,7 +8342,7 @@
                     <a:bodyPr/>
                     <a:lstStyle/>
                     <a:p>
-                      <a:pPr indent="0" marL="0">
+                      <a:pPr marL="0" indent="0">
                         <a:buNone/>
                       </a:pPr>
                       <a:r>
@@ -8511,7 +8363,7 @@
                       </a:endParaRPr>
                     </a:p>
                   </a:txBody>
-                  <a:tcPr marL="91440" marR="91440" marT="45720" marB="45720" anchor="ctr">
+                  <a:tcPr anchor="ctr">
                     <a:lnL w="12700" cap="flat" cmpd="sng" algn="ctr">
                       <a:solidFill>
                         <a:srgbClr val="DCE5EE"/>
@@ -8558,7 +8410,7 @@
                     <a:bodyPr/>
                     <a:lstStyle/>
                     <a:p>
-                      <a:pPr indent="0" marL="0">
+                      <a:pPr marL="0" indent="0">
                         <a:buNone/>
                       </a:pPr>
                       <a:r>
@@ -8579,7 +8431,7 @@
                       </a:endParaRPr>
                     </a:p>
                   </a:txBody>
-                  <a:tcPr marL="91440" marR="91440" marT="45720" marB="45720" anchor="ctr">
+                  <a:tcPr anchor="ctr">
                     <a:lnL w="12700" cap="flat" cmpd="sng" algn="ctr">
                       <a:solidFill>
                         <a:srgbClr val="DCE5EE"/>
@@ -8626,7 +8478,7 @@
                     <a:bodyPr/>
                     <a:lstStyle/>
                     <a:p>
-                      <a:pPr indent="0" marL="0">
+                      <a:pPr marL="0" indent="0">
                         <a:buNone/>
                       </a:pPr>
                       <a:r>
@@ -8647,7 +8499,7 @@
                       </a:endParaRPr>
                     </a:p>
                   </a:txBody>
-                  <a:tcPr marL="91440" marR="91440" marT="45720" marB="45720" anchor="ctr">
+                  <a:tcPr anchor="ctr">
                     <a:lnL w="12700" cap="flat" cmpd="sng" algn="ctr">
                       <a:solidFill>
                         <a:srgbClr val="DCE5EE"/>
@@ -8689,6 +8541,11 @@
                     </a:solidFill>
                   </a:tcPr>
                 </a:tc>
+                <a:extLst>
+                  <a:ext uri="{0D108BD9-81ED-4DB2-BD59-A6C34878D82A}">
+                    <a16:rowId xmlns:a16="http://schemas.microsoft.com/office/drawing/2014/main" val="10003"/>
+                  </a:ext>
+                </a:extLst>
               </a:tr>
             </a:tbl>
           </a:graphicData>
@@ -8742,7 +8599,7 @@
           <a:bodyPr wrap="square" lIns="0" tIns="0" rIns="0" bIns="0" rtlCol="0" anchor="ctr"/>
           <a:lstStyle/>
           <a:p>
-            <a:pPr indent="0" marL="0">
+            <a:pPr marL="0" indent="0">
               <a:lnSpc>
                 <a:spcPct val="120000"/>
               </a:lnSpc>
@@ -8762,7 +8619,7 @@
             <a:endParaRPr lang="en-US" sz="1400" dirty="0"/>
           </a:p>
           <a:p>
-            <a:pPr indent="0" marL="0">
+            <a:pPr marL="0" indent="0">
               <a:lnSpc>
                 <a:spcPct val="120000"/>
               </a:lnSpc>
@@ -8799,6 +8656,7 @@
         <a:solidFill>
           <a:srgbClr val="FFFFFF"/>
         </a:solidFill>
+        <a:effectLst/>
       </p:bgPr>
     </p:bg>
     <p:spTree>
@@ -8836,11 +8694,11 @@
           <a:bodyPr wrap="square" lIns="0" tIns="0" rIns="0" bIns="0" rtlCol="0" anchor="ctr"/>
           <a:lstStyle/>
           <a:p>
-            <a:pPr indent="0" marL="0">
-              <a:buNone/>
-            </a:pPr>
-            <a:r>
-              <a:rPr lang="en-US" sz="1200" b="1" spc="200" kern="0" dirty="0">
+            <a:pPr marL="0" indent="0">
+              <a:buNone/>
+            </a:pPr>
+            <a:r>
+              <a:rPr lang="en-US" sz="1200" b="1" kern="0" spc="200" dirty="0">
                 <a:solidFill>
                   <a:srgbClr val="0B5EA8"/>
                 </a:solidFill>
@@ -8875,7 +8733,7 @@
           <a:bodyPr wrap="square" lIns="0" tIns="0" rIns="0" bIns="0" rtlCol="0" anchor="t"/>
           <a:lstStyle/>
           <a:p>
-            <a:pPr indent="0" marL="0">
+            <a:pPr marL="0" indent="0">
               <a:buNone/>
             </a:pPr>
             <a:r>
@@ -8916,9 +8774,27 @@
             <a:tbl>
               <a:tblPr/>
               <a:tblGrid>
-                <a:gridCol w="4846320"/>
-                <a:gridCol w="2926080"/>
-                <a:gridCol w="3291840"/>
+                <a:gridCol w="4846320">
+                  <a:extLst>
+                    <a:ext uri="{9D8B030D-6E8A-4147-A177-3AD203B41FA5}">
+                      <a16:colId xmlns:a16="http://schemas.microsoft.com/office/drawing/2014/main" val="20000"/>
+                    </a:ext>
+                  </a:extLst>
+                </a:gridCol>
+                <a:gridCol w="2926080">
+                  <a:extLst>
+                    <a:ext uri="{9D8B030D-6E8A-4147-A177-3AD203B41FA5}">
+                      <a16:colId xmlns:a16="http://schemas.microsoft.com/office/drawing/2014/main" val="20001"/>
+                    </a:ext>
+                  </a:extLst>
+                </a:gridCol>
+                <a:gridCol w="3291840">
+                  <a:extLst>
+                    <a:ext uri="{9D8B030D-6E8A-4147-A177-3AD203B41FA5}">
+                      <a16:colId xmlns:a16="http://schemas.microsoft.com/office/drawing/2014/main" val="20002"/>
+                    </a:ext>
+                  </a:extLst>
+                </a:gridCol>
               </a:tblGrid>
               <a:tr h="530352">
                 <a:tc>
@@ -8926,7 +8802,7 @@
                     <a:bodyPr/>
                     <a:lstStyle/>
                     <a:p>
-                      <a:pPr indent="0" marL="0">
+                      <a:pPr marL="0" indent="0">
                         <a:buNone/>
                       </a:pPr>
                       <a:r>
@@ -8947,7 +8823,7 @@
                       </a:endParaRPr>
                     </a:p>
                   </a:txBody>
-                  <a:tcPr marL="91440" marR="91440" marT="45720" marB="45720" anchor="ctr">
+                  <a:tcPr anchor="ctr">
                     <a:lnL w="12700" cap="flat" cmpd="sng" algn="ctr">
                       <a:solidFill>
                         <a:srgbClr val="DCE5EE"/>
@@ -8994,7 +8870,7 @@
                     <a:bodyPr/>
                     <a:lstStyle/>
                     <a:p>
-                      <a:pPr indent="0" marL="0">
+                      <a:pPr marL="0" indent="0">
                         <a:buNone/>
                       </a:pPr>
                       <a:r>
@@ -9015,7 +8891,7 @@
                       </a:endParaRPr>
                     </a:p>
                   </a:txBody>
-                  <a:tcPr marL="91440" marR="91440" marT="45720" marB="45720" anchor="ctr">
+                  <a:tcPr anchor="ctr">
                     <a:lnL w="12700" cap="flat" cmpd="sng" algn="ctr">
                       <a:solidFill>
                         <a:srgbClr val="DCE5EE"/>
@@ -9062,7 +8938,7 @@
                     <a:bodyPr/>
                     <a:lstStyle/>
                     <a:p>
-                      <a:pPr indent="0" marL="0">
+                      <a:pPr marL="0" indent="0">
                         <a:buNone/>
                       </a:pPr>
                       <a:r>
@@ -9083,7 +8959,7 @@
                       </a:endParaRPr>
                     </a:p>
                   </a:txBody>
-                  <a:tcPr marL="91440" marR="91440" marT="45720" marB="45720" anchor="ctr">
+                  <a:tcPr anchor="ctr">
                     <a:lnL w="12700" cap="flat" cmpd="sng" algn="ctr">
                       <a:solidFill>
                         <a:srgbClr val="DCE5EE"/>
@@ -9125,6 +9001,11 @@
                     </a:solidFill>
                   </a:tcPr>
                 </a:tc>
+                <a:extLst>
+                  <a:ext uri="{0D108BD9-81ED-4DB2-BD59-A6C34878D82A}">
+                    <a16:rowId xmlns:a16="http://schemas.microsoft.com/office/drawing/2014/main" val="10000"/>
+                  </a:ext>
+                </a:extLst>
               </a:tr>
               <a:tr h="530352">
                 <a:tc>
@@ -9132,7 +9013,7 @@
                     <a:bodyPr/>
                     <a:lstStyle/>
                     <a:p>
-                      <a:pPr indent="0" marL="0">
+                      <a:pPr marL="0" indent="0">
                         <a:buNone/>
                       </a:pPr>
                       <a:r>
@@ -9153,7 +9034,7 @@
                       </a:endParaRPr>
                     </a:p>
                   </a:txBody>
-                  <a:tcPr marL="91440" marR="91440" marT="45720" marB="45720" anchor="ctr">
+                  <a:tcPr anchor="ctr">
                     <a:lnL w="12700" cap="flat" cmpd="sng" algn="ctr">
                       <a:solidFill>
                         <a:srgbClr val="DCE5EE"/>
@@ -9200,7 +9081,7 @@
                     <a:bodyPr/>
                     <a:lstStyle/>
                     <a:p>
-                      <a:pPr indent="0" marL="0">
+                      <a:pPr marL="0" indent="0">
                         <a:buNone/>
                       </a:pPr>
                       <a:r>
@@ -9221,7 +9102,7 @@
                       </a:endParaRPr>
                     </a:p>
                   </a:txBody>
-                  <a:tcPr marL="91440" marR="91440" marT="45720" marB="45720" anchor="ctr">
+                  <a:tcPr anchor="ctr">
                     <a:lnL w="12700" cap="flat" cmpd="sng" algn="ctr">
                       <a:solidFill>
                         <a:srgbClr val="DCE5EE"/>
@@ -9268,7 +9149,7 @@
                     <a:bodyPr/>
                     <a:lstStyle/>
                     <a:p>
-                      <a:pPr indent="0" marL="0">
+                      <a:pPr marL="0" indent="0">
                         <a:buNone/>
                       </a:pPr>
                       <a:r>
@@ -9289,7 +9170,7 @@
                       </a:endParaRPr>
                     </a:p>
                   </a:txBody>
-                  <a:tcPr marL="91440" marR="91440" marT="45720" marB="45720" anchor="ctr">
+                  <a:tcPr anchor="ctr">
                     <a:lnL w="12700" cap="flat" cmpd="sng" algn="ctr">
                       <a:solidFill>
                         <a:srgbClr val="DCE5EE"/>
@@ -9331,6 +9212,11 @@
                     </a:solidFill>
                   </a:tcPr>
                 </a:tc>
+                <a:extLst>
+                  <a:ext uri="{0D108BD9-81ED-4DB2-BD59-A6C34878D82A}">
+                    <a16:rowId xmlns:a16="http://schemas.microsoft.com/office/drawing/2014/main" val="10001"/>
+                  </a:ext>
+                </a:extLst>
               </a:tr>
               <a:tr h="530352">
                 <a:tc>
@@ -9338,7 +9224,7 @@
                     <a:bodyPr/>
                     <a:lstStyle/>
                     <a:p>
-                      <a:pPr indent="0" marL="0">
+                      <a:pPr marL="0" indent="0">
                         <a:buNone/>
                       </a:pPr>
                       <a:r>
@@ -9359,7 +9245,7 @@
                       </a:endParaRPr>
                     </a:p>
                   </a:txBody>
-                  <a:tcPr marL="91440" marR="91440" marT="45720" marB="45720" anchor="ctr">
+                  <a:tcPr anchor="ctr">
                     <a:lnL w="12700" cap="flat" cmpd="sng" algn="ctr">
                       <a:solidFill>
                         <a:srgbClr val="DCE5EE"/>
@@ -9406,7 +9292,7 @@
                     <a:bodyPr/>
                     <a:lstStyle/>
                     <a:p>
-                      <a:pPr indent="0" marL="0">
+                      <a:pPr marL="0" indent="0">
                         <a:buNone/>
                       </a:pPr>
                       <a:r>
@@ -9427,7 +9313,7 @@
                       </a:endParaRPr>
                     </a:p>
                   </a:txBody>
-                  <a:tcPr marL="91440" marR="91440" marT="45720" marB="45720" anchor="ctr">
+                  <a:tcPr anchor="ctr">
                     <a:lnL w="12700" cap="flat" cmpd="sng" algn="ctr">
                       <a:solidFill>
                         <a:srgbClr val="DCE5EE"/>
@@ -9474,7 +9360,7 @@
                     <a:bodyPr/>
                     <a:lstStyle/>
                     <a:p>
-                      <a:pPr indent="0" marL="0">
+                      <a:pPr marL="0" indent="0">
                         <a:buNone/>
                       </a:pPr>
                       <a:r>
@@ -9495,7 +9381,7 @@
                       </a:endParaRPr>
                     </a:p>
                   </a:txBody>
-                  <a:tcPr marL="91440" marR="91440" marT="45720" marB="45720" anchor="ctr">
+                  <a:tcPr anchor="ctr">
                     <a:lnL w="12700" cap="flat" cmpd="sng" algn="ctr">
                       <a:solidFill>
                         <a:srgbClr val="DCE5EE"/>
@@ -9537,6 +9423,11 @@
                     </a:solidFill>
                   </a:tcPr>
                 </a:tc>
+                <a:extLst>
+                  <a:ext uri="{0D108BD9-81ED-4DB2-BD59-A6C34878D82A}">
+                    <a16:rowId xmlns:a16="http://schemas.microsoft.com/office/drawing/2014/main" val="10002"/>
+                  </a:ext>
+                </a:extLst>
               </a:tr>
               <a:tr h="530352">
                 <a:tc>
@@ -9544,7 +9435,7 @@
                     <a:bodyPr/>
                     <a:lstStyle/>
                     <a:p>
-                      <a:pPr indent="0" marL="0">
+                      <a:pPr marL="0" indent="0">
                         <a:buNone/>
                       </a:pPr>
                       <a:r>
@@ -9565,7 +9456,7 @@
                       </a:endParaRPr>
                     </a:p>
                   </a:txBody>
-                  <a:tcPr marL="91440" marR="91440" marT="45720" marB="45720" anchor="ctr">
+                  <a:tcPr anchor="ctr">
                     <a:lnL w="12700" cap="flat" cmpd="sng" algn="ctr">
                       <a:solidFill>
                         <a:srgbClr val="DCE5EE"/>
@@ -9612,7 +9503,7 @@
                     <a:bodyPr/>
                     <a:lstStyle/>
                     <a:p>
-                      <a:pPr indent="0" marL="0">
+                      <a:pPr marL="0" indent="0">
                         <a:buNone/>
                       </a:pPr>
                       <a:r>
@@ -9633,7 +9524,7 @@
                       </a:endParaRPr>
                     </a:p>
                   </a:txBody>
-                  <a:tcPr marL="91440" marR="91440" marT="45720" marB="45720" anchor="ctr">
+                  <a:tcPr anchor="ctr">
                     <a:lnL w="12700" cap="flat" cmpd="sng" algn="ctr">
                       <a:solidFill>
                         <a:srgbClr val="DCE5EE"/>
@@ -9680,7 +9571,7 @@
                     <a:bodyPr/>
                     <a:lstStyle/>
                     <a:p>
-                      <a:pPr indent="0" marL="0">
+                      <a:pPr marL="0" indent="0">
                         <a:buNone/>
                       </a:pPr>
                       <a:r>
@@ -9701,7 +9592,7 @@
                       </a:endParaRPr>
                     </a:p>
                   </a:txBody>
-                  <a:tcPr marL="91440" marR="91440" marT="45720" marB="45720" anchor="ctr">
+                  <a:tcPr anchor="ctr">
                     <a:lnL w="12700" cap="flat" cmpd="sng" algn="ctr">
                       <a:solidFill>
                         <a:srgbClr val="DCE5EE"/>
@@ -9743,6 +9634,11 @@
                     </a:solidFill>
                   </a:tcPr>
                 </a:tc>
+                <a:extLst>
+                  <a:ext uri="{0D108BD9-81ED-4DB2-BD59-A6C34878D82A}">
+                    <a16:rowId xmlns:a16="http://schemas.microsoft.com/office/drawing/2014/main" val="10003"/>
+                  </a:ext>
+                </a:extLst>
               </a:tr>
               <a:tr h="530352">
                 <a:tc>
@@ -9750,7 +9646,7 @@
                     <a:bodyPr/>
                     <a:lstStyle/>
                     <a:p>
-                      <a:pPr indent="0" marL="0">
+                      <a:pPr marL="0" indent="0">
                         <a:buNone/>
                       </a:pPr>
                       <a:r>
@@ -9771,7 +9667,7 @@
                       </a:endParaRPr>
                     </a:p>
                   </a:txBody>
-                  <a:tcPr marL="91440" marR="91440" marT="45720" marB="45720" anchor="ctr">
+                  <a:tcPr anchor="ctr">
                     <a:lnL w="12700" cap="flat" cmpd="sng" algn="ctr">
                       <a:solidFill>
                         <a:srgbClr val="DCE5EE"/>
@@ -9818,7 +9714,7 @@
                     <a:bodyPr/>
                     <a:lstStyle/>
                     <a:p>
-                      <a:pPr indent="0" marL="0">
+                      <a:pPr marL="0" indent="0">
                         <a:buNone/>
                       </a:pPr>
                       <a:r>
@@ -9839,7 +9735,7 @@
                       </a:endParaRPr>
                     </a:p>
                   </a:txBody>
-                  <a:tcPr marL="91440" marR="91440" marT="45720" marB="45720" anchor="ctr">
+                  <a:tcPr anchor="ctr">
                     <a:lnL w="12700" cap="flat" cmpd="sng" algn="ctr">
                       <a:solidFill>
                         <a:srgbClr val="DCE5EE"/>
@@ -9886,7 +9782,7 @@
                     <a:bodyPr/>
                     <a:lstStyle/>
                     <a:p>
-                      <a:pPr indent="0" marL="0">
+                      <a:pPr marL="0" indent="0">
                         <a:buNone/>
                       </a:pPr>
                       <a:r>
@@ -9907,7 +9803,7 @@
                       </a:endParaRPr>
                     </a:p>
                   </a:txBody>
-                  <a:tcPr marL="91440" marR="91440" marT="45720" marB="45720" anchor="ctr">
+                  <a:tcPr anchor="ctr">
                     <a:lnL w="12700" cap="flat" cmpd="sng" algn="ctr">
                       <a:solidFill>
                         <a:srgbClr val="DCE5EE"/>
@@ -9949,6 +9845,11 @@
                     </a:solidFill>
                   </a:tcPr>
                 </a:tc>
+                <a:extLst>
+                  <a:ext uri="{0D108BD9-81ED-4DB2-BD59-A6C34878D82A}">
+                    <a16:rowId xmlns:a16="http://schemas.microsoft.com/office/drawing/2014/main" val="10004"/>
+                  </a:ext>
+                </a:extLst>
               </a:tr>
             </a:tbl>
           </a:graphicData>
@@ -10002,7 +9903,7 @@
           <a:bodyPr wrap="square" lIns="0" tIns="0" rIns="0" bIns="0" rtlCol="0" anchor="ctr"/>
           <a:lstStyle/>
           <a:p>
-            <a:pPr indent="0" marL="0">
+            <a:pPr marL="0" indent="0">
               <a:lnSpc>
                 <a:spcPct val="120000"/>
               </a:lnSpc>
@@ -10039,6 +9940,7 @@
         <a:solidFill>
           <a:srgbClr val="FFFFFF"/>
         </a:solidFill>
+        <a:effectLst/>
       </p:bgPr>
     </p:bg>
     <p:spTree>
@@ -10076,11 +9978,11 @@
           <a:bodyPr wrap="square" lIns="0" tIns="0" rIns="0" bIns="0" rtlCol="0" anchor="ctr"/>
           <a:lstStyle/>
           <a:p>
-            <a:pPr indent="0" marL="0">
-              <a:buNone/>
-            </a:pPr>
-            <a:r>
-              <a:rPr lang="en-US" sz="1200" b="1" spc="200" kern="0" dirty="0">
+            <a:pPr marL="0" indent="0">
+              <a:buNone/>
+            </a:pPr>
+            <a:r>
+              <a:rPr lang="en-US" sz="1200" b="1" kern="0" spc="200" dirty="0">
                 <a:solidFill>
                   <a:srgbClr val="0B5EA8"/>
                 </a:solidFill>
@@ -10115,7 +10017,7 @@
           <a:bodyPr wrap="square" lIns="0" tIns="0" rIns="0" bIns="0" rtlCol="0" anchor="t"/>
           <a:lstStyle/>
           <a:p>
-            <a:pPr indent="0" marL="0">
+            <a:pPr marL="0" indent="0">
               <a:buNone/>
             </a:pPr>
             <a:r>
@@ -10181,7 +10083,7 @@
           <a:bodyPr wrap="square" lIns="0" tIns="0" rIns="0" bIns="0" rtlCol="0" anchor="ctr"/>
           <a:lstStyle/>
           <a:p>
-            <a:pPr indent="0" marL="0">
+            <a:pPr marL="0" indent="0">
               <a:buNone/>
             </a:pPr>
             <a:r>
@@ -10220,7 +10122,7 @@
           <a:bodyPr wrap="square" lIns="0" tIns="0" rIns="0" bIns="0" rtlCol="0" anchor="ctr"/>
           <a:lstStyle/>
           <a:p>
-            <a:pPr indent="0" marL="0">
+            <a:pPr marL="0" indent="0">
               <a:lnSpc>
                 <a:spcPct val="140000"/>
               </a:lnSpc>
@@ -10240,7 +10142,7 @@
             <a:endParaRPr lang="en-US" sz="1450" dirty="0"/>
           </a:p>
           <a:p>
-            <a:pPr indent="0" marL="0">
+            <a:pPr marL="0" indent="0">
               <a:lnSpc>
                 <a:spcPct val="140000"/>
               </a:lnSpc>
@@ -10249,7 +10151,7 @@
             <a:endParaRPr lang="en-US" sz="1450" dirty="0"/>
           </a:p>
           <a:p>
-            <a:pPr indent="0" marL="0">
+            <a:pPr marL="0" indent="0">
               <a:lnSpc>
                 <a:spcPct val="140000"/>
               </a:lnSpc>
@@ -10269,7 +10171,7 @@
             <a:endParaRPr lang="en-US" sz="1450" dirty="0"/>
           </a:p>
           <a:p>
-            <a:pPr indent="0" marL="0">
+            <a:pPr marL="0" indent="0">
               <a:lnSpc>
                 <a:spcPct val="140000"/>
               </a:lnSpc>
@@ -10289,7 +10191,7 @@
             <a:endParaRPr lang="en-US" sz="1450" dirty="0"/>
           </a:p>
           <a:p>
-            <a:pPr indent="0" marL="0">
+            <a:pPr marL="0" indent="0">
               <a:lnSpc>
                 <a:spcPct val="140000"/>
               </a:lnSpc>
@@ -10298,7 +10200,7 @@
             <a:endParaRPr lang="en-US" sz="1450" dirty="0"/>
           </a:p>
           <a:p>
-            <a:pPr indent="0" marL="0">
+            <a:pPr marL="0" indent="0">
               <a:lnSpc>
                 <a:spcPct val="140000"/>
               </a:lnSpc>
@@ -10367,7 +10269,7 @@
           <a:bodyPr wrap="square" lIns="0" tIns="0" rIns="0" bIns="0" rtlCol="0" anchor="ctr"/>
           <a:lstStyle/>
           <a:p>
-            <a:pPr indent="0" marL="0">
+            <a:pPr marL="0" indent="0">
               <a:buNone/>
             </a:pPr>
             <a:r>
@@ -10406,7 +10308,7 @@
           <a:bodyPr wrap="square" lIns="0" tIns="0" rIns="0" bIns="0" rtlCol="0" anchor="ctr"/>
           <a:lstStyle/>
           <a:p>
-            <a:pPr indent="0" marL="0">
+            <a:pPr marL="0" indent="0">
               <a:lnSpc>
                 <a:spcPct val="140000"/>
               </a:lnSpc>
@@ -10426,7 +10328,7 @@
             <a:endParaRPr lang="en-US" sz="1450" dirty="0"/>
           </a:p>
           <a:p>
-            <a:pPr indent="0" marL="0">
+            <a:pPr marL="0" indent="0">
               <a:lnSpc>
                 <a:spcPct val="140000"/>
               </a:lnSpc>
@@ -10435,7 +10337,7 @@
             <a:endParaRPr lang="en-US" sz="1450" dirty="0"/>
           </a:p>
           <a:p>
-            <a:pPr indent="0" marL="0">
+            <a:pPr marL="0" indent="0">
               <a:lnSpc>
                 <a:spcPct val="140000"/>
               </a:lnSpc>
@@ -10455,7 +10357,7 @@
             <a:endParaRPr lang="en-US" sz="1450" dirty="0"/>
           </a:p>
           <a:p>
-            <a:pPr indent="0" marL="0">
+            <a:pPr marL="0" indent="0">
               <a:lnSpc>
                 <a:spcPct val="140000"/>
               </a:lnSpc>
@@ -10475,7 +10377,7 @@
             <a:endParaRPr lang="en-US" sz="1450" dirty="0"/>
           </a:p>
           <a:p>
-            <a:pPr indent="0" marL="0">
+            <a:pPr marL="0" indent="0">
               <a:lnSpc>
                 <a:spcPct val="140000"/>
               </a:lnSpc>
@@ -10484,7 +10386,7 @@
             <a:endParaRPr lang="en-US" sz="1450" dirty="0"/>
           </a:p>
           <a:p>
-            <a:pPr indent="0" marL="0">
+            <a:pPr marL="0" indent="0">
               <a:lnSpc>
                 <a:spcPct val="140000"/>
               </a:lnSpc>
@@ -10504,7 +10406,7 @@
             <a:endParaRPr lang="en-US" sz="1450" dirty="0"/>
           </a:p>
           <a:p>
-            <a:pPr indent="0" marL="0">
+            <a:pPr marL="0" indent="0">
               <a:lnSpc>
                 <a:spcPct val="140000"/>
               </a:lnSpc>
@@ -10573,7 +10475,7 @@
           <a:bodyPr wrap="square" lIns="0" tIns="0" rIns="0" bIns="0" rtlCol="0" anchor="ctr"/>
           <a:lstStyle/>
           <a:p>
-            <a:pPr indent="0" marL="0">
+            <a:pPr marL="0" indent="0">
               <a:lnSpc>
                 <a:spcPct val="120000"/>
               </a:lnSpc>
@@ -10610,6 +10512,7 @@
         <a:solidFill>
           <a:srgbClr val="FFFFFF"/>
         </a:solidFill>
+        <a:effectLst/>
       </p:bgPr>
     </p:bg>
     <p:spTree>
@@ -10647,11 +10550,11 @@
           <a:bodyPr wrap="square" lIns="0" tIns="0" rIns="0" bIns="0" rtlCol="0" anchor="ctr"/>
           <a:lstStyle/>
           <a:p>
-            <a:pPr indent="0" marL="0">
-              <a:buNone/>
-            </a:pPr>
-            <a:r>
-              <a:rPr lang="en-US" sz="1200" b="1" spc="200" kern="0" dirty="0">
+            <a:pPr marL="0" indent="0">
+              <a:buNone/>
+            </a:pPr>
+            <a:r>
+              <a:rPr lang="en-US" sz="1200" b="1" kern="0" spc="200" dirty="0">
                 <a:solidFill>
                   <a:srgbClr val="0B5EA8"/>
                 </a:solidFill>
@@ -10686,7 +10589,7 @@
           <a:bodyPr wrap="square" lIns="0" tIns="0" rIns="0" bIns="0" rtlCol="0" anchor="t"/>
           <a:lstStyle/>
           <a:p>
-            <a:pPr indent="0" marL="0">
+            <a:pPr marL="0" indent="0">
               <a:buNone/>
             </a:pPr>
             <a:r>
@@ -10727,9 +10630,27 @@
             <a:tbl>
               <a:tblPr/>
               <a:tblGrid>
-                <a:gridCol w="2743200"/>
-                <a:gridCol w="4572000"/>
-                <a:gridCol w="3749040"/>
+                <a:gridCol w="2743200">
+                  <a:extLst>
+                    <a:ext uri="{9D8B030D-6E8A-4147-A177-3AD203B41FA5}">
+                      <a16:colId xmlns:a16="http://schemas.microsoft.com/office/drawing/2014/main" val="20000"/>
+                    </a:ext>
+                  </a:extLst>
+                </a:gridCol>
+                <a:gridCol w="4572000">
+                  <a:extLst>
+                    <a:ext uri="{9D8B030D-6E8A-4147-A177-3AD203B41FA5}">
+                      <a16:colId xmlns:a16="http://schemas.microsoft.com/office/drawing/2014/main" val="20001"/>
+                    </a:ext>
+                  </a:extLst>
+                </a:gridCol>
+                <a:gridCol w="3749040">
+                  <a:extLst>
+                    <a:ext uri="{9D8B030D-6E8A-4147-A177-3AD203B41FA5}">
+                      <a16:colId xmlns:a16="http://schemas.microsoft.com/office/drawing/2014/main" val="20002"/>
+                    </a:ext>
+                  </a:extLst>
+                </a:gridCol>
               </a:tblGrid>
               <a:tr h="512064">
                 <a:tc>
@@ -10737,7 +10658,7 @@
                     <a:bodyPr/>
                     <a:lstStyle/>
                     <a:p>
-                      <a:pPr indent="0" marL="0">
+                      <a:pPr marL="0" indent="0">
                         <a:buNone/>
                       </a:pPr>
                       <a:r>
@@ -10758,7 +10679,7 @@
                       </a:endParaRPr>
                     </a:p>
                   </a:txBody>
-                  <a:tcPr marL="91440" marR="91440" marT="45720" marB="45720" anchor="ctr">
+                  <a:tcPr anchor="ctr">
                     <a:lnL w="12700" cap="flat" cmpd="sng" algn="ctr">
                       <a:solidFill>
                         <a:srgbClr val="DCE5EE"/>
@@ -10805,7 +10726,7 @@
                     <a:bodyPr/>
                     <a:lstStyle/>
                     <a:p>
-                      <a:pPr indent="0" marL="0">
+                      <a:pPr marL="0" indent="0">
                         <a:buNone/>
                       </a:pPr>
                       <a:r>
@@ -10826,7 +10747,7 @@
                       </a:endParaRPr>
                     </a:p>
                   </a:txBody>
-                  <a:tcPr marL="91440" marR="91440" marT="45720" marB="45720" anchor="ctr">
+                  <a:tcPr anchor="ctr">
                     <a:lnL w="12700" cap="flat" cmpd="sng" algn="ctr">
                       <a:solidFill>
                         <a:srgbClr val="DCE5EE"/>
@@ -10873,7 +10794,7 @@
                     <a:bodyPr/>
                     <a:lstStyle/>
                     <a:p>
-                      <a:pPr indent="0" marL="0">
+                      <a:pPr marL="0" indent="0">
                         <a:buNone/>
                       </a:pPr>
                       <a:r>
@@ -10894,7 +10815,7 @@
                       </a:endParaRPr>
                     </a:p>
                   </a:txBody>
-                  <a:tcPr marL="91440" marR="91440" marT="45720" marB="45720" anchor="ctr">
+                  <a:tcPr anchor="ctr">
                     <a:lnL w="12700" cap="flat" cmpd="sng" algn="ctr">
                       <a:solidFill>
                         <a:srgbClr val="DCE5EE"/>
@@ -10936,6 +10857,11 @@
                     </a:solidFill>
                   </a:tcPr>
                 </a:tc>
+                <a:extLst>
+                  <a:ext uri="{0D108BD9-81ED-4DB2-BD59-A6C34878D82A}">
+                    <a16:rowId xmlns:a16="http://schemas.microsoft.com/office/drawing/2014/main" val="10000"/>
+                  </a:ext>
+                </a:extLst>
               </a:tr>
               <a:tr h="512064">
                 <a:tc>
@@ -10943,7 +10869,7 @@
                     <a:bodyPr/>
                     <a:lstStyle/>
                     <a:p>
-                      <a:pPr indent="0" marL="0">
+                      <a:pPr marL="0" indent="0">
                         <a:buNone/>
                       </a:pPr>
                       <a:r>
@@ -10964,7 +10890,7 @@
                       </a:endParaRPr>
                     </a:p>
                   </a:txBody>
-                  <a:tcPr marL="91440" marR="91440" marT="45720" marB="45720" anchor="ctr">
+                  <a:tcPr anchor="ctr">
                     <a:lnL w="12700" cap="flat" cmpd="sng" algn="ctr">
                       <a:solidFill>
                         <a:srgbClr val="DCE5EE"/>
@@ -11011,7 +10937,7 @@
                     <a:bodyPr/>
                     <a:lstStyle/>
                     <a:p>
-                      <a:pPr indent="0" marL="0">
+                      <a:pPr marL="0" indent="0">
                         <a:buNone/>
                       </a:pPr>
                       <a:r>
@@ -11032,7 +10958,7 @@
                       </a:endParaRPr>
                     </a:p>
                   </a:txBody>
-                  <a:tcPr marL="91440" marR="91440" marT="45720" marB="45720" anchor="ctr">
+                  <a:tcPr anchor="ctr">
                     <a:lnL w="12700" cap="flat" cmpd="sng" algn="ctr">
                       <a:solidFill>
                         <a:srgbClr val="DCE5EE"/>
@@ -11079,7 +11005,7 @@
                     <a:bodyPr/>
                     <a:lstStyle/>
                     <a:p>
-                      <a:pPr indent="0" marL="0">
+                      <a:pPr marL="0" indent="0">
                         <a:buNone/>
                       </a:pPr>
                       <a:r>
@@ -11100,7 +11026,7 @@
                       </a:endParaRPr>
                     </a:p>
                   </a:txBody>
-                  <a:tcPr marL="91440" marR="91440" marT="45720" marB="45720" anchor="ctr">
+                  <a:tcPr anchor="ctr">
                     <a:lnL w="12700" cap="flat" cmpd="sng" algn="ctr">
                       <a:solidFill>
                         <a:srgbClr val="DCE5EE"/>
@@ -11142,6 +11068,11 @@
                     </a:solidFill>
                   </a:tcPr>
                 </a:tc>
+                <a:extLst>
+                  <a:ext uri="{0D108BD9-81ED-4DB2-BD59-A6C34878D82A}">
+                    <a16:rowId xmlns:a16="http://schemas.microsoft.com/office/drawing/2014/main" val="10001"/>
+                  </a:ext>
+                </a:extLst>
               </a:tr>
               <a:tr h="512064">
                 <a:tc>
@@ -11149,7 +11080,7 @@
                     <a:bodyPr/>
                     <a:lstStyle/>
                     <a:p>
-                      <a:pPr indent="0" marL="0">
+                      <a:pPr marL="0" indent="0">
                         <a:buNone/>
                       </a:pPr>
                       <a:r>
@@ -11170,7 +11101,7 @@
                       </a:endParaRPr>
                     </a:p>
                   </a:txBody>
-                  <a:tcPr marL="91440" marR="91440" marT="45720" marB="45720" anchor="ctr">
+                  <a:tcPr anchor="ctr">
                     <a:lnL w="12700" cap="flat" cmpd="sng" algn="ctr">
                       <a:solidFill>
                         <a:srgbClr val="DCE5EE"/>
@@ -11217,7 +11148,7 @@
                     <a:bodyPr/>
                     <a:lstStyle/>
                     <a:p>
-                      <a:pPr indent="0" marL="0">
+                      <a:pPr marL="0" indent="0">
                         <a:buNone/>
                       </a:pPr>
                       <a:r>
@@ -11238,7 +11169,7 @@
                       </a:endParaRPr>
                     </a:p>
                   </a:txBody>
-                  <a:tcPr marL="91440" marR="91440" marT="45720" marB="45720" anchor="ctr">
+                  <a:tcPr anchor="ctr">
                     <a:lnL w="12700" cap="flat" cmpd="sng" algn="ctr">
                       <a:solidFill>
                         <a:srgbClr val="DCE5EE"/>
@@ -11285,7 +11216,7 @@
                     <a:bodyPr/>
                     <a:lstStyle/>
                     <a:p>
-                      <a:pPr indent="0" marL="0">
+                      <a:pPr marL="0" indent="0">
                         <a:buNone/>
                       </a:pPr>
                       <a:r>
@@ -11306,7 +11237,7 @@
                       </a:endParaRPr>
                     </a:p>
                   </a:txBody>
-                  <a:tcPr marL="91440" marR="91440" marT="45720" marB="45720" anchor="ctr">
+                  <a:tcPr anchor="ctr">
                     <a:lnL w="12700" cap="flat" cmpd="sng" algn="ctr">
                       <a:solidFill>
                         <a:srgbClr val="DCE5EE"/>
@@ -11348,6 +11279,11 @@
                     </a:solidFill>
                   </a:tcPr>
                 </a:tc>
+                <a:extLst>
+                  <a:ext uri="{0D108BD9-81ED-4DB2-BD59-A6C34878D82A}">
+                    <a16:rowId xmlns:a16="http://schemas.microsoft.com/office/drawing/2014/main" val="10002"/>
+                  </a:ext>
+                </a:extLst>
               </a:tr>
               <a:tr h="512064">
                 <a:tc>
@@ -11355,7 +11291,7 @@
                     <a:bodyPr/>
                     <a:lstStyle/>
                     <a:p>
-                      <a:pPr indent="0" marL="0">
+                      <a:pPr marL="0" indent="0">
                         <a:buNone/>
                       </a:pPr>
                       <a:r>
@@ -11376,7 +11312,7 @@
                       </a:endParaRPr>
                     </a:p>
                   </a:txBody>
-                  <a:tcPr marL="91440" marR="91440" marT="45720" marB="45720" anchor="ctr">
+                  <a:tcPr anchor="ctr">
                     <a:lnL w="12700" cap="flat" cmpd="sng" algn="ctr">
                       <a:solidFill>
                         <a:srgbClr val="DCE5EE"/>
@@ -11423,7 +11359,7 @@
                     <a:bodyPr/>
                     <a:lstStyle/>
                     <a:p>
-                      <a:pPr indent="0" marL="0">
+                      <a:pPr marL="0" indent="0">
                         <a:buNone/>
                       </a:pPr>
                       <a:r>
@@ -11444,7 +11380,7 @@
                       </a:endParaRPr>
                     </a:p>
                   </a:txBody>
-                  <a:tcPr marL="91440" marR="91440" marT="45720" marB="45720" anchor="ctr">
+                  <a:tcPr anchor="ctr">
                     <a:lnL w="12700" cap="flat" cmpd="sng" algn="ctr">
                       <a:solidFill>
                         <a:srgbClr val="DCE5EE"/>
@@ -11491,7 +11427,7 @@
                     <a:bodyPr/>
                     <a:lstStyle/>
                     <a:p>
-                      <a:pPr indent="0" marL="0">
+                      <a:pPr marL="0" indent="0">
                         <a:buNone/>
                       </a:pPr>
                       <a:r>
@@ -11512,7 +11448,7 @@
                       </a:endParaRPr>
                     </a:p>
                   </a:txBody>
-                  <a:tcPr marL="91440" marR="91440" marT="45720" marB="45720" anchor="ctr">
+                  <a:tcPr anchor="ctr">
                     <a:lnL w="12700" cap="flat" cmpd="sng" algn="ctr">
                       <a:solidFill>
                         <a:srgbClr val="DCE5EE"/>
@@ -11554,6 +11490,11 @@
                     </a:solidFill>
                   </a:tcPr>
                 </a:tc>
+                <a:extLst>
+                  <a:ext uri="{0D108BD9-81ED-4DB2-BD59-A6C34878D82A}">
+                    <a16:rowId xmlns:a16="http://schemas.microsoft.com/office/drawing/2014/main" val="10003"/>
+                  </a:ext>
+                </a:extLst>
               </a:tr>
               <a:tr h="512064">
                 <a:tc>
@@ -11561,7 +11502,7 @@
                     <a:bodyPr/>
                     <a:lstStyle/>
                     <a:p>
-                      <a:pPr indent="0" marL="0">
+                      <a:pPr marL="0" indent="0">
                         <a:buNone/>
                       </a:pPr>
                       <a:r>
@@ -11582,7 +11523,7 @@
                       </a:endParaRPr>
                     </a:p>
                   </a:txBody>
-                  <a:tcPr marL="91440" marR="91440" marT="45720" marB="45720" anchor="ctr">
+                  <a:tcPr anchor="ctr">
                     <a:lnL w="12700" cap="flat" cmpd="sng" algn="ctr">
                       <a:solidFill>
                         <a:srgbClr val="DCE5EE"/>
@@ -11629,7 +11570,7 @@
                     <a:bodyPr/>
                     <a:lstStyle/>
                     <a:p>
-                      <a:pPr indent="0" marL="0">
+                      <a:pPr marL="0" indent="0">
                         <a:buNone/>
                       </a:pPr>
                       <a:r>
@@ -11650,7 +11591,7 @@
                       </a:endParaRPr>
                     </a:p>
                   </a:txBody>
-                  <a:tcPr marL="91440" marR="91440" marT="45720" marB="45720" anchor="ctr">
+                  <a:tcPr anchor="ctr">
                     <a:lnL w="12700" cap="flat" cmpd="sng" algn="ctr">
                       <a:solidFill>
                         <a:srgbClr val="DCE5EE"/>
@@ -11697,7 +11638,7 @@
                     <a:bodyPr/>
                     <a:lstStyle/>
                     <a:p>
-                      <a:pPr indent="0" marL="0">
+                      <a:pPr marL="0" indent="0">
                         <a:buNone/>
                       </a:pPr>
                       <a:r>
@@ -11718,7 +11659,7 @@
                       </a:endParaRPr>
                     </a:p>
                   </a:txBody>
-                  <a:tcPr marL="91440" marR="91440" marT="45720" marB="45720" anchor="ctr">
+                  <a:tcPr anchor="ctr">
                     <a:lnL w="12700" cap="flat" cmpd="sng" algn="ctr">
                       <a:solidFill>
                         <a:srgbClr val="DCE5EE"/>
@@ -11760,6 +11701,11 @@
                     </a:solidFill>
                   </a:tcPr>
                 </a:tc>
+                <a:extLst>
+                  <a:ext uri="{0D108BD9-81ED-4DB2-BD59-A6C34878D82A}">
+                    <a16:rowId xmlns:a16="http://schemas.microsoft.com/office/drawing/2014/main" val="10004"/>
+                  </a:ext>
+                </a:extLst>
               </a:tr>
               <a:tr h="512064">
                 <a:tc>
@@ -11767,7 +11713,7 @@
                     <a:bodyPr/>
                     <a:lstStyle/>
                     <a:p>
-                      <a:pPr indent="0" marL="0">
+                      <a:pPr marL="0" indent="0">
                         <a:buNone/>
                       </a:pPr>
                       <a:r>
@@ -11788,7 +11734,7 @@
                       </a:endParaRPr>
                     </a:p>
                   </a:txBody>
-                  <a:tcPr marL="91440" marR="91440" marT="45720" marB="45720" anchor="ctr">
+                  <a:tcPr anchor="ctr">
                     <a:lnL w="12700" cap="flat" cmpd="sng" algn="ctr">
                       <a:solidFill>
                         <a:srgbClr val="DCE5EE"/>
@@ -11835,7 +11781,7 @@
                     <a:bodyPr/>
                     <a:lstStyle/>
                     <a:p>
-                      <a:pPr indent="0" marL="0">
+                      <a:pPr marL="0" indent="0">
                         <a:buNone/>
                       </a:pPr>
                       <a:r>
@@ -11856,7 +11802,7 @@
                       </a:endParaRPr>
                     </a:p>
                   </a:txBody>
-                  <a:tcPr marL="91440" marR="91440" marT="45720" marB="45720" anchor="ctr">
+                  <a:tcPr anchor="ctr">
                     <a:lnL w="12700" cap="flat" cmpd="sng" algn="ctr">
                       <a:solidFill>
                         <a:srgbClr val="DCE5EE"/>
@@ -11903,7 +11849,7 @@
                     <a:bodyPr/>
                     <a:lstStyle/>
                     <a:p>
-                      <a:pPr indent="0" marL="0">
+                      <a:pPr marL="0" indent="0">
                         <a:buNone/>
                       </a:pPr>
                       <a:r>
@@ -11924,7 +11870,7 @@
                       </a:endParaRPr>
                     </a:p>
                   </a:txBody>
-                  <a:tcPr marL="91440" marR="91440" marT="45720" marB="45720" anchor="ctr">
+                  <a:tcPr anchor="ctr">
                     <a:lnL w="12700" cap="flat" cmpd="sng" algn="ctr">
                       <a:solidFill>
                         <a:srgbClr val="DCE5EE"/>
@@ -11966,6 +11912,11 @@
                     </a:solidFill>
                   </a:tcPr>
                 </a:tc>
+                <a:extLst>
+                  <a:ext uri="{0D108BD9-81ED-4DB2-BD59-A6C34878D82A}">
+                    <a16:rowId xmlns:a16="http://schemas.microsoft.com/office/drawing/2014/main" val="10005"/>
+                  </a:ext>
+                </a:extLst>
               </a:tr>
             </a:tbl>
           </a:graphicData>
@@ -12019,7 +11970,7 @@
           <a:bodyPr wrap="square" lIns="0" tIns="0" rIns="0" bIns="0" rtlCol="0" anchor="ctr"/>
           <a:lstStyle/>
           <a:p>
-            <a:pPr indent="0" marL="0">
+            <a:pPr marL="0" indent="0">
               <a:lnSpc>
                 <a:spcPct val="120000"/>
               </a:lnSpc>
@@ -12056,6 +12007,7 @@
         <a:solidFill>
           <a:srgbClr val="FFFFFF"/>
         </a:solidFill>
+        <a:effectLst/>
       </p:bgPr>
     </p:bg>
     <p:spTree>
@@ -12093,11 +12045,11 @@
           <a:bodyPr wrap="square" lIns="0" tIns="0" rIns="0" bIns="0" rtlCol="0" anchor="ctr"/>
           <a:lstStyle/>
           <a:p>
-            <a:pPr indent="0" marL="0">
-              <a:buNone/>
-            </a:pPr>
-            <a:r>
-              <a:rPr lang="en-US" sz="1200" b="1" spc="200" kern="0" dirty="0">
+            <a:pPr marL="0" indent="0">
+              <a:buNone/>
+            </a:pPr>
+            <a:r>
+              <a:rPr lang="en-US" sz="1200" b="1" kern="0" spc="200" dirty="0">
                 <a:solidFill>
                   <a:srgbClr val="0B5EA8"/>
                 </a:solidFill>
@@ -12132,7 +12084,7 @@
           <a:bodyPr wrap="square" lIns="0" tIns="0" rIns="0" bIns="0" rtlCol="0" anchor="t"/>
           <a:lstStyle/>
           <a:p>
-            <a:pPr indent="0" marL="0">
+            <a:pPr marL="0" indent="0">
               <a:buNone/>
             </a:pPr>
             <a:r>
@@ -12198,7 +12150,7 @@
           <a:bodyPr wrap="square" lIns="0" tIns="0" rIns="0" bIns="0" rtlCol="0" anchor="ctr"/>
           <a:lstStyle/>
           <a:p>
-            <a:pPr indent="0" marL="0">
+            <a:pPr marL="0" indent="0">
               <a:buNone/>
             </a:pPr>
             <a:r>
@@ -12237,7 +12189,7 @@
           <a:bodyPr wrap="square" lIns="0" tIns="0" rIns="0" bIns="0" rtlCol="0" anchor="ctr"/>
           <a:lstStyle/>
           <a:p>
-            <a:pPr indent="0" marL="0">
+            <a:pPr marL="0" indent="0">
               <a:lnSpc>
                 <a:spcPct val="140000"/>
               </a:lnSpc>
@@ -12257,7 +12209,7 @@
             <a:endParaRPr lang="en-US" sz="1400" dirty="0"/>
           </a:p>
           <a:p>
-            <a:pPr indent="0" marL="0">
+            <a:pPr marL="0" indent="0">
               <a:lnSpc>
                 <a:spcPct val="140000"/>
               </a:lnSpc>
@@ -12277,7 +12229,7 @@
             <a:endParaRPr lang="en-US" sz="1400" dirty="0"/>
           </a:p>
           <a:p>
-            <a:pPr indent="0" marL="0">
+            <a:pPr marL="0" indent="0">
               <a:lnSpc>
                 <a:spcPct val="140000"/>
               </a:lnSpc>
@@ -12286,7 +12238,7 @@
             <a:endParaRPr lang="en-US" sz="1400" dirty="0"/>
           </a:p>
           <a:p>
-            <a:pPr indent="0" marL="0">
+            <a:pPr marL="0" indent="0">
               <a:lnSpc>
                 <a:spcPct val="140000"/>
               </a:lnSpc>
@@ -12355,7 +12307,7 @@
           <a:bodyPr wrap="square" lIns="0" tIns="0" rIns="0" bIns="0" rtlCol="0" anchor="ctr"/>
           <a:lstStyle/>
           <a:p>
-            <a:pPr indent="0" marL="0">
+            <a:pPr marL="0" indent="0">
               <a:buNone/>
             </a:pPr>
             <a:r>
@@ -12394,7 +12346,7 @@
           <a:bodyPr wrap="square" lIns="0" tIns="0" rIns="0" bIns="0" rtlCol="0" anchor="ctr"/>
           <a:lstStyle/>
           <a:p>
-            <a:pPr indent="0" marL="0">
+            <a:pPr marL="0" indent="0">
               <a:lnSpc>
                 <a:spcPct val="140000"/>
               </a:lnSpc>
@@ -12414,7 +12366,7 @@
             <a:endParaRPr lang="en-US" sz="1400" dirty="0"/>
           </a:p>
           <a:p>
-            <a:pPr indent="0" marL="0">
+            <a:pPr marL="0" indent="0">
               <a:lnSpc>
                 <a:spcPct val="140000"/>
               </a:lnSpc>
@@ -12434,7 +12386,7 @@
             <a:endParaRPr lang="en-US" sz="1400" dirty="0"/>
           </a:p>
           <a:p>
-            <a:pPr indent="0" marL="0">
+            <a:pPr marL="0" indent="0">
               <a:lnSpc>
                 <a:spcPct val="140000"/>
               </a:lnSpc>
@@ -12443,7 +12395,7 @@
             <a:endParaRPr lang="en-US" sz="1400" dirty="0"/>
           </a:p>
           <a:p>
-            <a:pPr indent="0" marL="0">
+            <a:pPr marL="0" indent="0">
               <a:lnSpc>
                 <a:spcPct val="140000"/>
               </a:lnSpc>
@@ -12512,7 +12464,7 @@
           <a:bodyPr wrap="square" lIns="0" tIns="0" rIns="0" bIns="0" rtlCol="0" anchor="ctr"/>
           <a:lstStyle/>
           <a:p>
-            <a:pPr algn="ctr" indent="0" marL="0">
+            <a:pPr marL="0" indent="0" algn="ctr">
               <a:buNone/>
             </a:pPr>
             <a:r>
@@ -12551,7 +12503,7 @@
           <a:bodyPr wrap="square" lIns="0" tIns="0" rIns="0" bIns="0" rtlCol="0" anchor="ctr"/>
           <a:lstStyle/>
           <a:p>
-            <a:pPr algn="ctr" indent="0" marL="0">
+            <a:pPr marL="0" indent="0" algn="ctr">
               <a:buNone/>
             </a:pPr>
             <a:r>
@@ -12585,6 +12537,7 @@
         <a:solidFill>
           <a:srgbClr val="FFFFFF"/>
         </a:solidFill>
+        <a:effectLst/>
       </p:bgPr>
     </p:bg>
     <p:spTree>
@@ -12622,11 +12575,11 @@
           <a:bodyPr wrap="square" lIns="0" tIns="0" rIns="0" bIns="0" rtlCol="0" anchor="ctr"/>
           <a:lstStyle/>
           <a:p>
-            <a:pPr indent="0" marL="0">
-              <a:buNone/>
-            </a:pPr>
-            <a:r>
-              <a:rPr lang="en-US" sz="1200" b="1" spc="200" kern="0" dirty="0">
+            <a:pPr marL="0" indent="0">
+              <a:buNone/>
+            </a:pPr>
+            <a:r>
+              <a:rPr lang="en-US" sz="1200" b="1" kern="0" spc="200" dirty="0">
                 <a:solidFill>
                   <a:srgbClr val="0B5EA8"/>
                 </a:solidFill>
@@ -12661,7 +12614,7 @@
           <a:bodyPr wrap="square" lIns="0" tIns="0" rIns="0" bIns="0" rtlCol="0" anchor="t"/>
           <a:lstStyle/>
           <a:p>
-            <a:pPr indent="0" marL="0">
+            <a:pPr marL="0" indent="0">
               <a:buNone/>
             </a:pPr>
             <a:r>
@@ -12681,14 +12634,14 @@
       </p:sp>
       <p:pic>
         <p:nvPicPr>
-          <p:cNvPr id="4" name="Image 0" descr="C:\TEMP\claude\D--SourceCode-ntust-InvestmentSimulation\a4c87170-020d-4b6b-adfe-2a756176eb57\scratchpad\ppt\img\history-table.png">    </p:cNvPr>
+          <p:cNvPr id="4" name="Image 0" descr="C:\TEMP\claude\D--SourceCode-ntust-InvestmentSimulation\a4c87170-020d-4b6b-adfe-2a756176eb57\scratchpad\ppt\img\history-table.png"/>
           <p:cNvPicPr>
             <a:picLocks noChangeAspect="1"/>
           </p:cNvPicPr>
           <p:nvPr/>
         </p:nvPicPr>
         <p:blipFill>
-          <a:blip r:embed="rId1"/>
+          <a:blip r:embed="rId3"/>
           <a:stretch>
             <a:fillRect/>
           </a:stretch>
@@ -12702,7 +12655,7 @@
             <a:avLst/>
           </a:prstGeom>
           <a:effectLst>
-            <a:outerShdw sx="100000" sy="100000" kx="0" ky="0" algn="bl" rotWithShape="0" blurRad="177800" dist="38100" dir="5400000">
+            <a:outerShdw blurRad="177800" dist="38100" dir="5400000" algn="bl" rotWithShape="0">
               <a:srgbClr val="0B2545">
                 <a:alpha val="18000"/>
               </a:srgbClr>
@@ -12758,7 +12711,7 @@
           <a:bodyPr wrap="square" lIns="0" tIns="0" rIns="0" bIns="0" rtlCol="0" anchor="ctr"/>
           <a:lstStyle/>
           <a:p>
-            <a:pPr indent="0" marL="0">
+            <a:pPr marL="0" indent="0">
               <a:buNone/>
             </a:pPr>
             <a:r>
@@ -12797,7 +12750,7 @@
           <a:bodyPr wrap="square" lIns="0" tIns="0" rIns="0" bIns="0" rtlCol="0" anchor="ctr"/>
           <a:lstStyle/>
           <a:p>
-            <a:pPr indent="0" marL="0">
+            <a:pPr marL="0" indent="0">
               <a:lnSpc>
                 <a:spcPct val="125000"/>
               </a:lnSpc>
@@ -12817,7 +12770,7 @@
             <a:endParaRPr lang="en-US" sz="1250" dirty="0"/>
           </a:p>
           <a:p>
-            <a:pPr indent="0" marL="0">
+            <a:pPr marL="0" indent="0">
               <a:lnSpc>
                 <a:spcPct val="125000"/>
               </a:lnSpc>
@@ -12859,7 +12812,7 @@
           <a:bodyPr wrap="square" lIns="0" tIns="0" rIns="0" bIns="0" rtlCol="0" anchor="ctr"/>
           <a:lstStyle/>
           <a:p>
-            <a:pPr indent="0" marL="0">
+            <a:pPr marL="0" indent="0">
               <a:buNone/>
             </a:pPr>
             <a:r>
@@ -12898,7 +12851,7 @@
           <a:bodyPr wrap="square" lIns="0" tIns="0" rIns="0" bIns="0" rtlCol="0" anchor="ctr"/>
           <a:lstStyle/>
           <a:p>
-            <a:pPr indent="0" marL="0">
+            <a:pPr marL="0" indent="0">
               <a:lnSpc>
                 <a:spcPct val="125000"/>
               </a:lnSpc>
@@ -12918,7 +12871,7 @@
             <a:endParaRPr lang="en-US" sz="1250" dirty="0"/>
           </a:p>
           <a:p>
-            <a:pPr indent="0" marL="0">
+            <a:pPr marL="0" indent="0">
               <a:lnSpc>
                 <a:spcPct val="125000"/>
               </a:lnSpc>
@@ -12927,7 +12880,7 @@
             <a:endParaRPr lang="en-US" sz="1250" dirty="0"/>
           </a:p>
           <a:p>
-            <a:pPr indent="0" marL="0">
+            <a:pPr marL="0" indent="0">
               <a:lnSpc>
                 <a:spcPct val="125000"/>
               </a:lnSpc>
@@ -12964,6 +12917,7 @@
         <a:solidFill>
           <a:srgbClr val="FFFFFF"/>
         </a:solidFill>
+        <a:effectLst/>
       </p:bgPr>
     </p:bg>
     <p:spTree>
@@ -13001,11 +12955,11 @@
           <a:bodyPr wrap="square" lIns="0" tIns="0" rIns="0" bIns="0" rtlCol="0" anchor="ctr"/>
           <a:lstStyle/>
           <a:p>
-            <a:pPr indent="0" marL="0">
-              <a:buNone/>
-            </a:pPr>
-            <a:r>
-              <a:rPr lang="en-US" sz="1200" b="1" spc="200" kern="0" dirty="0">
+            <a:pPr marL="0" indent="0">
+              <a:buNone/>
+            </a:pPr>
+            <a:r>
+              <a:rPr lang="en-US" sz="1200" b="1" kern="0" spc="200" dirty="0">
                 <a:solidFill>
                   <a:srgbClr val="0B5EA8"/>
                 </a:solidFill>
@@ -13040,7 +12994,7 @@
           <a:bodyPr wrap="square" lIns="0" tIns="0" rIns="0" bIns="0" rtlCol="0" anchor="t"/>
           <a:lstStyle/>
           <a:p>
-            <a:pPr indent="0" marL="0">
+            <a:pPr marL="0" indent="0">
               <a:buNone/>
             </a:pPr>
             <a:r>
@@ -13106,7 +13060,7 @@
           <a:bodyPr wrap="square" lIns="0" tIns="0" rIns="0" bIns="0" rtlCol="0" anchor="ctr"/>
           <a:lstStyle/>
           <a:p>
-            <a:pPr algn="ctr" indent="0" marL="0">
+            <a:pPr marL="0" indent="0" algn="ctr">
               <a:buNone/>
             </a:pPr>
             <a:r>
@@ -13145,7 +13099,7 @@
           <a:bodyPr wrap="square" lIns="0" tIns="0" rIns="0" bIns="0" rtlCol="0" anchor="ctr"/>
           <a:lstStyle/>
           <a:p>
-            <a:pPr algn="ctr" indent="0" marL="0">
+            <a:pPr marL="0" indent="0" algn="ctr">
               <a:buNone/>
             </a:pPr>
             <a:r>
@@ -13211,7 +13165,7 @@
           <a:bodyPr wrap="square" lIns="0" tIns="0" rIns="0" bIns="0" rtlCol="0" anchor="ctr"/>
           <a:lstStyle/>
           <a:p>
-            <a:pPr algn="ctr" indent="0" marL="0">
+            <a:pPr marL="0" indent="0" algn="ctr">
               <a:buNone/>
             </a:pPr>
             <a:r>
@@ -13250,7 +13204,7 @@
           <a:bodyPr wrap="square" lIns="0" tIns="0" rIns="0" bIns="0" rtlCol="0" anchor="ctr"/>
           <a:lstStyle/>
           <a:p>
-            <a:pPr algn="ctr" indent="0" marL="0">
+            <a:pPr marL="0" indent="0" algn="ctr">
               <a:buNone/>
             </a:pPr>
             <a:r>
@@ -13316,7 +13270,7 @@
           <a:bodyPr wrap="square" lIns="0" tIns="0" rIns="0" bIns="0" rtlCol="0" anchor="ctr"/>
           <a:lstStyle/>
           <a:p>
-            <a:pPr algn="ctr" indent="0" marL="0">
+            <a:pPr marL="0" indent="0" algn="ctr">
               <a:buNone/>
             </a:pPr>
             <a:r>
@@ -13355,7 +13309,7 @@
           <a:bodyPr wrap="square" lIns="0" tIns="0" rIns="0" bIns="0" rtlCol="0" anchor="ctr"/>
           <a:lstStyle/>
           <a:p>
-            <a:pPr algn="ctr" indent="0" marL="0">
+            <a:pPr marL="0" indent="0" algn="ctr">
               <a:buNone/>
             </a:pPr>
             <a:r>
@@ -13421,7 +13375,7 @@
           <a:bodyPr wrap="square" lIns="0" tIns="0" rIns="0" bIns="0" rtlCol="0" anchor="ctr"/>
           <a:lstStyle/>
           <a:p>
-            <a:pPr algn="ctr" indent="0" marL="0">
+            <a:pPr marL="0" indent="0" algn="ctr">
               <a:buNone/>
             </a:pPr>
             <a:r>
@@ -13460,7 +13414,7 @@
           <a:bodyPr wrap="square" lIns="0" tIns="0" rIns="0" bIns="0" rtlCol="0" anchor="ctr"/>
           <a:lstStyle/>
           <a:p>
-            <a:pPr algn="ctr" indent="0" marL="0">
+            <a:pPr marL="0" indent="0" algn="ctr">
               <a:buNone/>
             </a:pPr>
             <a:r>
@@ -13526,7 +13480,7 @@
           <a:bodyPr wrap="square" lIns="0" tIns="0" rIns="0" bIns="0" rtlCol="0" anchor="ctr"/>
           <a:lstStyle/>
           <a:p>
-            <a:pPr algn="ctr" indent="0" marL="0">
+            <a:pPr marL="0" indent="0" algn="ctr">
               <a:buNone/>
             </a:pPr>
             <a:r>
@@ -13565,7 +13519,7 @@
           <a:bodyPr wrap="square" lIns="0" tIns="0" rIns="0" bIns="0" rtlCol="0" anchor="ctr"/>
           <a:lstStyle/>
           <a:p>
-            <a:pPr algn="ctr" indent="0" marL="0">
+            <a:pPr marL="0" indent="0" algn="ctr">
               <a:buNone/>
             </a:pPr>
             <a:r>
@@ -13631,7 +13585,7 @@
           <a:bodyPr wrap="square" lIns="0" tIns="0" rIns="0" bIns="0" rtlCol="0" anchor="ctr"/>
           <a:lstStyle/>
           <a:p>
-            <a:pPr algn="ctr" indent="0" marL="0">
+            <a:pPr marL="0" indent="0" algn="ctr">
               <a:buNone/>
             </a:pPr>
             <a:r>
@@ -13670,7 +13624,7 @@
           <a:bodyPr wrap="square" lIns="0" tIns="0" rIns="0" bIns="0" rtlCol="0" anchor="ctr"/>
           <a:lstStyle/>
           <a:p>
-            <a:pPr algn="ctr" indent="0" marL="0">
+            <a:pPr marL="0" indent="0" algn="ctr">
               <a:buNone/>
             </a:pPr>
             <a:r>
@@ -13709,7 +13663,7 @@
           <a:bodyPr wrap="square" lIns="0" tIns="0" rIns="0" bIns="0" rtlCol="0" anchor="ctr"/>
           <a:lstStyle/>
           <a:p>
-            <a:pPr indent="0" marL="0">
+            <a:pPr marL="0" indent="0">
               <a:buNone/>
             </a:pPr>
             <a:r>
@@ -13743,6 +13697,7 @@
         <a:solidFill>
           <a:srgbClr val="FFFFFF"/>
         </a:solidFill>
+        <a:effectLst/>
       </p:bgPr>
     </p:bg>
     <p:spTree>
@@ -13780,11 +13735,11 @@
           <a:bodyPr wrap="square" lIns="0" tIns="0" rIns="0" bIns="0" rtlCol="0" anchor="ctr"/>
           <a:lstStyle/>
           <a:p>
-            <a:pPr indent="0" marL="0">
-              <a:buNone/>
-            </a:pPr>
-            <a:r>
-              <a:rPr lang="en-US" sz="1200" b="1" spc="200" kern="0" dirty="0">
+            <a:pPr marL="0" indent="0">
+              <a:buNone/>
+            </a:pPr>
+            <a:r>
+              <a:rPr lang="en-US" sz="1200" b="1" kern="0" spc="200" dirty="0">
                 <a:solidFill>
                   <a:srgbClr val="0B5EA8"/>
                 </a:solidFill>
@@ -13819,7 +13774,7 @@
           <a:bodyPr wrap="square" lIns="0" tIns="0" rIns="0" bIns="0" rtlCol="0" anchor="t"/>
           <a:lstStyle/>
           <a:p>
-            <a:pPr indent="0" marL="0">
+            <a:pPr marL="0" indent="0">
               <a:buNone/>
             </a:pPr>
             <a:r>
@@ -13839,14 +13794,14 @@
       </p:sp>
       <p:pic>
         <p:nvPicPr>
-          <p:cNvPr id="4" name="Image 0" descr="C:\TEMP\claude\D--SourceCode-ntust-InvestmentSimulation\a4c87170-020d-4b6b-adfe-2a756176eb57\scratchpad\ppt\img\rank-stats.png">    </p:cNvPr>
+          <p:cNvPr id="4" name="Image 0" descr="C:\TEMP\claude\D--SourceCode-ntust-InvestmentSimulation\a4c87170-020d-4b6b-adfe-2a756176eb57\scratchpad\ppt\img\rank-stats.png"/>
           <p:cNvPicPr>
             <a:picLocks noChangeAspect="1"/>
           </p:cNvPicPr>
           <p:nvPr/>
         </p:nvPicPr>
         <p:blipFill>
-          <a:blip r:embed="rId1"/>
+          <a:blip r:embed="rId3"/>
           <a:stretch>
             <a:fillRect/>
           </a:stretch>
@@ -13860,7 +13815,7 @@
             <a:avLst/>
           </a:prstGeom>
           <a:effectLst>
-            <a:outerShdw sx="100000" sy="100000" kx="0" ky="0" algn="bl" rotWithShape="0" blurRad="177800" dist="38100" dir="5400000">
+            <a:outerShdw blurRad="177800" dist="38100" dir="5400000" algn="bl" rotWithShape="0">
               <a:srgbClr val="0B2545">
                 <a:alpha val="18000"/>
               </a:srgbClr>
@@ -13870,14 +13825,14 @@
       </p:pic>
       <p:pic>
         <p:nvPicPr>
-          <p:cNvPr id="5" name="Image 1" descr="C:\TEMP\claude\D--SourceCode-ntust-InvestmentSimulation\a4c87170-020d-4b6b-adfe-2a756176eb57\scratchpad\ppt\img\rank-chart.png">    </p:cNvPr>
+          <p:cNvPr id="5" name="Image 1" descr="C:\TEMP\claude\D--SourceCode-ntust-InvestmentSimulation\a4c87170-020d-4b6b-adfe-2a756176eb57\scratchpad\ppt\img\rank-chart.png"/>
           <p:cNvPicPr>
             <a:picLocks noChangeAspect="1"/>
           </p:cNvPicPr>
           <p:nvPr/>
         </p:nvPicPr>
         <p:blipFill>
-          <a:blip r:embed="rId2"/>
+          <a:blip r:embed="rId4"/>
           <a:stretch>
             <a:fillRect/>
           </a:stretch>
@@ -13891,7 +13846,7 @@
             <a:avLst/>
           </a:prstGeom>
           <a:effectLst>
-            <a:outerShdw sx="100000" sy="100000" kx="0" ky="0" algn="bl" rotWithShape="0" blurRad="177800" dist="38100" dir="5400000">
+            <a:outerShdw blurRad="177800" dist="38100" dir="5400000" algn="bl" rotWithShape="0">
               <a:srgbClr val="0B2545">
                 <a:alpha val="18000"/>
               </a:srgbClr>
@@ -13947,7 +13902,7 @@
           <a:bodyPr wrap="square" lIns="0" tIns="0" rIns="0" bIns="0" rtlCol="0" anchor="ctr"/>
           <a:lstStyle/>
           <a:p>
-            <a:pPr indent="0" marL="0">
+            <a:pPr marL="0" indent="0">
               <a:buNone/>
             </a:pPr>
             <a:r>
@@ -13986,7 +13941,7 @@
           <a:bodyPr wrap="square" lIns="0" tIns="0" rIns="0" bIns="0" rtlCol="0" anchor="ctr"/>
           <a:lstStyle/>
           <a:p>
-            <a:pPr indent="0" marL="0">
+            <a:pPr marL="0" indent="0">
               <a:lnSpc>
                 <a:spcPct val="130000"/>
               </a:lnSpc>
@@ -14006,7 +13961,7 @@
             <a:endParaRPr lang="en-US" sz="1250" dirty="0"/>
           </a:p>
           <a:p>
-            <a:pPr indent="0" marL="0">
+            <a:pPr marL="0" indent="0">
               <a:lnSpc>
                 <a:spcPct val="130000"/>
               </a:lnSpc>
@@ -14015,7 +13970,7 @@
             <a:endParaRPr lang="en-US" sz="1250" dirty="0"/>
           </a:p>
           <a:p>
-            <a:pPr indent="0" marL="0">
+            <a:pPr marL="0" indent="0">
               <a:lnSpc>
                 <a:spcPct val="130000"/>
               </a:lnSpc>
@@ -14035,7 +13990,7 @@
             <a:endParaRPr lang="en-US" sz="1250" dirty="0"/>
           </a:p>
           <a:p>
-            <a:pPr indent="0" marL="0">
+            <a:pPr marL="0" indent="0">
               <a:lnSpc>
                 <a:spcPct val="130000"/>
               </a:lnSpc>
@@ -14044,7 +13999,7 @@
             <a:endParaRPr lang="en-US" sz="1250" dirty="0"/>
           </a:p>
           <a:p>
-            <a:pPr indent="0" marL="0">
+            <a:pPr marL="0" indent="0">
               <a:lnSpc>
                 <a:spcPct val="130000"/>
               </a:lnSpc>
@@ -14081,6 +14036,7 @@
         <a:solidFill>
           <a:srgbClr val="FFFFFF"/>
         </a:solidFill>
+        <a:effectLst/>
       </p:bgPr>
     </p:bg>
     <p:spTree>
@@ -14118,11 +14074,11 @@
           <a:bodyPr wrap="square" lIns="0" tIns="0" rIns="0" bIns="0" rtlCol="0" anchor="ctr"/>
           <a:lstStyle/>
           <a:p>
-            <a:pPr indent="0" marL="0">
-              <a:buNone/>
-            </a:pPr>
-            <a:r>
-              <a:rPr lang="en-US" sz="1200" b="1" spc="200" kern="0" dirty="0">
+            <a:pPr marL="0" indent="0">
+              <a:buNone/>
+            </a:pPr>
+            <a:r>
+              <a:rPr lang="en-US" sz="1200" b="1" kern="0" spc="200" dirty="0">
                 <a:solidFill>
                   <a:srgbClr val="0B5EA8"/>
                 </a:solidFill>
@@ -14157,7 +14113,7 @@
           <a:bodyPr wrap="square" lIns="0" tIns="0" rIns="0" bIns="0" rtlCol="0" anchor="t"/>
           <a:lstStyle/>
           <a:p>
-            <a:pPr indent="0" marL="0">
+            <a:pPr marL="0" indent="0">
               <a:buNone/>
             </a:pPr>
             <a:r>
@@ -14177,14 +14133,14 @@
       </p:sp>
       <p:pic>
         <p:nvPicPr>
-          <p:cNvPr id="4" name="Image 0" descr="C:\TEMP\claude\D--SourceCode-ntust-InvestmentSimulation\a4c87170-020d-4b6b-adfe-2a756176eb57\scratchpad\ppt\img\rank-group.png">    </p:cNvPr>
+          <p:cNvPr id="4" name="Image 0" descr="C:\TEMP\claude\D--SourceCode-ntust-InvestmentSimulation\a4c87170-020d-4b6b-adfe-2a756176eb57\scratchpad\ppt\img\rank-group.png"/>
           <p:cNvPicPr>
             <a:picLocks noChangeAspect="1"/>
           </p:cNvPicPr>
           <p:nvPr/>
         </p:nvPicPr>
         <p:blipFill>
-          <a:blip r:embed="rId1"/>
+          <a:blip r:embed="rId3"/>
           <a:stretch>
             <a:fillRect/>
           </a:stretch>
@@ -14198,7 +14154,7 @@
             <a:avLst/>
           </a:prstGeom>
           <a:effectLst>
-            <a:outerShdw sx="100000" sy="100000" kx="0" ky="0" algn="bl" rotWithShape="0" blurRad="177800" dist="38100" dir="5400000">
+            <a:outerShdw blurRad="177800" dist="38100" dir="5400000" algn="bl" rotWithShape="0">
               <a:srgbClr val="0B2545">
                 <a:alpha val="18000"/>
               </a:srgbClr>
@@ -14254,7 +14210,7 @@
           <a:bodyPr wrap="square" lIns="0" tIns="0" rIns="0" bIns="0" rtlCol="0" anchor="ctr"/>
           <a:lstStyle/>
           <a:p>
-            <a:pPr algn="ctr" indent="0" marL="0">
+            <a:pPr marL="0" indent="0" algn="ctr">
               <a:buNone/>
             </a:pPr>
             <a:r>
@@ -14288,6 +14244,7 @@
         <a:solidFill>
           <a:srgbClr val="08355E"/>
         </a:solidFill>
+        <a:effectLst/>
       </p:bgPr>
     </p:bg>
     <p:spTree>
@@ -14345,7 +14302,7 @@
           <a:bodyPr wrap="square" lIns="0" tIns="0" rIns="0" bIns="0" rtlCol="0" anchor="ctr"/>
           <a:lstStyle/>
           <a:p>
-            <a:pPr algn="ctr" indent="0" marL="0">
+            <a:pPr marL="0" indent="0" algn="ctr">
               <a:buNone/>
             </a:pPr>
             <a:r>
@@ -14384,7 +14341,7 @@
           <a:bodyPr wrap="square" lIns="0" tIns="0" rIns="0" bIns="0" rtlCol="0" anchor="ctr"/>
           <a:lstStyle/>
           <a:p>
-            <a:pPr indent="0" marL="0">
+            <a:pPr marL="0" indent="0">
               <a:buNone/>
             </a:pPr>
             <a:r>
@@ -14423,7 +14380,7 @@
           <a:bodyPr wrap="square" lIns="0" tIns="0" rIns="0" bIns="0" rtlCol="0" anchor="ctr"/>
           <a:lstStyle/>
           <a:p>
-            <a:pPr indent="0" marL="0">
+            <a:pPr marL="0" indent="0">
               <a:buNone/>
             </a:pPr>
             <a:r>
@@ -14457,6 +14414,7 @@
         <a:solidFill>
           <a:srgbClr val="FFFFFF"/>
         </a:solidFill>
+        <a:effectLst/>
       </p:bgPr>
     </p:bg>
     <p:spTree>
@@ -14494,11 +14452,11 @@
           <a:bodyPr wrap="square" lIns="0" tIns="0" rIns="0" bIns="0" rtlCol="0" anchor="ctr"/>
           <a:lstStyle/>
           <a:p>
-            <a:pPr indent="0" marL="0">
-              <a:buNone/>
-            </a:pPr>
-            <a:r>
-              <a:rPr lang="en-US" sz="1200" b="1" spc="200" kern="0" dirty="0">
+            <a:pPr marL="0" indent="0">
+              <a:buNone/>
+            </a:pPr>
+            <a:r>
+              <a:rPr lang="en-US" sz="1200" b="1" kern="0" spc="200" dirty="0">
                 <a:solidFill>
                   <a:srgbClr val="0B5EA8"/>
                 </a:solidFill>
@@ -14533,7 +14491,7 @@
           <a:bodyPr wrap="square" lIns="0" tIns="0" rIns="0" bIns="0" rtlCol="0" anchor="t"/>
           <a:lstStyle/>
           <a:p>
-            <a:pPr indent="0" marL="0">
+            <a:pPr marL="0" indent="0">
               <a:buNone/>
             </a:pPr>
             <a:r>
@@ -14619,7 +14577,7 @@
           <a:bodyPr wrap="square" lIns="0" tIns="0" rIns="0" bIns="0" rtlCol="0" anchor="ctr"/>
           <a:lstStyle/>
           <a:p>
-            <a:pPr algn="ctr" indent="0" marL="0">
+            <a:pPr marL="0" indent="0" algn="ctr">
               <a:buNone/>
             </a:pPr>
             <a:r>
@@ -14658,7 +14616,7 @@
           <a:bodyPr wrap="square" lIns="0" tIns="0" rIns="0" bIns="0" rtlCol="0" anchor="ctr"/>
           <a:lstStyle/>
           <a:p>
-            <a:pPr indent="0" marL="0">
+            <a:pPr marL="0" indent="0">
               <a:buNone/>
             </a:pPr>
             <a:r>
@@ -14697,7 +14655,7 @@
           <a:bodyPr wrap="square" lIns="0" tIns="0" rIns="0" bIns="0" rtlCol="0" anchor="ctr"/>
           <a:lstStyle/>
           <a:p>
-            <a:pPr indent="0" marL="0">
+            <a:pPr marL="0" indent="0">
               <a:lnSpc>
                 <a:spcPct val="115000"/>
               </a:lnSpc>
@@ -14717,7 +14675,7 @@
             <a:endParaRPr lang="en-US" sz="1250" dirty="0"/>
           </a:p>
           <a:p>
-            <a:pPr indent="0" marL="0">
+            <a:pPr marL="0" indent="0">
               <a:lnSpc>
                 <a:spcPct val="115000"/>
               </a:lnSpc>
@@ -14806,7 +14764,7 @@
           <a:bodyPr wrap="square" lIns="0" tIns="0" rIns="0" bIns="0" rtlCol="0" anchor="ctr"/>
           <a:lstStyle/>
           <a:p>
-            <a:pPr algn="ctr" indent="0" marL="0">
+            <a:pPr marL="0" indent="0" algn="ctr">
               <a:buNone/>
             </a:pPr>
             <a:r>
@@ -14845,7 +14803,7 @@
           <a:bodyPr wrap="square" lIns="0" tIns="0" rIns="0" bIns="0" rtlCol="0" anchor="ctr"/>
           <a:lstStyle/>
           <a:p>
-            <a:pPr indent="0" marL="0">
+            <a:pPr marL="0" indent="0">
               <a:buNone/>
             </a:pPr>
             <a:r>
@@ -14884,7 +14842,7 @@
           <a:bodyPr wrap="square" lIns="0" tIns="0" rIns="0" bIns="0" rtlCol="0" anchor="ctr"/>
           <a:lstStyle/>
           <a:p>
-            <a:pPr indent="0" marL="0">
+            <a:pPr marL="0" indent="0">
               <a:lnSpc>
                 <a:spcPct val="115000"/>
               </a:lnSpc>
@@ -14904,7 +14862,7 @@
             <a:endParaRPr lang="en-US" sz="1250" dirty="0"/>
           </a:p>
           <a:p>
-            <a:pPr indent="0" marL="0">
+            <a:pPr marL="0" indent="0">
               <a:lnSpc>
                 <a:spcPct val="115000"/>
               </a:lnSpc>
@@ -14993,7 +14951,7 @@
           <a:bodyPr wrap="square" lIns="0" tIns="0" rIns="0" bIns="0" rtlCol="0" anchor="ctr"/>
           <a:lstStyle/>
           <a:p>
-            <a:pPr algn="ctr" indent="0" marL="0">
+            <a:pPr marL="0" indent="0" algn="ctr">
               <a:buNone/>
             </a:pPr>
             <a:r>
@@ -15032,7 +14990,7 @@
           <a:bodyPr wrap="square" lIns="0" tIns="0" rIns="0" bIns="0" rtlCol="0" anchor="ctr"/>
           <a:lstStyle/>
           <a:p>
-            <a:pPr indent="0" marL="0">
+            <a:pPr marL="0" indent="0">
               <a:buNone/>
             </a:pPr>
             <a:r>
@@ -15071,7 +15029,7 @@
           <a:bodyPr wrap="square" lIns="0" tIns="0" rIns="0" bIns="0" rtlCol="0" anchor="ctr"/>
           <a:lstStyle/>
           <a:p>
-            <a:pPr indent="0" marL="0">
+            <a:pPr marL="0" indent="0">
               <a:lnSpc>
                 <a:spcPct val="115000"/>
               </a:lnSpc>
@@ -15091,7 +15049,7 @@
             <a:endParaRPr lang="en-US" sz="1250" dirty="0"/>
           </a:p>
           <a:p>
-            <a:pPr indent="0" marL="0">
+            <a:pPr marL="0" indent="0">
               <a:lnSpc>
                 <a:spcPct val="115000"/>
               </a:lnSpc>
@@ -15180,7 +15138,7 @@
           <a:bodyPr wrap="square" lIns="0" tIns="0" rIns="0" bIns="0" rtlCol="0" anchor="ctr"/>
           <a:lstStyle/>
           <a:p>
-            <a:pPr algn="ctr" indent="0" marL="0">
+            <a:pPr marL="0" indent="0" algn="ctr">
               <a:buNone/>
             </a:pPr>
             <a:r>
@@ -15219,7 +15177,7 @@
           <a:bodyPr wrap="square" lIns="0" tIns="0" rIns="0" bIns="0" rtlCol="0" anchor="ctr"/>
           <a:lstStyle/>
           <a:p>
-            <a:pPr indent="0" marL="0">
+            <a:pPr marL="0" indent="0">
               <a:buNone/>
             </a:pPr>
             <a:r>
@@ -15258,7 +15216,7 @@
           <a:bodyPr wrap="square" lIns="0" tIns="0" rIns="0" bIns="0" rtlCol="0" anchor="ctr"/>
           <a:lstStyle/>
           <a:p>
-            <a:pPr indent="0" marL="0">
+            <a:pPr marL="0" indent="0">
               <a:lnSpc>
                 <a:spcPct val="115000"/>
               </a:lnSpc>
@@ -15278,7 +15236,7 @@
             <a:endParaRPr lang="en-US" sz="1250" dirty="0"/>
           </a:p>
           <a:p>
-            <a:pPr indent="0" marL="0">
+            <a:pPr marL="0" indent="0">
               <a:lnSpc>
                 <a:spcPct val="115000"/>
               </a:lnSpc>
@@ -15315,6 +15273,7 @@
         <a:solidFill>
           <a:srgbClr val="FFFFFF"/>
         </a:solidFill>
+        <a:effectLst/>
       </p:bgPr>
     </p:bg>
     <p:spTree>
@@ -15352,11 +15311,11 @@
           <a:bodyPr wrap="square" lIns="0" tIns="0" rIns="0" bIns="0" rtlCol="0" anchor="ctr"/>
           <a:lstStyle/>
           <a:p>
-            <a:pPr indent="0" marL="0">
-              <a:buNone/>
-            </a:pPr>
-            <a:r>
-              <a:rPr lang="en-US" sz="1200" b="1" spc="200" kern="0" dirty="0">
+            <a:pPr marL="0" indent="0">
+              <a:buNone/>
+            </a:pPr>
+            <a:r>
+              <a:rPr lang="en-US" sz="1200" b="1" kern="0" spc="200" dirty="0">
                 <a:solidFill>
                   <a:srgbClr val="0B5EA8"/>
                 </a:solidFill>
@@ -15391,7 +15350,7 @@
           <a:bodyPr wrap="square" lIns="0" tIns="0" rIns="0" bIns="0" rtlCol="0" anchor="t"/>
           <a:lstStyle/>
           <a:p>
-            <a:pPr indent="0" marL="0">
+            <a:pPr marL="0" indent="0">
               <a:buNone/>
             </a:pPr>
             <a:r>
@@ -15411,14 +15370,14 @@
       </p:sp>
       <p:pic>
         <p:nvPicPr>
-          <p:cNvPr id="4" name="Image 0" descr="C:\TEMP\claude\D--SourceCode-ntust-InvestmentSimulation\a4c87170-020d-4b6b-adfe-2a756176eb57\scratchpad\ppt\img\admin-joincode.png">    </p:cNvPr>
+          <p:cNvPr id="4" name="Image 0" descr="C:\TEMP\claude\D--SourceCode-ntust-InvestmentSimulation\a4c87170-020d-4b6b-adfe-2a756176eb57\scratchpad\ppt\img\admin-joincode.png"/>
           <p:cNvPicPr>
             <a:picLocks noChangeAspect="1"/>
           </p:cNvPicPr>
           <p:nvPr/>
         </p:nvPicPr>
         <p:blipFill>
-          <a:blip r:embed="rId1"/>
+          <a:blip r:embed="rId3"/>
           <a:stretch>
             <a:fillRect/>
           </a:stretch>
@@ -15432,7 +15391,7 @@
             <a:avLst/>
           </a:prstGeom>
           <a:effectLst>
-            <a:outerShdw sx="100000" sy="100000" kx="0" ky="0" algn="bl" rotWithShape="0" blurRad="177800" dist="38100" dir="5400000">
+            <a:outerShdw blurRad="177800" dist="38100" dir="5400000" algn="bl" rotWithShape="0">
               <a:srgbClr val="0B2545">
                 <a:alpha val="18000"/>
               </a:srgbClr>
@@ -15481,7 +15440,7 @@
           <a:bodyPr wrap="square" lIns="0" tIns="0" rIns="0" bIns="0" rtlCol="0" anchor="ctr"/>
           <a:lstStyle/>
           <a:p>
-            <a:pPr indent="0" marL="0">
+            <a:pPr marL="0" indent="0">
               <a:buNone/>
             </a:pPr>
             <a:r>
@@ -15520,7 +15479,7 @@
           <a:bodyPr wrap="square" lIns="0" tIns="0" rIns="0" bIns="0" rtlCol="0" anchor="ctr"/>
           <a:lstStyle/>
           <a:p>
-            <a:pPr indent="0" marL="0">
+            <a:pPr marL="0" indent="0">
               <a:buNone/>
             </a:pPr>
             <a:r>
@@ -15579,7 +15538,7 @@
           <a:bodyPr wrap="square" lIns="0" tIns="0" rIns="0" bIns="0" rtlCol="0" anchor="ctr"/>
           <a:lstStyle/>
           <a:p>
-            <a:pPr indent="0" marL="0">
+            <a:pPr marL="0" indent="0">
               <a:buNone/>
             </a:pPr>
             <a:r>
@@ -15618,7 +15577,7 @@
           <a:bodyPr wrap="square" lIns="0" tIns="0" rIns="0" bIns="0" rtlCol="0" anchor="ctr"/>
           <a:lstStyle/>
           <a:p>
-            <a:pPr indent="0" marL="0">
+            <a:pPr marL="0" indent="0">
               <a:buNone/>
             </a:pPr>
             <a:r>
@@ -15677,7 +15636,7 @@
           <a:bodyPr wrap="square" lIns="0" tIns="0" rIns="0" bIns="0" rtlCol="0" anchor="ctr"/>
           <a:lstStyle/>
           <a:p>
-            <a:pPr indent="0" marL="0">
+            <a:pPr marL="0" indent="0">
               <a:buNone/>
             </a:pPr>
             <a:r>
@@ -15716,7 +15675,7 @@
           <a:bodyPr wrap="square" lIns="0" tIns="0" rIns="0" bIns="0" rtlCol="0" anchor="ctr"/>
           <a:lstStyle/>
           <a:p>
-            <a:pPr indent="0" marL="0">
+            <a:pPr marL="0" indent="0">
               <a:buNone/>
             </a:pPr>
             <a:r>
@@ -15750,6 +15709,7 @@
         <a:solidFill>
           <a:srgbClr val="FFFFFF"/>
         </a:solidFill>
+        <a:effectLst/>
       </p:bgPr>
     </p:bg>
     <p:spTree>
@@ -15787,11 +15747,11 @@
           <a:bodyPr wrap="square" lIns="0" tIns="0" rIns="0" bIns="0" rtlCol="0" anchor="ctr"/>
           <a:lstStyle/>
           <a:p>
-            <a:pPr indent="0" marL="0">
-              <a:buNone/>
-            </a:pPr>
-            <a:r>
-              <a:rPr lang="en-US" sz="1200" b="1" spc="200" kern="0" dirty="0">
+            <a:pPr marL="0" indent="0">
+              <a:buNone/>
+            </a:pPr>
+            <a:r>
+              <a:rPr lang="en-US" sz="1200" b="1" kern="0" spc="200" dirty="0">
                 <a:solidFill>
                   <a:srgbClr val="0B5EA8"/>
                 </a:solidFill>
@@ -15826,7 +15786,7 @@
           <a:bodyPr wrap="square" lIns="0" tIns="0" rIns="0" bIns="0" rtlCol="0" anchor="t"/>
           <a:lstStyle/>
           <a:p>
-            <a:pPr indent="0" marL="0">
+            <a:pPr marL="0" indent="0">
               <a:buNone/>
             </a:pPr>
             <a:r>
@@ -15846,14 +15806,14 @@
       </p:sp>
       <p:pic>
         <p:nvPicPr>
-          <p:cNvPr id="4" name="Image 0" descr="C:\TEMP\claude\D--SourceCode-ntust-InvestmentSimulation\a4c87170-020d-4b6b-adfe-2a756176eb57\scratchpad\ppt\img\admin-roster.png">    </p:cNvPr>
+          <p:cNvPr id="4" name="Image 0" descr="C:\TEMP\claude\D--SourceCode-ntust-InvestmentSimulation\a4c87170-020d-4b6b-adfe-2a756176eb57\scratchpad\ppt\img\admin-roster.png"/>
           <p:cNvPicPr>
             <a:picLocks noChangeAspect="1"/>
           </p:cNvPicPr>
           <p:nvPr/>
         </p:nvPicPr>
         <p:blipFill>
-          <a:blip r:embed="rId1"/>
+          <a:blip r:embed="rId3"/>
           <a:stretch>
             <a:fillRect/>
           </a:stretch>
@@ -15867,7 +15827,7 @@
             <a:avLst/>
           </a:prstGeom>
           <a:effectLst>
-            <a:outerShdw sx="100000" sy="100000" kx="0" ky="0" algn="bl" rotWithShape="0" blurRad="177800" dist="38100" dir="5400000">
+            <a:outerShdw blurRad="177800" dist="38100" dir="5400000" algn="bl" rotWithShape="0">
               <a:srgbClr val="0B2545">
                 <a:alpha val="18000"/>
               </a:srgbClr>
@@ -15923,7 +15883,7 @@
           <a:bodyPr wrap="square" lIns="0" tIns="0" rIns="0" bIns="0" rtlCol="0" anchor="ctr"/>
           <a:lstStyle/>
           <a:p>
-            <a:pPr indent="0" marL="0">
+            <a:pPr marL="0" indent="0">
               <a:buNone/>
             </a:pPr>
             <a:r>
@@ -15962,7 +15922,7 @@
           <a:bodyPr wrap="square" lIns="0" tIns="0" rIns="0" bIns="0" rtlCol="0" anchor="ctr"/>
           <a:lstStyle/>
           <a:p>
-            <a:pPr indent="0" marL="0">
+            <a:pPr marL="0" indent="0">
               <a:lnSpc>
                 <a:spcPct val="115000"/>
               </a:lnSpc>
@@ -16031,7 +15991,7 @@
           <a:bodyPr wrap="square" lIns="0" tIns="0" rIns="0" bIns="0" rtlCol="0" anchor="ctr"/>
           <a:lstStyle/>
           <a:p>
-            <a:pPr indent="0" marL="0">
+            <a:pPr marL="0" indent="0">
               <a:buNone/>
             </a:pPr>
             <a:r>
@@ -16070,7 +16030,7 @@
           <a:bodyPr wrap="square" lIns="0" tIns="0" rIns="0" bIns="0" rtlCol="0" anchor="ctr"/>
           <a:lstStyle/>
           <a:p>
-            <a:pPr indent="0" marL="0">
+            <a:pPr marL="0" indent="0">
               <a:lnSpc>
                 <a:spcPct val="115000"/>
               </a:lnSpc>
@@ -16139,7 +16099,7 @@
           <a:bodyPr wrap="square" lIns="0" tIns="0" rIns="0" bIns="0" rtlCol="0" anchor="ctr"/>
           <a:lstStyle/>
           <a:p>
-            <a:pPr indent="0" marL="0">
+            <a:pPr marL="0" indent="0">
               <a:buNone/>
             </a:pPr>
             <a:r>
@@ -16178,7 +16138,7 @@
           <a:bodyPr wrap="square" lIns="0" tIns="0" rIns="0" bIns="0" rtlCol="0" anchor="ctr"/>
           <a:lstStyle/>
           <a:p>
-            <a:pPr indent="0" marL="0">
+            <a:pPr marL="0" indent="0">
               <a:lnSpc>
                 <a:spcPct val="115000"/>
               </a:lnSpc>
@@ -16215,6 +16175,7 @@
         <a:solidFill>
           <a:srgbClr val="FFFFFF"/>
         </a:solidFill>
+        <a:effectLst/>
       </p:bgPr>
     </p:bg>
     <p:spTree>
@@ -16252,11 +16213,11 @@
           <a:bodyPr wrap="square" lIns="0" tIns="0" rIns="0" bIns="0" rtlCol="0" anchor="ctr"/>
           <a:lstStyle/>
           <a:p>
-            <a:pPr indent="0" marL="0">
-              <a:buNone/>
-            </a:pPr>
-            <a:r>
-              <a:rPr lang="en-US" sz="1200" b="1" spc="200" kern="0" dirty="0">
+            <a:pPr marL="0" indent="0">
+              <a:buNone/>
+            </a:pPr>
+            <a:r>
+              <a:rPr lang="en-US" sz="1200" b="1" kern="0" spc="200" dirty="0">
                 <a:solidFill>
                   <a:srgbClr val="0B5EA8"/>
                 </a:solidFill>
@@ -16291,7 +16252,7 @@
           <a:bodyPr wrap="square" lIns="0" tIns="0" rIns="0" bIns="0" rtlCol="0" anchor="t"/>
           <a:lstStyle/>
           <a:p>
-            <a:pPr indent="0" marL="0">
+            <a:pPr marL="0" indent="0">
               <a:buNone/>
             </a:pPr>
             <a:r>
@@ -16311,14 +16272,14 @@
       </p:sp>
       <p:pic>
         <p:nvPicPr>
-          <p:cNvPr id="4" name="Image 0" descr="C:\TEMP\claude\D--SourceCode-ntust-InvestmentSimulation\a4c87170-020d-4b6b-adfe-2a756176eb57\scratchpad\ppt\img\admin-mapping.png">    </p:cNvPr>
+          <p:cNvPr id="4" name="Image 0" descr="C:\TEMP\claude\D--SourceCode-ntust-InvestmentSimulation\a4c87170-020d-4b6b-adfe-2a756176eb57\scratchpad\ppt\img\admin-mapping.png"/>
           <p:cNvPicPr>
             <a:picLocks noChangeAspect="1"/>
           </p:cNvPicPr>
           <p:nvPr/>
         </p:nvPicPr>
         <p:blipFill>
-          <a:blip r:embed="rId1"/>
+          <a:blip r:embed="rId3"/>
           <a:stretch>
             <a:fillRect/>
           </a:stretch>
@@ -16332,7 +16293,7 @@
             <a:avLst/>
           </a:prstGeom>
           <a:effectLst>
-            <a:outerShdw sx="100000" sy="100000" kx="0" ky="0" algn="bl" rotWithShape="0" blurRad="177800" dist="38100" dir="5400000">
+            <a:outerShdw blurRad="177800" dist="38100" dir="5400000" algn="bl" rotWithShape="0">
               <a:srgbClr val="0B2545">
                 <a:alpha val="18000"/>
               </a:srgbClr>
@@ -16361,7 +16322,7 @@
           <a:bodyPr wrap="square" lIns="0" tIns="0" rIns="0" bIns="0" rtlCol="0" anchor="ctr"/>
           <a:lstStyle/>
           <a:p>
-            <a:pPr indent="0" marL="0">
+            <a:pPr marL="0" indent="0">
               <a:buNone/>
             </a:pPr>
             <a:r>
@@ -16395,15 +16356,27 @@
         </p:nvGraphicFramePr>
         <p:xfrm>
           <a:off x="548640" y="4480560"/>
-          <a:ext cx="5486400" cy="914400"/>
+          <a:ext cx="5486400" cy="1645920"/>
         </p:xfrm>
         <a:graphic>
           <a:graphicData uri="http://schemas.openxmlformats.org/drawingml/2006/table">
             <a:tbl>
               <a:tblPr/>
               <a:tblGrid>
-                <a:gridCol w="2377440"/>
-                <a:gridCol w="3108960"/>
+                <a:gridCol w="2377440">
+                  <a:extLst>
+                    <a:ext uri="{9D8B030D-6E8A-4147-A177-3AD203B41FA5}">
+                      <a16:colId xmlns:a16="http://schemas.microsoft.com/office/drawing/2014/main" val="20000"/>
+                    </a:ext>
+                  </a:extLst>
+                </a:gridCol>
+                <a:gridCol w="3108960">
+                  <a:extLst>
+                    <a:ext uri="{9D8B030D-6E8A-4147-A177-3AD203B41FA5}">
+                      <a16:colId xmlns:a16="http://schemas.microsoft.com/office/drawing/2014/main" val="20001"/>
+                    </a:ext>
+                  </a:extLst>
+                </a:gridCol>
               </a:tblGrid>
               <a:tr h="329184">
                 <a:tc>
@@ -16411,7 +16384,7 @@
                     <a:bodyPr/>
                     <a:lstStyle/>
                     <a:p>
-                      <a:pPr indent="0" marL="0">
+                      <a:pPr marL="0" indent="0">
                         <a:buNone/>
                       </a:pPr>
                       <a:r>
@@ -16432,7 +16405,7 @@
                       </a:endParaRPr>
                     </a:p>
                   </a:txBody>
-                  <a:tcPr marL="91440" marR="91440" marT="45720" marB="45720" anchor="ctr">
+                  <a:tcPr anchor="ctr">
                     <a:lnL w="12700" cap="flat" cmpd="sng" algn="ctr">
                       <a:solidFill>
                         <a:srgbClr val="DCE5EE"/>
@@ -16479,7 +16452,7 @@
                     <a:bodyPr/>
                     <a:lstStyle/>
                     <a:p>
-                      <a:pPr indent="0" marL="0">
+                      <a:pPr marL="0" indent="0">
                         <a:buNone/>
                       </a:pPr>
                       <a:r>
@@ -16500,7 +16473,7 @@
                       </a:endParaRPr>
                     </a:p>
                   </a:txBody>
-                  <a:tcPr marL="91440" marR="91440" marT="45720" marB="45720" anchor="ctr">
+                  <a:tcPr anchor="ctr">
                     <a:lnL w="12700" cap="flat" cmpd="sng" algn="ctr">
                       <a:solidFill>
                         <a:srgbClr val="DCE5EE"/>
@@ -16542,6 +16515,11 @@
                     </a:solidFill>
                   </a:tcPr>
                 </a:tc>
+                <a:extLst>
+                  <a:ext uri="{0D108BD9-81ED-4DB2-BD59-A6C34878D82A}">
+                    <a16:rowId xmlns:a16="http://schemas.microsoft.com/office/drawing/2014/main" val="10000"/>
+                  </a:ext>
+                </a:extLst>
               </a:tr>
               <a:tr h="329184">
                 <a:tc>
@@ -16549,7 +16527,7 @@
                     <a:bodyPr/>
                     <a:lstStyle/>
                     <a:p>
-                      <a:pPr indent="0" marL="0">
+                      <a:pPr marL="0" indent="0">
                         <a:buNone/>
                       </a:pPr>
                       <a:r>
@@ -16570,7 +16548,7 @@
                       </a:endParaRPr>
                     </a:p>
                   </a:txBody>
-                  <a:tcPr marL="91440" marR="91440" marT="45720" marB="45720" anchor="ctr">
+                  <a:tcPr anchor="ctr">
                     <a:lnL w="12700" cap="flat" cmpd="sng" algn="ctr">
                       <a:solidFill>
                         <a:srgbClr val="DCE5EE"/>
@@ -16617,7 +16595,7 @@
                     <a:bodyPr/>
                     <a:lstStyle/>
                     <a:p>
-                      <a:pPr indent="0" marL="0">
+                      <a:pPr marL="0" indent="0">
                         <a:buNone/>
                       </a:pPr>
                       <a:r>
@@ -16638,7 +16616,7 @@
                       </a:endParaRPr>
                     </a:p>
                   </a:txBody>
-                  <a:tcPr marL="91440" marR="91440" marT="45720" marB="45720" anchor="ctr">
+                  <a:tcPr anchor="ctr">
                     <a:lnL w="12700" cap="flat" cmpd="sng" algn="ctr">
                       <a:solidFill>
                         <a:srgbClr val="DCE5EE"/>
@@ -16680,6 +16658,11 @@
                     </a:solidFill>
                   </a:tcPr>
                 </a:tc>
+                <a:extLst>
+                  <a:ext uri="{0D108BD9-81ED-4DB2-BD59-A6C34878D82A}">
+                    <a16:rowId xmlns:a16="http://schemas.microsoft.com/office/drawing/2014/main" val="10001"/>
+                  </a:ext>
+                </a:extLst>
               </a:tr>
               <a:tr h="329184">
                 <a:tc>
@@ -16687,7 +16670,7 @@
                     <a:bodyPr/>
                     <a:lstStyle/>
                     <a:p>
-                      <a:pPr indent="0" marL="0">
+                      <a:pPr marL="0" indent="0">
                         <a:buNone/>
                       </a:pPr>
                       <a:r>
@@ -16708,7 +16691,7 @@
                       </a:endParaRPr>
                     </a:p>
                   </a:txBody>
-                  <a:tcPr marL="91440" marR="91440" marT="45720" marB="45720" anchor="ctr">
+                  <a:tcPr anchor="ctr">
                     <a:lnL w="12700" cap="flat" cmpd="sng" algn="ctr">
                       <a:solidFill>
                         <a:srgbClr val="DCE5EE"/>
@@ -16755,7 +16738,7 @@
                     <a:bodyPr/>
                     <a:lstStyle/>
                     <a:p>
-                      <a:pPr indent="0" marL="0">
+                      <a:pPr marL="0" indent="0">
                         <a:buNone/>
                       </a:pPr>
                       <a:r>
@@ -16776,7 +16759,7 @@
                       </a:endParaRPr>
                     </a:p>
                   </a:txBody>
-                  <a:tcPr marL="91440" marR="91440" marT="45720" marB="45720" anchor="ctr">
+                  <a:tcPr anchor="ctr">
                     <a:lnL w="12700" cap="flat" cmpd="sng" algn="ctr">
                       <a:solidFill>
                         <a:srgbClr val="DCE5EE"/>
@@ -16818,6 +16801,11 @@
                     </a:solidFill>
                   </a:tcPr>
                 </a:tc>
+                <a:extLst>
+                  <a:ext uri="{0D108BD9-81ED-4DB2-BD59-A6C34878D82A}">
+                    <a16:rowId xmlns:a16="http://schemas.microsoft.com/office/drawing/2014/main" val="10002"/>
+                  </a:ext>
+                </a:extLst>
               </a:tr>
               <a:tr h="329184">
                 <a:tc>
@@ -16825,7 +16813,7 @@
                     <a:bodyPr/>
                     <a:lstStyle/>
                     <a:p>
-                      <a:pPr indent="0" marL="0">
+                      <a:pPr marL="0" indent="0">
                         <a:buNone/>
                       </a:pPr>
                       <a:r>
@@ -16846,7 +16834,7 @@
                       </a:endParaRPr>
                     </a:p>
                   </a:txBody>
-                  <a:tcPr marL="91440" marR="91440" marT="45720" marB="45720" anchor="ctr">
+                  <a:tcPr anchor="ctr">
                     <a:lnL w="12700" cap="flat" cmpd="sng" algn="ctr">
                       <a:solidFill>
                         <a:srgbClr val="DCE5EE"/>
@@ -16893,7 +16881,7 @@
                     <a:bodyPr/>
                     <a:lstStyle/>
                     <a:p>
-                      <a:pPr indent="0" marL="0">
+                      <a:pPr marL="0" indent="0">
                         <a:buNone/>
                       </a:pPr>
                       <a:r>
@@ -16914,7 +16902,7 @@
                       </a:endParaRPr>
                     </a:p>
                   </a:txBody>
-                  <a:tcPr marL="91440" marR="91440" marT="45720" marB="45720" anchor="ctr">
+                  <a:tcPr anchor="ctr">
                     <a:lnL w="12700" cap="flat" cmpd="sng" algn="ctr">
                       <a:solidFill>
                         <a:srgbClr val="DCE5EE"/>
@@ -16956,6 +16944,11 @@
                     </a:solidFill>
                   </a:tcPr>
                 </a:tc>
+                <a:extLst>
+                  <a:ext uri="{0D108BD9-81ED-4DB2-BD59-A6C34878D82A}">
+                    <a16:rowId xmlns:a16="http://schemas.microsoft.com/office/drawing/2014/main" val="10003"/>
+                  </a:ext>
+                </a:extLst>
               </a:tr>
               <a:tr h="329184">
                 <a:tc>
@@ -16963,7 +16956,7 @@
                     <a:bodyPr/>
                     <a:lstStyle/>
                     <a:p>
-                      <a:pPr indent="0" marL="0">
+                      <a:pPr marL="0" indent="0">
                         <a:buNone/>
                       </a:pPr>
                       <a:r>
@@ -16984,7 +16977,7 @@
                       </a:endParaRPr>
                     </a:p>
                   </a:txBody>
-                  <a:tcPr marL="91440" marR="91440" marT="45720" marB="45720" anchor="ctr">
+                  <a:tcPr anchor="ctr">
                     <a:lnL w="12700" cap="flat" cmpd="sng" algn="ctr">
                       <a:solidFill>
                         <a:srgbClr val="DCE5EE"/>
@@ -17031,7 +17024,7 @@
                     <a:bodyPr/>
                     <a:lstStyle/>
                     <a:p>
-                      <a:pPr indent="0" marL="0">
+                      <a:pPr marL="0" indent="0">
                         <a:buNone/>
                       </a:pPr>
                       <a:r>
@@ -17052,7 +17045,7 @@
                       </a:endParaRPr>
                     </a:p>
                   </a:txBody>
-                  <a:tcPr marL="91440" marR="91440" marT="45720" marB="45720" anchor="ctr">
+                  <a:tcPr anchor="ctr">
                     <a:lnL w="12700" cap="flat" cmpd="sng" algn="ctr">
                       <a:solidFill>
                         <a:srgbClr val="DCE5EE"/>
@@ -17094,6 +17087,11 @@
                     </a:solidFill>
                   </a:tcPr>
                 </a:tc>
+                <a:extLst>
+                  <a:ext uri="{0D108BD9-81ED-4DB2-BD59-A6C34878D82A}">
+                    <a16:rowId xmlns:a16="http://schemas.microsoft.com/office/drawing/2014/main" val="10004"/>
+                  </a:ext>
+                </a:extLst>
               </a:tr>
             </a:tbl>
           </a:graphicData>
@@ -17147,7 +17145,7 @@
           <a:bodyPr wrap="square" lIns="0" tIns="0" rIns="0" bIns="0" rtlCol="0" anchor="ctr"/>
           <a:lstStyle/>
           <a:p>
-            <a:pPr indent="0" marL="0">
+            <a:pPr marL="0" indent="0">
               <a:lnSpc>
                 <a:spcPct val="120000"/>
               </a:lnSpc>
@@ -17167,7 +17165,7 @@
             <a:endParaRPr lang="en-US" sz="1400" dirty="0"/>
           </a:p>
           <a:p>
-            <a:pPr indent="0" marL="0">
+            <a:pPr marL="0" indent="0">
               <a:lnSpc>
                 <a:spcPct val="120000"/>
               </a:lnSpc>
@@ -17187,7 +17185,7 @@
             <a:endParaRPr lang="en-US" sz="1400" dirty="0"/>
           </a:p>
           <a:p>
-            <a:pPr indent="0" marL="0">
+            <a:pPr marL="0" indent="0">
               <a:lnSpc>
                 <a:spcPct val="120000"/>
               </a:lnSpc>
@@ -17196,7 +17194,7 @@
             <a:endParaRPr lang="en-US" sz="1400" dirty="0"/>
           </a:p>
           <a:p>
-            <a:pPr indent="0" marL="0">
+            <a:pPr marL="0" indent="0">
               <a:lnSpc>
                 <a:spcPct val="120000"/>
               </a:lnSpc>
@@ -17233,6 +17231,7 @@
         <a:solidFill>
           <a:srgbClr val="FFFFFF"/>
         </a:solidFill>
+        <a:effectLst/>
       </p:bgPr>
     </p:bg>
     <p:spTree>
@@ -17270,11 +17269,11 @@
           <a:bodyPr wrap="square" lIns="0" tIns="0" rIns="0" bIns="0" rtlCol="0" anchor="ctr"/>
           <a:lstStyle/>
           <a:p>
-            <a:pPr indent="0" marL="0">
-              <a:buNone/>
-            </a:pPr>
-            <a:r>
-              <a:rPr lang="en-US" sz="1200" b="1" spc="200" kern="0" dirty="0">
+            <a:pPr marL="0" indent="0">
+              <a:buNone/>
+            </a:pPr>
+            <a:r>
+              <a:rPr lang="en-US" sz="1200" b="1" kern="0" spc="200" dirty="0">
                 <a:solidFill>
                   <a:srgbClr val="0B5EA8"/>
                 </a:solidFill>
@@ -17309,7 +17308,7 @@
           <a:bodyPr wrap="square" lIns="0" tIns="0" rIns="0" bIns="0" rtlCol="0" anchor="t"/>
           <a:lstStyle/>
           <a:p>
-            <a:pPr indent="0" marL="0">
+            <a:pPr marL="0" indent="0">
               <a:buNone/>
             </a:pPr>
             <a:r>
@@ -17329,14 +17328,14 @@
       </p:sp>
       <p:pic>
         <p:nvPicPr>
-          <p:cNvPr id="4" name="Image 0" descr="C:\TEMP\claude\D--SourceCode-ntust-InvestmentSimulation\a4c87170-020d-4b6b-adfe-2a756176eb57\scratchpad\ppt\img\admin-config.png">    </p:cNvPr>
+          <p:cNvPr id="4" name="Image 0" descr="C:\TEMP\claude\D--SourceCode-ntust-InvestmentSimulation\a4c87170-020d-4b6b-adfe-2a756176eb57\scratchpad\ppt\img\admin-config.png"/>
           <p:cNvPicPr>
             <a:picLocks noChangeAspect="1"/>
           </p:cNvPicPr>
           <p:nvPr/>
         </p:nvPicPr>
         <p:blipFill>
-          <a:blip r:embed="rId1"/>
+          <a:blip r:embed="rId3"/>
           <a:stretch>
             <a:fillRect/>
           </a:stretch>
@@ -17350,7 +17349,7 @@
             <a:avLst/>
           </a:prstGeom>
           <a:effectLst>
-            <a:outerShdw sx="100000" sy="100000" kx="0" ky="0" algn="bl" rotWithShape="0" blurRad="177800" dist="38100" dir="5400000">
+            <a:outerShdw blurRad="177800" dist="38100" dir="5400000" algn="bl" rotWithShape="0">
               <a:srgbClr val="0B2545">
                 <a:alpha val="18000"/>
               </a:srgbClr>
@@ -17406,7 +17405,7 @@
           <a:bodyPr wrap="square" lIns="0" tIns="0" rIns="0" bIns="0" rtlCol="0" anchor="ctr"/>
           <a:lstStyle/>
           <a:p>
-            <a:pPr indent="0" marL="0">
+            <a:pPr marL="0" indent="0">
               <a:buNone/>
             </a:pPr>
             <a:r>
@@ -17445,7 +17444,7 @@
           <a:bodyPr wrap="square" lIns="0" tIns="0" rIns="0" bIns="0" rtlCol="0" anchor="ctr"/>
           <a:lstStyle/>
           <a:p>
-            <a:pPr indent="0" marL="0">
+            <a:pPr marL="0" indent="0">
               <a:lnSpc>
                 <a:spcPct val="120000"/>
               </a:lnSpc>
@@ -17465,7 +17464,7 @@
             <a:endParaRPr lang="en-US" sz="1200" dirty="0"/>
           </a:p>
           <a:p>
-            <a:pPr indent="0" marL="0">
+            <a:pPr marL="0" indent="0">
               <a:lnSpc>
                 <a:spcPct val="120000"/>
               </a:lnSpc>
@@ -17485,7 +17484,7 @@
             <a:endParaRPr lang="en-US" sz="1200" dirty="0"/>
           </a:p>
           <a:p>
-            <a:pPr indent="0" marL="0">
+            <a:pPr marL="0" indent="0">
               <a:lnSpc>
                 <a:spcPct val="120000"/>
               </a:lnSpc>
@@ -17505,7 +17504,7 @@
             <a:endParaRPr lang="en-US" sz="1200" dirty="0"/>
           </a:p>
           <a:p>
-            <a:pPr indent="0" marL="0">
+            <a:pPr marL="0" indent="0">
               <a:lnSpc>
                 <a:spcPct val="120000"/>
               </a:lnSpc>
@@ -17514,7 +17513,7 @@
             <a:endParaRPr lang="en-US" sz="1200" dirty="0"/>
           </a:p>
           <a:p>
-            <a:pPr indent="0" marL="0">
+            <a:pPr marL="0" indent="0">
               <a:lnSpc>
                 <a:spcPct val="120000"/>
               </a:lnSpc>
@@ -17534,7 +17533,7 @@
             <a:endParaRPr lang="en-US" sz="1200" dirty="0"/>
           </a:p>
           <a:p>
-            <a:pPr indent="0" marL="0">
+            <a:pPr marL="0" indent="0">
               <a:lnSpc>
                 <a:spcPct val="120000"/>
               </a:lnSpc>
@@ -17554,7 +17553,7 @@
             <a:endParaRPr lang="en-US" sz="1200" dirty="0"/>
           </a:p>
           <a:p>
-            <a:pPr indent="0" marL="0">
+            <a:pPr marL="0" indent="0">
               <a:lnSpc>
                 <a:spcPct val="120000"/>
               </a:lnSpc>
@@ -17574,7 +17573,7 @@
             <a:endParaRPr lang="en-US" sz="1200" dirty="0"/>
           </a:p>
           <a:p>
-            <a:pPr indent="0" marL="0">
+            <a:pPr marL="0" indent="0">
               <a:lnSpc>
                 <a:spcPct val="120000"/>
               </a:lnSpc>
@@ -17583,7 +17582,7 @@
             <a:endParaRPr lang="en-US" sz="1200" dirty="0"/>
           </a:p>
           <a:p>
-            <a:pPr indent="0" marL="0">
+            <a:pPr marL="0" indent="0">
               <a:lnSpc>
                 <a:spcPct val="120000"/>
               </a:lnSpc>
@@ -17603,7 +17602,7 @@
             <a:endParaRPr lang="en-US" sz="1200" dirty="0"/>
           </a:p>
           <a:p>
-            <a:pPr indent="0" marL="0">
+            <a:pPr marL="0" indent="0">
               <a:lnSpc>
                 <a:spcPct val="120000"/>
               </a:lnSpc>
@@ -17623,7 +17622,7 @@
             <a:endParaRPr lang="en-US" sz="1200" dirty="0"/>
           </a:p>
           <a:p>
-            <a:pPr indent="0" marL="0">
+            <a:pPr marL="0" indent="0">
               <a:lnSpc>
                 <a:spcPct val="120000"/>
               </a:lnSpc>
@@ -17643,7 +17642,7 @@
             <a:endParaRPr lang="en-US" sz="1200" dirty="0"/>
           </a:p>
           <a:p>
-            <a:pPr indent="0" marL="0">
+            <a:pPr marL="0" indent="0">
               <a:lnSpc>
                 <a:spcPct val="120000"/>
               </a:lnSpc>
@@ -17652,7 +17651,7 @@
             <a:endParaRPr lang="en-US" sz="1200" dirty="0"/>
           </a:p>
           <a:p>
-            <a:pPr indent="0" marL="0">
+            <a:pPr marL="0" indent="0">
               <a:lnSpc>
                 <a:spcPct val="120000"/>
               </a:lnSpc>
@@ -17672,7 +17671,7 @@
             <a:endParaRPr lang="en-US" sz="1200" dirty="0"/>
           </a:p>
           <a:p>
-            <a:pPr indent="0" marL="0">
+            <a:pPr marL="0" indent="0">
               <a:lnSpc>
                 <a:spcPct val="120000"/>
               </a:lnSpc>
@@ -17692,7 +17691,7 @@
             <a:endParaRPr lang="en-US" sz="1200" dirty="0"/>
           </a:p>
           <a:p>
-            <a:pPr indent="0" marL="0">
+            <a:pPr marL="0" indent="0">
               <a:lnSpc>
                 <a:spcPct val="120000"/>
               </a:lnSpc>
@@ -17729,6 +17728,7 @@
         <a:solidFill>
           <a:srgbClr val="FFFFFF"/>
         </a:solidFill>
+        <a:effectLst/>
       </p:bgPr>
     </p:bg>
     <p:spTree>
@@ -17766,11 +17766,11 @@
           <a:bodyPr wrap="square" lIns="0" tIns="0" rIns="0" bIns="0" rtlCol="0" anchor="ctr"/>
           <a:lstStyle/>
           <a:p>
-            <a:pPr indent="0" marL="0">
-              <a:buNone/>
-            </a:pPr>
-            <a:r>
-              <a:rPr lang="en-US" sz="1200" b="1" spc="200" kern="0" dirty="0">
+            <a:pPr marL="0" indent="0">
+              <a:buNone/>
+            </a:pPr>
+            <a:r>
+              <a:rPr lang="en-US" sz="1200" b="1" kern="0" spc="200" dirty="0">
                 <a:solidFill>
                   <a:srgbClr val="0B5EA8"/>
                 </a:solidFill>
@@ -17805,7 +17805,7 @@
           <a:bodyPr wrap="square" lIns="0" tIns="0" rIns="0" bIns="0" rtlCol="0" anchor="t"/>
           <a:lstStyle/>
           <a:p>
-            <a:pPr indent="0" marL="0">
+            <a:pPr marL="0" indent="0">
               <a:buNone/>
             </a:pPr>
             <a:r>
@@ -17825,14 +17825,14 @@
       </p:sp>
       <p:pic>
         <p:nvPicPr>
-          <p:cNvPr id="4" name="Image 0" descr="C:\TEMP\claude\D--SourceCode-ntust-InvestmentSimulation\a4c87170-020d-4b6b-adfe-2a756176eb57\scratchpad\ppt\img\admin-reset.png">    </p:cNvPr>
+          <p:cNvPr id="4" name="Image 0" descr="C:\TEMP\claude\D--SourceCode-ntust-InvestmentSimulation\a4c87170-020d-4b6b-adfe-2a756176eb57\scratchpad\ppt\img\admin-reset.png"/>
           <p:cNvPicPr>
             <a:picLocks noChangeAspect="1"/>
           </p:cNvPicPr>
           <p:nvPr/>
         </p:nvPicPr>
         <p:blipFill>
-          <a:blip r:embed="rId1"/>
+          <a:blip r:embed="rId3"/>
           <a:stretch>
             <a:fillRect/>
           </a:stretch>
@@ -17846,7 +17846,7 @@
             <a:avLst/>
           </a:prstGeom>
           <a:effectLst>
-            <a:outerShdw sx="100000" sy="100000" kx="0" ky="0" algn="bl" rotWithShape="0" blurRad="177800" dist="38100" dir="5400000">
+            <a:outerShdw blurRad="177800" dist="38100" dir="5400000" algn="bl" rotWithShape="0">
               <a:srgbClr val="0B2545">
                 <a:alpha val="18000"/>
               </a:srgbClr>
@@ -17902,7 +17902,7 @@
           <a:bodyPr wrap="square" lIns="0" tIns="0" rIns="0" bIns="0" rtlCol="0" anchor="ctr"/>
           <a:lstStyle/>
           <a:p>
-            <a:pPr indent="0" marL="0">
+            <a:pPr marL="0" indent="0">
               <a:buNone/>
             </a:pPr>
             <a:r>
@@ -17941,7 +17941,7 @@
           <a:bodyPr wrap="square" lIns="0" tIns="0" rIns="0" bIns="0" rtlCol="0" anchor="ctr"/>
           <a:lstStyle/>
           <a:p>
-            <a:pPr indent="0" marL="0">
+            <a:pPr marL="0" indent="0">
               <a:lnSpc>
                 <a:spcPct val="125000"/>
               </a:lnSpc>
@@ -17961,7 +17961,7 @@
             <a:endParaRPr lang="en-US" sz="1250" dirty="0"/>
           </a:p>
           <a:p>
-            <a:pPr indent="0" marL="0">
+            <a:pPr marL="0" indent="0">
               <a:lnSpc>
                 <a:spcPct val="125000"/>
               </a:lnSpc>
@@ -17981,7 +17981,7 @@
             <a:endParaRPr lang="en-US" sz="1250" dirty="0"/>
           </a:p>
           <a:p>
-            <a:pPr indent="0" marL="0">
+            <a:pPr marL="0" indent="0">
               <a:lnSpc>
                 <a:spcPct val="125000"/>
               </a:lnSpc>
@@ -18050,7 +18050,7 @@
           <a:bodyPr wrap="square" lIns="0" tIns="0" rIns="0" bIns="0" rtlCol="0" anchor="ctr"/>
           <a:lstStyle/>
           <a:p>
-            <a:pPr indent="0" marL="0">
+            <a:pPr marL="0" indent="0">
               <a:buNone/>
             </a:pPr>
             <a:r>
@@ -18089,7 +18089,7 @@
           <a:bodyPr wrap="square" lIns="0" tIns="0" rIns="0" bIns="0" rtlCol="0" anchor="ctr"/>
           <a:lstStyle/>
           <a:p>
-            <a:pPr indent="0" marL="0">
+            <a:pPr marL="0" indent="0">
               <a:lnSpc>
                 <a:spcPct val="125000"/>
               </a:lnSpc>
@@ -18109,7 +18109,7 @@
             <a:endParaRPr lang="en-US" sz="1250" dirty="0"/>
           </a:p>
           <a:p>
-            <a:pPr indent="0" marL="0">
+            <a:pPr marL="0" indent="0">
               <a:lnSpc>
                 <a:spcPct val="125000"/>
               </a:lnSpc>
@@ -18151,7 +18151,7 @@
           <a:bodyPr wrap="square" lIns="0" tIns="0" rIns="0" bIns="0" rtlCol="0" anchor="ctr"/>
           <a:lstStyle/>
           <a:p>
-            <a:pPr indent="0" marL="0">
+            <a:pPr marL="0" indent="0">
               <a:buNone/>
             </a:pPr>
             <a:r>
@@ -18185,6 +18185,7 @@
         <a:solidFill>
           <a:srgbClr val="FFFFFF"/>
         </a:solidFill>
+        <a:effectLst/>
       </p:bgPr>
     </p:bg>
     <p:spTree>
@@ -18222,11 +18223,11 @@
           <a:bodyPr wrap="square" lIns="0" tIns="0" rIns="0" bIns="0" rtlCol="0" anchor="ctr"/>
           <a:lstStyle/>
           <a:p>
-            <a:pPr indent="0" marL="0">
-              <a:buNone/>
-            </a:pPr>
-            <a:r>
-              <a:rPr lang="en-US" sz="1200" b="1" spc="200" kern="0" dirty="0">
+            <a:pPr marL="0" indent="0">
+              <a:buNone/>
+            </a:pPr>
+            <a:r>
+              <a:rPr lang="en-US" sz="1200" b="1" kern="0" spc="200" dirty="0">
                 <a:solidFill>
                   <a:srgbClr val="0B5EA8"/>
                 </a:solidFill>
@@ -18261,7 +18262,7 @@
           <a:bodyPr wrap="square" lIns="0" tIns="0" rIns="0" bIns="0" rtlCol="0" anchor="t"/>
           <a:lstStyle/>
           <a:p>
-            <a:pPr indent="0" marL="0">
+            <a:pPr marL="0" indent="0">
               <a:buNone/>
             </a:pPr>
             <a:r>
@@ -18281,14 +18282,14 @@
       </p:sp>
       <p:pic>
         <p:nvPicPr>
-          <p:cNvPr id="4" name="Image 0" descr="C:\TEMP\claude\D--SourceCode-ntust-InvestmentSimulation\a4c87170-020d-4b6b-adfe-2a756176eb57\scratchpad\ppt\img\admin-settle.png">    </p:cNvPr>
+          <p:cNvPr id="4" name="Image 0" descr="C:\TEMP\claude\D--SourceCode-ntust-InvestmentSimulation\a4c87170-020d-4b6b-adfe-2a756176eb57\scratchpad\ppt\img\admin-settle.png"/>
           <p:cNvPicPr>
             <a:picLocks noChangeAspect="1"/>
           </p:cNvPicPr>
           <p:nvPr/>
         </p:nvPicPr>
         <p:blipFill>
-          <a:blip r:embed="rId1"/>
+          <a:blip r:embed="rId3"/>
           <a:stretch>
             <a:fillRect/>
           </a:stretch>
@@ -18302,7 +18303,7 @@
             <a:avLst/>
           </a:prstGeom>
           <a:effectLst>
-            <a:outerShdw sx="100000" sy="100000" kx="0" ky="0" algn="bl" rotWithShape="0" blurRad="177800" dist="38100" dir="5400000">
+            <a:outerShdw blurRad="177800" dist="38100" dir="5400000" algn="bl" rotWithShape="0">
               <a:srgbClr val="0B2545">
                 <a:alpha val="18000"/>
               </a:srgbClr>
@@ -18312,14 +18313,14 @@
       </p:pic>
       <p:pic>
         <p:nvPicPr>
-          <p:cNvPr id="5" name="Image 1" descr="C:\TEMP\claude\D--SourceCode-ntust-InvestmentSimulation\a4c87170-020d-4b6b-adfe-2a756176eb57\scratchpad\ppt\img\admin-prices.png">    </p:cNvPr>
+          <p:cNvPr id="5" name="Image 1" descr="C:\TEMP\claude\D--SourceCode-ntust-InvestmentSimulation\a4c87170-020d-4b6b-adfe-2a756176eb57\scratchpad\ppt\img\admin-prices.png"/>
           <p:cNvPicPr>
             <a:picLocks noChangeAspect="1"/>
           </p:cNvPicPr>
           <p:nvPr/>
         </p:nvPicPr>
         <p:blipFill>
-          <a:blip r:embed="rId2"/>
+          <a:blip r:embed="rId4"/>
           <a:stretch>
             <a:fillRect/>
           </a:stretch>
@@ -18333,7 +18334,7 @@
             <a:avLst/>
           </a:prstGeom>
           <a:effectLst>
-            <a:outerShdw sx="100000" sy="100000" kx="0" ky="0" algn="bl" rotWithShape="0" blurRad="177800" dist="38100" dir="5400000">
+            <a:outerShdw blurRad="177800" dist="38100" dir="5400000" algn="bl" rotWithShape="0">
               <a:srgbClr val="0B2545">
                 <a:alpha val="18000"/>
               </a:srgbClr>
@@ -18389,7 +18390,7 @@
           <a:bodyPr wrap="square" lIns="0" tIns="0" rIns="0" bIns="0" rtlCol="0" anchor="ctr"/>
           <a:lstStyle/>
           <a:p>
-            <a:pPr indent="0" marL="0">
+            <a:pPr marL="0" indent="0">
               <a:buNone/>
             </a:pPr>
             <a:r>
@@ -18428,7 +18429,7 @@
           <a:bodyPr wrap="square" lIns="0" tIns="0" rIns="0" bIns="0" rtlCol="0" anchor="ctr"/>
           <a:lstStyle/>
           <a:p>
-            <a:pPr indent="0" marL="0">
+            <a:pPr marL="0" indent="0">
               <a:lnSpc>
                 <a:spcPct val="130000"/>
               </a:lnSpc>
@@ -18448,7 +18449,7 @@
             <a:endParaRPr lang="en-US" sz="1300" dirty="0"/>
           </a:p>
           <a:p>
-            <a:pPr indent="0" marL="0">
+            <a:pPr marL="0" indent="0">
               <a:lnSpc>
                 <a:spcPct val="130000"/>
               </a:lnSpc>
@@ -18457,7 +18458,7 @@
             <a:endParaRPr lang="en-US" sz="1300" dirty="0"/>
           </a:p>
           <a:p>
-            <a:pPr indent="0" marL="0">
+            <a:pPr marL="0" indent="0">
               <a:lnSpc>
                 <a:spcPct val="130000"/>
               </a:lnSpc>
@@ -18477,7 +18478,7 @@
             <a:endParaRPr lang="en-US" sz="1300" dirty="0"/>
           </a:p>
           <a:p>
-            <a:pPr indent="0" marL="0">
+            <a:pPr marL="0" indent="0">
               <a:lnSpc>
                 <a:spcPct val="130000"/>
               </a:lnSpc>
@@ -18486,7 +18487,7 @@
             <a:endParaRPr lang="en-US" sz="1300" dirty="0"/>
           </a:p>
           <a:p>
-            <a:pPr indent="0" marL="0">
+            <a:pPr marL="0" indent="0">
               <a:lnSpc>
                 <a:spcPct val="130000"/>
               </a:lnSpc>
@@ -18555,7 +18556,7 @@
           <a:bodyPr wrap="square" lIns="0" tIns="0" rIns="0" bIns="0" rtlCol="0" anchor="ctr"/>
           <a:lstStyle/>
           <a:p>
-            <a:pPr indent="0" marL="0">
+            <a:pPr marL="0" indent="0">
               <a:lnSpc>
                 <a:spcPct val="120000"/>
               </a:lnSpc>
@@ -18592,6 +18593,7 @@
         <a:solidFill>
           <a:srgbClr val="FFFFFF"/>
         </a:solidFill>
+        <a:effectLst/>
       </p:bgPr>
     </p:bg>
     <p:spTree>
@@ -18629,11 +18631,11 @@
           <a:bodyPr wrap="square" lIns="0" tIns="0" rIns="0" bIns="0" rtlCol="0" anchor="ctr"/>
           <a:lstStyle/>
           <a:p>
-            <a:pPr indent="0" marL="0">
-              <a:buNone/>
-            </a:pPr>
-            <a:r>
-              <a:rPr lang="en-US" sz="1200" b="1" spc="200" kern="0" dirty="0">
+            <a:pPr marL="0" indent="0">
+              <a:buNone/>
+            </a:pPr>
+            <a:r>
+              <a:rPr lang="en-US" sz="1200" b="1" kern="0" spc="200" dirty="0">
                 <a:solidFill>
                   <a:srgbClr val="0B5EA8"/>
                 </a:solidFill>
@@ -18668,7 +18670,7 @@
           <a:bodyPr wrap="square" lIns="0" tIns="0" rIns="0" bIns="0" rtlCol="0" anchor="t"/>
           <a:lstStyle/>
           <a:p>
-            <a:pPr indent="0" marL="0">
+            <a:pPr marL="0" indent="0">
               <a:buNone/>
             </a:pPr>
             <a:r>
@@ -18754,7 +18756,7 @@
           <a:bodyPr wrap="square" lIns="0" tIns="0" rIns="0" bIns="0" rtlCol="0" anchor="ctr"/>
           <a:lstStyle/>
           <a:p>
-            <a:pPr algn="ctr" indent="0" marL="0">
+            <a:pPr marL="0" indent="0" algn="ctr">
               <a:buNone/>
             </a:pPr>
             <a:r>
@@ -18793,7 +18795,7 @@
           <a:bodyPr wrap="square" lIns="0" tIns="0" rIns="0" bIns="0" rtlCol="0" anchor="ctr"/>
           <a:lstStyle/>
           <a:p>
-            <a:pPr indent="0" marL="0">
+            <a:pPr marL="0" indent="0">
               <a:buNone/>
             </a:pPr>
             <a:r>
@@ -18832,7 +18834,7 @@
           <a:bodyPr wrap="square" lIns="0" tIns="0" rIns="0" bIns="0" rtlCol="0" anchor="ctr"/>
           <a:lstStyle/>
           <a:p>
-            <a:pPr indent="0" marL="0">
+            <a:pPr marL="0" indent="0">
               <a:lnSpc>
                 <a:spcPct val="130000"/>
               </a:lnSpc>
@@ -18852,7 +18854,7 @@
             <a:endParaRPr lang="en-US" sz="1300" dirty="0"/>
           </a:p>
           <a:p>
-            <a:pPr indent="0" marL="0">
+            <a:pPr marL="0" indent="0">
               <a:lnSpc>
                 <a:spcPct val="130000"/>
               </a:lnSpc>
@@ -18941,7 +18943,7 @@
           <a:bodyPr wrap="square" lIns="0" tIns="0" rIns="0" bIns="0" rtlCol="0" anchor="ctr"/>
           <a:lstStyle/>
           <a:p>
-            <a:pPr algn="ctr" indent="0" marL="0">
+            <a:pPr marL="0" indent="0" algn="ctr">
               <a:buNone/>
             </a:pPr>
             <a:r>
@@ -18980,7 +18982,7 @@
           <a:bodyPr wrap="square" lIns="0" tIns="0" rIns="0" bIns="0" rtlCol="0" anchor="ctr"/>
           <a:lstStyle/>
           <a:p>
-            <a:pPr indent="0" marL="0">
+            <a:pPr marL="0" indent="0">
               <a:buNone/>
             </a:pPr>
             <a:r>
@@ -19019,7 +19021,7 @@
           <a:bodyPr wrap="square" lIns="0" tIns="0" rIns="0" bIns="0" rtlCol="0" anchor="ctr"/>
           <a:lstStyle/>
           <a:p>
-            <a:pPr indent="0" marL="0">
+            <a:pPr marL="0" indent="0">
               <a:lnSpc>
                 <a:spcPct val="130000"/>
               </a:lnSpc>
@@ -19039,7 +19041,7 @@
             <a:endParaRPr lang="en-US" sz="1300" dirty="0"/>
           </a:p>
           <a:p>
-            <a:pPr indent="0" marL="0">
+            <a:pPr marL="0" indent="0">
               <a:lnSpc>
                 <a:spcPct val="130000"/>
               </a:lnSpc>
@@ -19128,7 +19130,7 @@
           <a:bodyPr wrap="square" lIns="0" tIns="0" rIns="0" bIns="0" rtlCol="0" anchor="ctr"/>
           <a:lstStyle/>
           <a:p>
-            <a:pPr algn="ctr" indent="0" marL="0">
+            <a:pPr marL="0" indent="0" algn="ctr">
               <a:buNone/>
             </a:pPr>
             <a:r>
@@ -19167,7 +19169,7 @@
           <a:bodyPr wrap="square" lIns="0" tIns="0" rIns="0" bIns="0" rtlCol="0" anchor="ctr"/>
           <a:lstStyle/>
           <a:p>
-            <a:pPr indent="0" marL="0">
+            <a:pPr marL="0" indent="0">
               <a:buNone/>
             </a:pPr>
             <a:r>
@@ -19206,7 +19208,7 @@
           <a:bodyPr wrap="square" lIns="0" tIns="0" rIns="0" bIns="0" rtlCol="0" anchor="ctr"/>
           <a:lstStyle/>
           <a:p>
-            <a:pPr indent="0" marL="0">
+            <a:pPr marL="0" indent="0">
               <a:lnSpc>
                 <a:spcPct val="130000"/>
               </a:lnSpc>
@@ -19226,7 +19228,7 @@
             <a:endParaRPr lang="en-US" sz="1300" dirty="0"/>
           </a:p>
           <a:p>
-            <a:pPr indent="0" marL="0">
+            <a:pPr marL="0" indent="0">
               <a:lnSpc>
                 <a:spcPct val="130000"/>
               </a:lnSpc>
@@ -19268,7 +19270,7 @@
           <a:bodyPr wrap="square" lIns="0" tIns="0" rIns="0" bIns="0" rtlCol="0" anchor="ctr"/>
           <a:lstStyle/>
           <a:p>
-            <a:pPr indent="0" marL="0">
+            <a:pPr marL="0" indent="0">
               <a:buNone/>
             </a:pPr>
             <a:r>
@@ -19302,6 +19304,7 @@
         <a:solidFill>
           <a:srgbClr val="FFFFFF"/>
         </a:solidFill>
+        <a:effectLst/>
       </p:bgPr>
     </p:bg>
     <p:spTree>
@@ -19339,11 +19342,11 @@
           <a:bodyPr wrap="square" lIns="0" tIns="0" rIns="0" bIns="0" rtlCol="0" anchor="ctr"/>
           <a:lstStyle/>
           <a:p>
-            <a:pPr indent="0" marL="0">
-              <a:buNone/>
-            </a:pPr>
-            <a:r>
-              <a:rPr lang="en-US" sz="1200" b="1" spc="200" kern="0" dirty="0">
+            <a:pPr marL="0" indent="0">
+              <a:buNone/>
+            </a:pPr>
+            <a:r>
+              <a:rPr lang="en-US" sz="1200" b="1" kern="0" spc="200" dirty="0">
                 <a:solidFill>
                   <a:srgbClr val="0B5EA8"/>
                 </a:solidFill>
@@ -19378,7 +19381,7 @@
           <a:bodyPr wrap="square" lIns="0" tIns="0" rIns="0" bIns="0" rtlCol="0" anchor="t"/>
           <a:lstStyle/>
           <a:p>
-            <a:pPr indent="0" marL="0">
+            <a:pPr marL="0" indent="0">
               <a:buNone/>
             </a:pPr>
             <a:r>
@@ -19417,7 +19420,7 @@
           <a:bodyPr wrap="square" lIns="0" tIns="0" rIns="0" bIns="0" rtlCol="0" anchor="ctr"/>
           <a:lstStyle/>
           <a:p>
-            <a:pPr indent="0" marL="0">
+            <a:pPr marL="0" indent="0">
               <a:buNone/>
             </a:pPr>
             <a:r>
@@ -19451,15 +19454,27 @@
         </p:nvGraphicFramePr>
         <p:xfrm>
           <a:off x="548640" y="1920240"/>
-          <a:ext cx="11064240" cy="914400"/>
+          <a:ext cx="11064240" cy="3803904"/>
         </p:xfrm>
         <a:graphic>
           <a:graphicData uri="http://schemas.openxmlformats.org/drawingml/2006/table">
             <a:tbl>
               <a:tblPr/>
               <a:tblGrid>
-                <a:gridCol w="3291840"/>
-                <a:gridCol w="7772400"/>
+                <a:gridCol w="3291840">
+                  <a:extLst>
+                    <a:ext uri="{9D8B030D-6E8A-4147-A177-3AD203B41FA5}">
+                      <a16:colId xmlns:a16="http://schemas.microsoft.com/office/drawing/2014/main" val="20000"/>
+                    </a:ext>
+                  </a:extLst>
+                </a:gridCol>
+                <a:gridCol w="7772400">
+                  <a:extLst>
+                    <a:ext uri="{9D8B030D-6E8A-4147-A177-3AD203B41FA5}">
+                      <a16:colId xmlns:a16="http://schemas.microsoft.com/office/drawing/2014/main" val="20001"/>
+                    </a:ext>
+                  </a:extLst>
+                </a:gridCol>
               </a:tblGrid>
               <a:tr h="475488">
                 <a:tc>
@@ -19467,7 +19482,7 @@
                     <a:bodyPr/>
                     <a:lstStyle/>
                     <a:p>
-                      <a:pPr indent="0" marL="0">
+                      <a:pPr marL="0" indent="0">
                         <a:buNone/>
                       </a:pPr>
                       <a:r>
@@ -19488,7 +19503,7 @@
                       </a:endParaRPr>
                     </a:p>
                   </a:txBody>
-                  <a:tcPr marL="91440" marR="91440" marT="45720" marB="45720" anchor="ctr">
+                  <a:tcPr anchor="ctr">
                     <a:lnL w="12700" cap="flat" cmpd="sng" algn="ctr">
                       <a:solidFill>
                         <a:srgbClr val="DCE5EE"/>
@@ -19535,7 +19550,7 @@
                     <a:bodyPr/>
                     <a:lstStyle/>
                     <a:p>
-                      <a:pPr indent="0" marL="0">
+                      <a:pPr marL="0" indent="0">
                         <a:buNone/>
                       </a:pPr>
                       <a:r>
@@ -19556,7 +19571,7 @@
                       </a:endParaRPr>
                     </a:p>
                   </a:txBody>
-                  <a:tcPr marL="91440" marR="91440" marT="45720" marB="45720" anchor="ctr">
+                  <a:tcPr anchor="ctr">
                     <a:lnL w="12700" cap="flat" cmpd="sng" algn="ctr">
                       <a:solidFill>
                         <a:srgbClr val="DCE5EE"/>
@@ -19598,6 +19613,11 @@
                     </a:solidFill>
                   </a:tcPr>
                 </a:tc>
+                <a:extLst>
+                  <a:ext uri="{0D108BD9-81ED-4DB2-BD59-A6C34878D82A}">
+                    <a16:rowId xmlns:a16="http://schemas.microsoft.com/office/drawing/2014/main" val="10000"/>
+                  </a:ext>
+                </a:extLst>
               </a:tr>
               <a:tr h="475488">
                 <a:tc>
@@ -19605,7 +19625,7 @@
                     <a:bodyPr/>
                     <a:lstStyle/>
                     <a:p>
-                      <a:pPr indent="0" marL="0">
+                      <a:pPr marL="0" indent="0">
                         <a:buNone/>
                       </a:pPr>
                       <a:r>
@@ -19626,7 +19646,7 @@
                       </a:endParaRPr>
                     </a:p>
                   </a:txBody>
-                  <a:tcPr marL="91440" marR="91440" marT="45720" marB="45720" anchor="ctr">
+                  <a:tcPr anchor="ctr">
                     <a:lnL w="12700" cap="flat" cmpd="sng" algn="ctr">
                       <a:solidFill>
                         <a:srgbClr val="DCE5EE"/>
@@ -19673,7 +19693,7 @@
                     <a:bodyPr/>
                     <a:lstStyle/>
                     <a:p>
-                      <a:pPr indent="0" marL="0">
+                      <a:pPr marL="0" indent="0">
                         <a:buNone/>
                       </a:pPr>
                       <a:r>
@@ -19694,7 +19714,7 @@
                       </a:endParaRPr>
                     </a:p>
                   </a:txBody>
-                  <a:tcPr marL="91440" marR="91440" marT="45720" marB="45720" anchor="ctr">
+                  <a:tcPr anchor="ctr">
                     <a:lnL w="12700" cap="flat" cmpd="sng" algn="ctr">
                       <a:solidFill>
                         <a:srgbClr val="DCE5EE"/>
@@ -19736,6 +19756,11 @@
                     </a:solidFill>
                   </a:tcPr>
                 </a:tc>
+                <a:extLst>
+                  <a:ext uri="{0D108BD9-81ED-4DB2-BD59-A6C34878D82A}">
+                    <a16:rowId xmlns:a16="http://schemas.microsoft.com/office/drawing/2014/main" val="10001"/>
+                  </a:ext>
+                </a:extLst>
               </a:tr>
               <a:tr h="475488">
                 <a:tc>
@@ -19743,7 +19768,7 @@
                     <a:bodyPr/>
                     <a:lstStyle/>
                     <a:p>
-                      <a:pPr indent="0" marL="0">
+                      <a:pPr marL="0" indent="0">
                         <a:buNone/>
                       </a:pPr>
                       <a:r>
@@ -19764,7 +19789,7 @@
                       </a:endParaRPr>
                     </a:p>
                   </a:txBody>
-                  <a:tcPr marL="91440" marR="91440" marT="45720" marB="45720" anchor="ctr">
+                  <a:tcPr anchor="ctr">
                     <a:lnL w="12700" cap="flat" cmpd="sng" algn="ctr">
                       <a:solidFill>
                         <a:srgbClr val="DCE5EE"/>
@@ -19811,7 +19836,7 @@
                     <a:bodyPr/>
                     <a:lstStyle/>
                     <a:p>
-                      <a:pPr indent="0" marL="0">
+                      <a:pPr marL="0" indent="0">
                         <a:buNone/>
                       </a:pPr>
                       <a:r>
@@ -19832,7 +19857,7 @@
                       </a:endParaRPr>
                     </a:p>
                   </a:txBody>
-                  <a:tcPr marL="91440" marR="91440" marT="45720" marB="45720" anchor="ctr">
+                  <a:tcPr anchor="ctr">
                     <a:lnL w="12700" cap="flat" cmpd="sng" algn="ctr">
                       <a:solidFill>
                         <a:srgbClr val="DCE5EE"/>
@@ -19874,6 +19899,11 @@
                     </a:solidFill>
                   </a:tcPr>
                 </a:tc>
+                <a:extLst>
+                  <a:ext uri="{0D108BD9-81ED-4DB2-BD59-A6C34878D82A}">
+                    <a16:rowId xmlns:a16="http://schemas.microsoft.com/office/drawing/2014/main" val="10002"/>
+                  </a:ext>
+                </a:extLst>
               </a:tr>
               <a:tr h="475488">
                 <a:tc>
@@ -19881,7 +19911,7 @@
                     <a:bodyPr/>
                     <a:lstStyle/>
                     <a:p>
-                      <a:pPr indent="0" marL="0">
+                      <a:pPr marL="0" indent="0">
                         <a:buNone/>
                       </a:pPr>
                       <a:r>
@@ -19902,7 +19932,7 @@
                       </a:endParaRPr>
                     </a:p>
                   </a:txBody>
-                  <a:tcPr marL="91440" marR="91440" marT="45720" marB="45720" anchor="ctr">
+                  <a:tcPr anchor="ctr">
                     <a:lnL w="12700" cap="flat" cmpd="sng" algn="ctr">
                       <a:solidFill>
                         <a:srgbClr val="DCE5EE"/>
@@ -19949,7 +19979,7 @@
                     <a:bodyPr/>
                     <a:lstStyle/>
                     <a:p>
-                      <a:pPr indent="0" marL="0">
+                      <a:pPr marL="0" indent="0">
                         <a:buNone/>
                       </a:pPr>
                       <a:r>
@@ -19970,7 +20000,7 @@
                       </a:endParaRPr>
                     </a:p>
                   </a:txBody>
-                  <a:tcPr marL="91440" marR="91440" marT="45720" marB="45720" anchor="ctr">
+                  <a:tcPr anchor="ctr">
                     <a:lnL w="12700" cap="flat" cmpd="sng" algn="ctr">
                       <a:solidFill>
                         <a:srgbClr val="DCE5EE"/>
@@ -20012,6 +20042,11 @@
                     </a:solidFill>
                   </a:tcPr>
                 </a:tc>
+                <a:extLst>
+                  <a:ext uri="{0D108BD9-81ED-4DB2-BD59-A6C34878D82A}">
+                    <a16:rowId xmlns:a16="http://schemas.microsoft.com/office/drawing/2014/main" val="10003"/>
+                  </a:ext>
+                </a:extLst>
               </a:tr>
               <a:tr h="475488">
                 <a:tc>
@@ -20019,7 +20054,7 @@
                     <a:bodyPr/>
                     <a:lstStyle/>
                     <a:p>
-                      <a:pPr indent="0" marL="0">
+                      <a:pPr marL="0" indent="0">
                         <a:buNone/>
                       </a:pPr>
                       <a:r>
@@ -20040,7 +20075,7 @@
                       </a:endParaRPr>
                     </a:p>
                   </a:txBody>
-                  <a:tcPr marL="91440" marR="91440" marT="45720" marB="45720" anchor="ctr">
+                  <a:tcPr anchor="ctr">
                     <a:lnL w="12700" cap="flat" cmpd="sng" algn="ctr">
                       <a:solidFill>
                         <a:srgbClr val="DCE5EE"/>
@@ -20087,7 +20122,7 @@
                     <a:bodyPr/>
                     <a:lstStyle/>
                     <a:p>
-                      <a:pPr indent="0" marL="0">
+                      <a:pPr marL="0" indent="0">
                         <a:buNone/>
                       </a:pPr>
                       <a:r>
@@ -20108,7 +20143,7 @@
                       </a:endParaRPr>
                     </a:p>
                   </a:txBody>
-                  <a:tcPr marL="91440" marR="91440" marT="45720" marB="45720" anchor="ctr">
+                  <a:tcPr anchor="ctr">
                     <a:lnL w="12700" cap="flat" cmpd="sng" algn="ctr">
                       <a:solidFill>
                         <a:srgbClr val="DCE5EE"/>
@@ -20150,6 +20185,11 @@
                     </a:solidFill>
                   </a:tcPr>
                 </a:tc>
+                <a:extLst>
+                  <a:ext uri="{0D108BD9-81ED-4DB2-BD59-A6C34878D82A}">
+                    <a16:rowId xmlns:a16="http://schemas.microsoft.com/office/drawing/2014/main" val="10004"/>
+                  </a:ext>
+                </a:extLst>
               </a:tr>
               <a:tr h="475488">
                 <a:tc>
@@ -20157,7 +20197,7 @@
                     <a:bodyPr/>
                     <a:lstStyle/>
                     <a:p>
-                      <a:pPr indent="0" marL="0">
+                      <a:pPr marL="0" indent="0">
                         <a:buNone/>
                       </a:pPr>
                       <a:r>
@@ -20178,7 +20218,7 @@
                       </a:endParaRPr>
                     </a:p>
                   </a:txBody>
-                  <a:tcPr marL="91440" marR="91440" marT="45720" marB="45720" anchor="ctr">
+                  <a:tcPr anchor="ctr">
                     <a:lnL w="12700" cap="flat" cmpd="sng" algn="ctr">
                       <a:solidFill>
                         <a:srgbClr val="DCE5EE"/>
@@ -20225,7 +20265,7 @@
                     <a:bodyPr/>
                     <a:lstStyle/>
                     <a:p>
-                      <a:pPr indent="0" marL="0">
+                      <a:pPr marL="0" indent="0">
                         <a:buNone/>
                       </a:pPr>
                       <a:r>
@@ -20246,7 +20286,7 @@
                       </a:endParaRPr>
                     </a:p>
                   </a:txBody>
-                  <a:tcPr marL="91440" marR="91440" marT="45720" marB="45720" anchor="ctr">
+                  <a:tcPr anchor="ctr">
                     <a:lnL w="12700" cap="flat" cmpd="sng" algn="ctr">
                       <a:solidFill>
                         <a:srgbClr val="DCE5EE"/>
@@ -20288,6 +20328,11 @@
                     </a:solidFill>
                   </a:tcPr>
                 </a:tc>
+                <a:extLst>
+                  <a:ext uri="{0D108BD9-81ED-4DB2-BD59-A6C34878D82A}">
+                    <a16:rowId xmlns:a16="http://schemas.microsoft.com/office/drawing/2014/main" val="10005"/>
+                  </a:ext>
+                </a:extLst>
               </a:tr>
               <a:tr h="475488">
                 <a:tc>
@@ -20295,7 +20340,7 @@
                     <a:bodyPr/>
                     <a:lstStyle/>
                     <a:p>
-                      <a:pPr indent="0" marL="0">
+                      <a:pPr marL="0" indent="0">
                         <a:buNone/>
                       </a:pPr>
                       <a:r>
@@ -20316,7 +20361,7 @@
                       </a:endParaRPr>
                     </a:p>
                   </a:txBody>
-                  <a:tcPr marL="91440" marR="91440" marT="45720" marB="45720" anchor="ctr">
+                  <a:tcPr anchor="ctr">
                     <a:lnL w="12700" cap="flat" cmpd="sng" algn="ctr">
                       <a:solidFill>
                         <a:srgbClr val="DCE5EE"/>
@@ -20363,7 +20408,7 @@
                     <a:bodyPr/>
                     <a:lstStyle/>
                     <a:p>
-                      <a:pPr indent="0" marL="0">
+                      <a:pPr marL="0" indent="0">
                         <a:buNone/>
                       </a:pPr>
                       <a:r>
@@ -20384,7 +20429,7 @@
                       </a:endParaRPr>
                     </a:p>
                   </a:txBody>
-                  <a:tcPr marL="91440" marR="91440" marT="45720" marB="45720" anchor="ctr">
+                  <a:tcPr anchor="ctr">
                     <a:lnL w="12700" cap="flat" cmpd="sng" algn="ctr">
                       <a:solidFill>
                         <a:srgbClr val="DCE5EE"/>
@@ -20426,6 +20471,11 @@
                     </a:solidFill>
                   </a:tcPr>
                 </a:tc>
+                <a:extLst>
+                  <a:ext uri="{0D108BD9-81ED-4DB2-BD59-A6C34878D82A}">
+                    <a16:rowId xmlns:a16="http://schemas.microsoft.com/office/drawing/2014/main" val="10006"/>
+                  </a:ext>
+                </a:extLst>
               </a:tr>
               <a:tr h="475488">
                 <a:tc>
@@ -20433,7 +20483,7 @@
                     <a:bodyPr/>
                     <a:lstStyle/>
                     <a:p>
-                      <a:pPr indent="0" marL="0">
+                      <a:pPr marL="0" indent="0">
                         <a:buNone/>
                       </a:pPr>
                       <a:r>
@@ -20454,7 +20504,7 @@
                       </a:endParaRPr>
                     </a:p>
                   </a:txBody>
-                  <a:tcPr marL="91440" marR="91440" marT="45720" marB="45720" anchor="ctr">
+                  <a:tcPr anchor="ctr">
                     <a:lnL w="12700" cap="flat" cmpd="sng" algn="ctr">
                       <a:solidFill>
                         <a:srgbClr val="DCE5EE"/>
@@ -20501,7 +20551,7 @@
                     <a:bodyPr/>
                     <a:lstStyle/>
                     <a:p>
-                      <a:pPr indent="0" marL="0">
+                      <a:pPr marL="0" indent="0">
                         <a:buNone/>
                       </a:pPr>
                       <a:r>
@@ -20522,7 +20572,7 @@
                       </a:endParaRPr>
                     </a:p>
                   </a:txBody>
-                  <a:tcPr marL="91440" marR="91440" marT="45720" marB="45720" anchor="ctr">
+                  <a:tcPr anchor="ctr">
                     <a:lnL w="12700" cap="flat" cmpd="sng" algn="ctr">
                       <a:solidFill>
                         <a:srgbClr val="DCE5EE"/>
@@ -20564,6 +20614,11 @@
                     </a:solidFill>
                   </a:tcPr>
                 </a:tc>
+                <a:extLst>
+                  <a:ext uri="{0D108BD9-81ED-4DB2-BD59-A6C34878D82A}">
+                    <a16:rowId xmlns:a16="http://schemas.microsoft.com/office/drawing/2014/main" val="10007"/>
+                  </a:ext>
+                </a:extLst>
               </a:tr>
             </a:tbl>
           </a:graphicData>
@@ -20590,7 +20645,7 @@
           <a:bodyPr wrap="square" lIns="0" tIns="0" rIns="0" bIns="0" rtlCol="0" anchor="ctr"/>
           <a:lstStyle/>
           <a:p>
-            <a:pPr indent="0" marL="0">
+            <a:pPr marL="0" indent="0">
               <a:buNone/>
             </a:pPr>
             <a:r>
@@ -20624,6 +20679,7 @@
         <a:solidFill>
           <a:srgbClr val="FFFFFF"/>
         </a:solidFill>
+        <a:effectLst/>
       </p:bgPr>
     </p:bg>
     <p:spTree>
@@ -20661,7 +20717,7 @@
           <a:bodyPr wrap="square" lIns="0" tIns="0" rIns="0" bIns="0" rtlCol="0" anchor="t"/>
           <a:lstStyle/>
           <a:p>
-            <a:pPr indent="0" marL="0">
+            <a:pPr marL="0" indent="0">
               <a:buNone/>
             </a:pPr>
             <a:r>
@@ -20727,7 +20783,7 @@
           <a:bodyPr wrap="square" lIns="0" tIns="0" rIns="0" bIns="0" rtlCol="0" anchor="ctr"/>
           <a:lstStyle/>
           <a:p>
-            <a:pPr indent="0" marL="0">
+            <a:pPr marL="0" indent="0">
               <a:buNone/>
             </a:pPr>
             <a:r>
@@ -20766,7 +20822,7 @@
           <a:bodyPr wrap="square" lIns="0" tIns="0" rIns="0" bIns="0" rtlCol="0" anchor="ctr"/>
           <a:lstStyle/>
           <a:p>
-            <a:pPr indent="0" marL="0">
+            <a:pPr marL="0" indent="0">
               <a:lnSpc>
                 <a:spcPct val="120000"/>
               </a:lnSpc>
@@ -20835,7 +20891,7 @@
           <a:bodyPr wrap="square" lIns="0" tIns="0" rIns="0" bIns="0" rtlCol="0" anchor="ctr"/>
           <a:lstStyle/>
           <a:p>
-            <a:pPr indent="0" marL="0">
+            <a:pPr marL="0" indent="0">
               <a:buNone/>
             </a:pPr>
             <a:r>
@@ -20874,7 +20930,7 @@
           <a:bodyPr wrap="square" lIns="0" tIns="0" rIns="0" bIns="0" rtlCol="0" anchor="ctr"/>
           <a:lstStyle/>
           <a:p>
-            <a:pPr indent="0" marL="0">
+            <a:pPr marL="0" indent="0">
               <a:lnSpc>
                 <a:spcPct val="120000"/>
               </a:lnSpc>
@@ -20943,7 +20999,7 @@
           <a:bodyPr wrap="square" lIns="0" tIns="0" rIns="0" bIns="0" rtlCol="0" anchor="ctr"/>
           <a:lstStyle/>
           <a:p>
-            <a:pPr indent="0" marL="0">
+            <a:pPr marL="0" indent="0">
               <a:buNone/>
             </a:pPr>
             <a:r>
@@ -20982,7 +21038,7 @@
           <a:bodyPr wrap="square" lIns="0" tIns="0" rIns="0" bIns="0" rtlCol="0" anchor="ctr"/>
           <a:lstStyle/>
           <a:p>
-            <a:pPr indent="0" marL="0">
+            <a:pPr marL="0" indent="0">
               <a:lnSpc>
                 <a:spcPct val="120000"/>
               </a:lnSpc>
@@ -21051,7 +21107,7 @@
           <a:bodyPr wrap="square" lIns="0" tIns="0" rIns="0" bIns="0" rtlCol="0" anchor="ctr"/>
           <a:lstStyle/>
           <a:p>
-            <a:pPr indent="0" marL="0">
+            <a:pPr marL="0" indent="0">
               <a:buNone/>
             </a:pPr>
             <a:r>
@@ -21090,7 +21146,7 @@
           <a:bodyPr wrap="square" lIns="0" tIns="0" rIns="0" bIns="0" rtlCol="0" anchor="ctr"/>
           <a:lstStyle/>
           <a:p>
-            <a:pPr indent="0" marL="0">
+            <a:pPr marL="0" indent="0">
               <a:lnSpc>
                 <a:spcPct val="120000"/>
               </a:lnSpc>
@@ -21159,7 +21215,7 @@
           <a:bodyPr wrap="square" lIns="0" tIns="0" rIns="0" bIns="0" rtlCol="0" anchor="ctr"/>
           <a:lstStyle/>
           <a:p>
-            <a:pPr indent="0" marL="0">
+            <a:pPr marL="0" indent="0">
               <a:buNone/>
             </a:pPr>
             <a:r>
@@ -21198,7 +21254,7 @@
           <a:bodyPr wrap="square" lIns="0" tIns="0" rIns="0" bIns="0" rtlCol="0" anchor="ctr"/>
           <a:lstStyle/>
           <a:p>
-            <a:pPr indent="0" marL="0">
+            <a:pPr marL="0" indent="0">
               <a:lnSpc>
                 <a:spcPct val="120000"/>
               </a:lnSpc>
@@ -21267,7 +21323,7 @@
           <a:bodyPr wrap="square" lIns="0" tIns="0" rIns="0" bIns="0" rtlCol="0" anchor="ctr"/>
           <a:lstStyle/>
           <a:p>
-            <a:pPr indent="0" marL="0">
+            <a:pPr marL="0" indent="0">
               <a:buNone/>
             </a:pPr>
             <a:r>
@@ -21306,7 +21362,7 @@
           <a:bodyPr wrap="square" lIns="0" tIns="0" rIns="0" bIns="0" rtlCol="0" anchor="ctr"/>
           <a:lstStyle/>
           <a:p>
-            <a:pPr indent="0" marL="0">
+            <a:pPr marL="0" indent="0">
               <a:lnSpc>
                 <a:spcPct val="120000"/>
               </a:lnSpc>
@@ -21343,6 +21399,7 @@
         <a:solidFill>
           <a:srgbClr val="08355E"/>
         </a:solidFill>
+        <a:effectLst/>
       </p:bgPr>
     </p:bg>
     <p:spTree>
@@ -21405,14 +21462,14 @@
       </p:sp>
       <p:pic>
         <p:nvPicPr>
-          <p:cNvPr id="4" name="Image 0" descr="D:\SourceCode\ntust_InvestmentSimulation\DOC\NTUST.jpg">    </p:cNvPr>
+          <p:cNvPr id="4" name="Image 0" descr="D:\SourceCode\ntust_InvestmentSimulation\DOC\NTUST.jpg"/>
           <p:cNvPicPr>
             <a:picLocks noChangeAspect="1"/>
           </p:cNvPicPr>
           <p:nvPr/>
         </p:nvPicPr>
         <p:blipFill>
-          <a:blip r:embed="rId1"/>
+          <a:blip r:embed="rId3"/>
           <a:stretch>
             <a:fillRect/>
           </a:stretch>
@@ -21448,7 +21505,7 @@
           <a:bodyPr wrap="square" lIns="0" tIns="0" rIns="0" bIns="0" rtlCol="0" anchor="ctr"/>
           <a:lstStyle/>
           <a:p>
-            <a:pPr indent="0" marL="0">
+            <a:pPr marL="0" indent="0">
               <a:buNone/>
             </a:pPr>
             <a:r>
@@ -21509,7 +21566,7 @@
           <a:bodyPr wrap="square" lIns="0" tIns="0" rIns="0" bIns="0" rtlCol="0" anchor="ctr"/>
           <a:lstStyle/>
           <a:p>
-            <a:pPr algn="ctr" indent="0" marL="0">
+            <a:pPr marL="0" indent="0" algn="ctr">
               <a:buNone/>
             </a:pPr>
             <a:r>
@@ -21548,7 +21605,7 @@
           <a:bodyPr wrap="square" lIns="0" tIns="0" rIns="0" bIns="0" rtlCol="0" anchor="ctr"/>
           <a:lstStyle/>
           <a:p>
-            <a:pPr indent="0" marL="0">
+            <a:pPr marL="0" indent="0">
               <a:buNone/>
             </a:pPr>
             <a:r>
@@ -21587,7 +21644,7 @@
           <a:bodyPr wrap="square" lIns="0" tIns="0" rIns="0" bIns="0" rtlCol="0" anchor="ctr"/>
           <a:lstStyle/>
           <a:p>
-            <a:pPr indent="0" marL="0">
+            <a:pPr marL="0" indent="0">
               <a:buNone/>
             </a:pPr>
             <a:r>
@@ -21626,7 +21683,7 @@
           <a:bodyPr wrap="square" lIns="0" tIns="0" rIns="0" bIns="0" rtlCol="0" anchor="ctr"/>
           <a:lstStyle/>
           <a:p>
-            <a:pPr indent="0" marL="0">
+            <a:pPr marL="0" indent="0">
               <a:buNone/>
             </a:pPr>
             <a:r>
@@ -21660,6 +21717,7 @@
         <a:solidFill>
           <a:srgbClr val="08355E"/>
         </a:solidFill>
+        <a:effectLst/>
       </p:bgPr>
     </p:bg>
     <p:spTree>
@@ -21717,7 +21775,7 @@
           <a:bodyPr wrap="square" lIns="0" tIns="0" rIns="0" bIns="0" rtlCol="0" anchor="ctr"/>
           <a:lstStyle/>
           <a:p>
-            <a:pPr algn="ctr" indent="0" marL="0">
+            <a:pPr marL="0" indent="0" algn="ctr">
               <a:buNone/>
             </a:pPr>
             <a:r>
@@ -21756,7 +21814,7 @@
           <a:bodyPr wrap="square" lIns="0" tIns="0" rIns="0" bIns="0" rtlCol="0" anchor="ctr"/>
           <a:lstStyle/>
           <a:p>
-            <a:pPr indent="0" marL="0">
+            <a:pPr marL="0" indent="0">
               <a:buNone/>
             </a:pPr>
             <a:r>
@@ -21795,7 +21853,7 @@
           <a:bodyPr wrap="square" lIns="0" tIns="0" rIns="0" bIns="0" rtlCol="0" anchor="ctr"/>
           <a:lstStyle/>
           <a:p>
-            <a:pPr indent="0" marL="0">
+            <a:pPr marL="0" indent="0">
               <a:buNone/>
             </a:pPr>
             <a:r>
@@ -21829,6 +21887,7 @@
         <a:solidFill>
           <a:srgbClr val="FFFFFF"/>
         </a:solidFill>
+        <a:effectLst/>
       </p:bgPr>
     </p:bg>
     <p:spTree>
@@ -21866,11 +21925,11 @@
           <a:bodyPr wrap="square" lIns="0" tIns="0" rIns="0" bIns="0" rtlCol="0" anchor="ctr"/>
           <a:lstStyle/>
           <a:p>
-            <a:pPr indent="0" marL="0">
-              <a:buNone/>
-            </a:pPr>
-            <a:r>
-              <a:rPr lang="en-US" sz="1200" b="1" spc="200" kern="0" dirty="0">
+            <a:pPr marL="0" indent="0">
+              <a:buNone/>
+            </a:pPr>
+            <a:r>
+              <a:rPr lang="en-US" sz="1200" b="1" kern="0" spc="200" dirty="0">
                 <a:solidFill>
                   <a:srgbClr val="0B5EA8"/>
                 </a:solidFill>
@@ -21905,7 +21964,7 @@
           <a:bodyPr wrap="square" lIns="0" tIns="0" rIns="0" bIns="0" rtlCol="0" anchor="t"/>
           <a:lstStyle/>
           <a:p>
-            <a:pPr indent="0" marL="0">
+            <a:pPr marL="0" indent="0">
               <a:buNone/>
             </a:pPr>
             <a:r>
@@ -21925,14 +21984,14 @@
       </p:sp>
       <p:pic>
         <p:nvPicPr>
-          <p:cNvPr id="4" name="Image 0" descr="C:\TEMP\claude\D--SourceCode-ntust-InvestmentSimulation\a4c87170-020d-4b6b-adfe-2a756176eb57\scratchpad\ppt\img\register-form.png">    </p:cNvPr>
+          <p:cNvPr id="4" name="Image 0" descr="C:\TEMP\claude\D--SourceCode-ntust-InvestmentSimulation\a4c87170-020d-4b6b-adfe-2a756176eb57\scratchpad\ppt\img\register-form.png"/>
           <p:cNvPicPr>
             <a:picLocks noChangeAspect="1"/>
           </p:cNvPicPr>
           <p:nvPr/>
         </p:nvPicPr>
         <p:blipFill>
-          <a:blip r:embed="rId1"/>
+          <a:blip r:embed="rId3"/>
           <a:stretch>
             <a:fillRect/>
           </a:stretch>
@@ -21946,7 +22005,7 @@
             <a:avLst/>
           </a:prstGeom>
           <a:effectLst>
-            <a:outerShdw sx="100000" sy="100000" kx="0" ky="0" algn="bl" rotWithShape="0" blurRad="177800" dist="38100" dir="5400000">
+            <a:outerShdw blurRad="177800" dist="38100" dir="5400000" algn="bl" rotWithShape="0">
               <a:srgbClr val="0B2545">
                 <a:alpha val="18000"/>
               </a:srgbClr>
@@ -21975,7 +22034,7 @@
           <a:bodyPr wrap="square" lIns="0" tIns="0" rIns="0" bIns="0" rtlCol="0" anchor="ctr"/>
           <a:lstStyle/>
           <a:p>
-            <a:pPr indent="0" marL="0">
+            <a:pPr marL="0" indent="0">
               <a:buNone/>
             </a:pPr>
             <a:r>
@@ -22014,7 +22073,7 @@
           <a:bodyPr wrap="square" lIns="0" tIns="0" rIns="0" bIns="0" rtlCol="0" anchor="ctr"/>
           <a:lstStyle/>
           <a:p>
-            <a:pPr indent="0" marL="0">
+            <a:pPr marL="0" indent="0">
               <a:buNone/>
             </a:pPr>
             <a:r>
@@ -22053,7 +22112,7 @@
           <a:bodyPr wrap="square" lIns="0" tIns="0" rIns="0" bIns="0" rtlCol="0" anchor="ctr"/>
           <a:lstStyle/>
           <a:p>
-            <a:pPr indent="0" marL="0">
+            <a:pPr marL="0" indent="0">
               <a:buNone/>
             </a:pPr>
             <a:r>
@@ -22092,7 +22151,7 @@
           <a:bodyPr wrap="square" lIns="0" tIns="0" rIns="0" bIns="0" rtlCol="0" anchor="ctr"/>
           <a:lstStyle/>
           <a:p>
-            <a:pPr indent="0" marL="0">
+            <a:pPr marL="0" indent="0">
               <a:buNone/>
             </a:pPr>
             <a:r>
@@ -22131,7 +22190,7 @@
           <a:bodyPr wrap="square" lIns="0" tIns="0" rIns="0" bIns="0" rtlCol="0" anchor="ctr"/>
           <a:lstStyle/>
           <a:p>
-            <a:pPr indent="0" marL="0">
+            <a:pPr marL="0" indent="0">
               <a:buNone/>
             </a:pPr>
             <a:r>
@@ -22170,7 +22229,7 @@
           <a:bodyPr wrap="square" lIns="0" tIns="0" rIns="0" bIns="0" rtlCol="0" anchor="ctr"/>
           <a:lstStyle/>
           <a:p>
-            <a:pPr indent="0" marL="0">
+            <a:pPr marL="0" indent="0">
               <a:buNone/>
             </a:pPr>
             <a:r>
@@ -22209,7 +22268,7 @@
           <a:bodyPr wrap="square" lIns="0" tIns="0" rIns="0" bIns="0" rtlCol="0" anchor="ctr"/>
           <a:lstStyle/>
           <a:p>
-            <a:pPr indent="0" marL="0">
+            <a:pPr marL="0" indent="0">
               <a:buNone/>
             </a:pPr>
             <a:r>
@@ -22248,7 +22307,7 @@
           <a:bodyPr wrap="square" lIns="0" tIns="0" rIns="0" bIns="0" rtlCol="0" anchor="ctr"/>
           <a:lstStyle/>
           <a:p>
-            <a:pPr indent="0" marL="0">
+            <a:pPr marL="0" indent="0">
               <a:buNone/>
             </a:pPr>
             <a:r>
@@ -22287,7 +22346,7 @@
           <a:bodyPr wrap="square" lIns="0" tIns="0" rIns="0" bIns="0" rtlCol="0" anchor="ctr"/>
           <a:lstStyle/>
           <a:p>
-            <a:pPr indent="0" marL="0">
+            <a:pPr marL="0" indent="0">
               <a:buNone/>
             </a:pPr>
             <a:r>
@@ -22326,7 +22385,7 @@
           <a:bodyPr wrap="square" lIns="0" tIns="0" rIns="0" bIns="0" rtlCol="0" anchor="ctr"/>
           <a:lstStyle/>
           <a:p>
-            <a:pPr indent="0" marL="0">
+            <a:pPr marL="0" indent="0">
               <a:buNone/>
             </a:pPr>
             <a:r>
@@ -22392,7 +22451,7 @@
           <a:bodyPr wrap="square" lIns="0" tIns="0" rIns="0" bIns="0" rtlCol="0" anchor="ctr"/>
           <a:lstStyle/>
           <a:p>
-            <a:pPr indent="0" marL="0">
+            <a:pPr marL="0" indent="0">
               <a:lnSpc>
                 <a:spcPct val="120000"/>
               </a:lnSpc>
@@ -22429,6 +22488,7 @@
         <a:solidFill>
           <a:srgbClr val="FFFFFF"/>
         </a:solidFill>
+        <a:effectLst/>
       </p:bgPr>
     </p:bg>
     <p:spTree>
@@ -22466,11 +22526,11 @@
           <a:bodyPr wrap="square" lIns="0" tIns="0" rIns="0" bIns="0" rtlCol="0" anchor="ctr"/>
           <a:lstStyle/>
           <a:p>
-            <a:pPr indent="0" marL="0">
-              <a:buNone/>
-            </a:pPr>
-            <a:r>
-              <a:rPr lang="en-US" sz="1200" b="1" spc="200" kern="0" dirty="0">
+            <a:pPr marL="0" indent="0">
+              <a:buNone/>
+            </a:pPr>
+            <a:r>
+              <a:rPr lang="en-US" sz="1200" b="1" kern="0" spc="200" dirty="0">
                 <a:solidFill>
                   <a:srgbClr val="0B5EA8"/>
                 </a:solidFill>
@@ -22505,7 +22565,7 @@
           <a:bodyPr wrap="square" lIns="0" tIns="0" rIns="0" bIns="0" rtlCol="0" anchor="t"/>
           <a:lstStyle/>
           <a:p>
-            <a:pPr indent="0" marL="0">
+            <a:pPr marL="0" indent="0">
               <a:buNone/>
             </a:pPr>
             <a:r>
@@ -22525,14 +22585,14 @@
       </p:sp>
       <p:pic>
         <p:nvPicPr>
-          <p:cNvPr id="4" name="Image 0" descr="C:\TEMP\claude\D--SourceCode-ntust-InvestmentSimulation\a4c87170-020d-4b6b-adfe-2a756176eb57\scratchpad\ppt\img\login-form.png">    </p:cNvPr>
+          <p:cNvPr id="4" name="Image 0" descr="C:\TEMP\claude\D--SourceCode-ntust-InvestmentSimulation\a4c87170-020d-4b6b-adfe-2a756176eb57\scratchpad\ppt\img\login-form.png"/>
           <p:cNvPicPr>
             <a:picLocks noChangeAspect="1"/>
           </p:cNvPicPr>
           <p:nvPr/>
         </p:nvPicPr>
         <p:blipFill>
-          <a:blip r:embed="rId1"/>
+          <a:blip r:embed="rId3"/>
           <a:stretch>
             <a:fillRect/>
           </a:stretch>
@@ -22546,7 +22606,7 @@
             <a:avLst/>
           </a:prstGeom>
           <a:effectLst>
-            <a:outerShdw sx="100000" sy="100000" kx="0" ky="0" algn="bl" rotWithShape="0" blurRad="177800" dist="38100" dir="5400000">
+            <a:outerShdw blurRad="177800" dist="38100" dir="5400000" algn="bl" rotWithShape="0">
               <a:srgbClr val="0B2545">
                 <a:alpha val="18000"/>
               </a:srgbClr>
@@ -22575,7 +22635,7 @@
           <a:bodyPr wrap="square" lIns="0" tIns="0" rIns="0" bIns="0" rtlCol="0" anchor="ctr"/>
           <a:lstStyle/>
           <a:p>
-            <a:pPr indent="0" marL="0">
+            <a:pPr marL="0" indent="0">
               <a:buNone/>
             </a:pPr>
             <a:r>
@@ -22614,7 +22674,7 @@
           <a:bodyPr wrap="square" lIns="0" tIns="0" rIns="0" bIns="0" rtlCol="0" anchor="ctr"/>
           <a:lstStyle/>
           <a:p>
-            <a:pPr indent="0" marL="0">
+            <a:pPr marL="0" indent="0">
               <a:lnSpc>
                 <a:spcPct val="130000"/>
               </a:lnSpc>
@@ -22634,7 +22694,7 @@
             <a:endParaRPr lang="en-US" sz="1400" dirty="0"/>
           </a:p>
           <a:p>
-            <a:pPr indent="0" marL="0">
+            <a:pPr marL="0" indent="0">
               <a:lnSpc>
                 <a:spcPct val="130000"/>
               </a:lnSpc>
@@ -22643,7 +22703,7 @@
             <a:endParaRPr lang="en-US" sz="1400" dirty="0"/>
           </a:p>
           <a:p>
-            <a:pPr indent="0" marL="0">
+            <a:pPr marL="0" indent="0">
               <a:lnSpc>
                 <a:spcPct val="130000"/>
               </a:lnSpc>
@@ -22712,7 +22772,7 @@
           <a:bodyPr wrap="square" lIns="0" tIns="0" rIns="0" bIns="0" rtlCol="0" anchor="ctr"/>
           <a:lstStyle/>
           <a:p>
-            <a:pPr indent="0" marL="0">
+            <a:pPr marL="0" indent="0">
               <a:lnSpc>
                 <a:spcPct val="120000"/>
               </a:lnSpc>
@@ -22749,6 +22809,7 @@
         <a:solidFill>
           <a:srgbClr val="FFFFFF"/>
         </a:solidFill>
+        <a:effectLst/>
       </p:bgPr>
     </p:bg>
     <p:spTree>
@@ -22786,11 +22847,11 @@
           <a:bodyPr wrap="square" lIns="0" tIns="0" rIns="0" bIns="0" rtlCol="0" anchor="ctr"/>
           <a:lstStyle/>
           <a:p>
-            <a:pPr indent="0" marL="0">
-              <a:buNone/>
-            </a:pPr>
-            <a:r>
-              <a:rPr lang="en-US" sz="1200" b="1" spc="200" kern="0" dirty="0">
+            <a:pPr marL="0" indent="0">
+              <a:buNone/>
+            </a:pPr>
+            <a:r>
+              <a:rPr lang="en-US" sz="1200" b="1" kern="0" spc="200" dirty="0">
                 <a:solidFill>
                   <a:srgbClr val="0B5EA8"/>
                 </a:solidFill>
@@ -22825,7 +22886,7 @@
           <a:bodyPr wrap="square" lIns="0" tIns="0" rIns="0" bIns="0" rtlCol="0" anchor="t"/>
           <a:lstStyle/>
           <a:p>
-            <a:pPr indent="0" marL="0">
+            <a:pPr marL="0" indent="0">
               <a:buNone/>
             </a:pPr>
             <a:r>
@@ -22845,14 +22906,14 @@
       </p:sp>
       <p:pic>
         <p:nvPicPr>
-          <p:cNvPr id="4" name="Image 0" descr="C:\TEMP\claude\D--SourceCode-ntust-InvestmentSimulation\a4c87170-020d-4b6b-adfe-2a756176eb57\scratchpad\ppt\img\dash-stats.png">    </p:cNvPr>
+          <p:cNvPr id="4" name="Image 0" descr="C:\TEMP\claude\D--SourceCode-ntust-InvestmentSimulation\a4c87170-020d-4b6b-adfe-2a756176eb57\scratchpad\ppt\img\dash-stats.png"/>
           <p:cNvPicPr>
             <a:picLocks noChangeAspect="1"/>
           </p:cNvPicPr>
           <p:nvPr/>
         </p:nvPicPr>
         <p:blipFill>
-          <a:blip r:embed="rId1"/>
+          <a:blip r:embed="rId3"/>
           <a:stretch>
             <a:fillRect/>
           </a:stretch>
@@ -22866,7 +22927,7 @@
             <a:avLst/>
           </a:prstGeom>
           <a:effectLst>
-            <a:outerShdw sx="100000" sy="100000" kx="0" ky="0" algn="bl" rotWithShape="0" blurRad="177800" dist="38100" dir="5400000">
+            <a:outerShdw blurRad="177800" dist="38100" dir="5400000" algn="bl" rotWithShape="0">
               <a:srgbClr val="0B2545">
                 <a:alpha val="18000"/>
               </a:srgbClr>
@@ -22922,7 +22983,7 @@
           <a:bodyPr wrap="square" lIns="0" tIns="0" rIns="0" bIns="0" rtlCol="0" anchor="ctr"/>
           <a:lstStyle/>
           <a:p>
-            <a:pPr indent="0" marL="0">
+            <a:pPr marL="0" indent="0">
               <a:buNone/>
             </a:pPr>
             <a:r>
@@ -22961,7 +23022,7 @@
           <a:bodyPr wrap="square" lIns="0" tIns="0" rIns="0" bIns="0" rtlCol="0" anchor="ctr"/>
           <a:lstStyle/>
           <a:p>
-            <a:pPr indent="0" marL="0">
+            <a:pPr marL="0" indent="0">
               <a:lnSpc>
                 <a:spcPct val="125000"/>
               </a:lnSpc>
@@ -22981,7 +23042,7 @@
             <a:endParaRPr lang="en-US" sz="1250" dirty="0"/>
           </a:p>
           <a:p>
-            <a:pPr indent="0" marL="0">
+            <a:pPr marL="0" indent="0">
               <a:lnSpc>
                 <a:spcPct val="125000"/>
               </a:lnSpc>
@@ -23050,7 +23111,7 @@
           <a:bodyPr wrap="square" lIns="0" tIns="0" rIns="0" bIns="0" rtlCol="0" anchor="ctr"/>
           <a:lstStyle/>
           <a:p>
-            <a:pPr indent="0" marL="0">
+            <a:pPr marL="0" indent="0">
               <a:buNone/>
             </a:pPr>
             <a:r>
@@ -23089,7 +23150,7 @@
           <a:bodyPr wrap="square" lIns="0" tIns="0" rIns="0" bIns="0" rtlCol="0" anchor="ctr"/>
           <a:lstStyle/>
           <a:p>
-            <a:pPr indent="0" marL="0">
+            <a:pPr marL="0" indent="0">
               <a:lnSpc>
                 <a:spcPct val="125000"/>
               </a:lnSpc>
@@ -23109,7 +23170,7 @@
             <a:endParaRPr lang="en-US" sz="1250" dirty="0"/>
           </a:p>
           <a:p>
-            <a:pPr indent="0" marL="0">
+            <a:pPr marL="0" indent="0">
               <a:lnSpc>
                 <a:spcPct val="125000"/>
               </a:lnSpc>
@@ -23178,7 +23239,7 @@
           <a:bodyPr wrap="square" lIns="0" tIns="0" rIns="0" bIns="0" rtlCol="0" anchor="ctr"/>
           <a:lstStyle/>
           <a:p>
-            <a:pPr indent="0" marL="0">
+            <a:pPr marL="0" indent="0">
               <a:buNone/>
             </a:pPr>
             <a:r>
@@ -23217,7 +23278,7 @@
           <a:bodyPr wrap="square" lIns="0" tIns="0" rIns="0" bIns="0" rtlCol="0" anchor="ctr"/>
           <a:lstStyle/>
           <a:p>
-            <a:pPr indent="0" marL="0">
+            <a:pPr marL="0" indent="0">
               <a:lnSpc>
                 <a:spcPct val="125000"/>
               </a:lnSpc>
@@ -23286,7 +23347,7 @@
           <a:bodyPr wrap="square" lIns="0" tIns="0" rIns="0" bIns="0" rtlCol="0" anchor="ctr"/>
           <a:lstStyle/>
           <a:p>
-            <a:pPr indent="0" marL="0">
+            <a:pPr marL="0" indent="0">
               <a:buNone/>
             </a:pPr>
             <a:r>
@@ -23325,7 +23386,7 @@
           <a:bodyPr wrap="square" lIns="0" tIns="0" rIns="0" bIns="0" rtlCol="0" anchor="ctr"/>
           <a:lstStyle/>
           <a:p>
-            <a:pPr indent="0" marL="0">
+            <a:pPr marL="0" indent="0">
               <a:lnSpc>
                 <a:spcPct val="125000"/>
               </a:lnSpc>
@@ -23367,7 +23428,7 @@
           <a:bodyPr wrap="square" lIns="0" tIns="0" rIns="0" bIns="0" rtlCol="0" anchor="ctr"/>
           <a:lstStyle/>
           <a:p>
-            <a:pPr indent="0" marL="0">
+            <a:pPr marL="0" indent="0">
               <a:buNone/>
             </a:pPr>
             <a:r>
@@ -23401,6 +23462,7 @@
         <a:solidFill>
           <a:srgbClr val="FFFFFF"/>
         </a:solidFill>
+        <a:effectLst/>
       </p:bgPr>
     </p:bg>
     <p:spTree>
@@ -23438,11 +23500,11 @@
           <a:bodyPr wrap="square" lIns="0" tIns="0" rIns="0" bIns="0" rtlCol="0" anchor="ctr"/>
           <a:lstStyle/>
           <a:p>
-            <a:pPr indent="0" marL="0">
-              <a:buNone/>
-            </a:pPr>
-            <a:r>
-              <a:rPr lang="en-US" sz="1200" b="1" spc="200" kern="0" dirty="0">
+            <a:pPr marL="0" indent="0">
+              <a:buNone/>
+            </a:pPr>
+            <a:r>
+              <a:rPr lang="en-US" sz="1200" b="1" kern="0" spc="200" dirty="0">
                 <a:solidFill>
                   <a:srgbClr val="0B5EA8"/>
                 </a:solidFill>
@@ -23477,7 +23539,7 @@
           <a:bodyPr wrap="square" lIns="0" tIns="0" rIns="0" bIns="0" rtlCol="0" anchor="t"/>
           <a:lstStyle/>
           <a:p>
-            <a:pPr indent="0" marL="0">
+            <a:pPr marL="0" indent="0">
               <a:buNone/>
             </a:pPr>
             <a:r>
@@ -23497,14 +23559,14 @@
       </p:sp>
       <p:pic>
         <p:nvPicPr>
-          <p:cNvPr id="4" name="Image 0" descr="C:\TEMP\claude\D--SourceCode-ntust-InvestmentSimulation\a4c87170-020d-4b6b-adfe-2a756176eb57\scratchpad\ppt\img\dash-chart.png">    </p:cNvPr>
+          <p:cNvPr id="4" name="Image 0" descr="C:\TEMP\claude\D--SourceCode-ntust-InvestmentSimulation\a4c87170-020d-4b6b-adfe-2a756176eb57\scratchpad\ppt\img\dash-chart.png"/>
           <p:cNvPicPr>
             <a:picLocks noChangeAspect="1"/>
           </p:cNvPicPr>
           <p:nvPr/>
         </p:nvPicPr>
         <p:blipFill>
-          <a:blip r:embed="rId1"/>
+          <a:blip r:embed="rId3"/>
           <a:stretch>
             <a:fillRect/>
           </a:stretch>
@@ -23518,7 +23580,7 @@
             <a:avLst/>
           </a:prstGeom>
           <a:effectLst>
-            <a:outerShdw sx="100000" sy="100000" kx="0" ky="0" algn="bl" rotWithShape="0" blurRad="177800" dist="38100" dir="5400000">
+            <a:outerShdw blurRad="177800" dist="38100" dir="5400000" algn="bl" rotWithShape="0">
               <a:srgbClr val="0B2545">
                 <a:alpha val="18000"/>
               </a:srgbClr>
@@ -23528,14 +23590,14 @@
       </p:pic>
       <p:pic>
         <p:nvPicPr>
-          <p:cNvPr id="5" name="Image 1" descr="C:\TEMP\claude\D--SourceCode-ntust-InvestmentSimulation\a4c87170-020d-4b6b-adfe-2a756176eb57\scratchpad\ppt\img\dash-pnl.png">    </p:cNvPr>
+          <p:cNvPr id="5" name="Image 1" descr="C:\TEMP\claude\D--SourceCode-ntust-InvestmentSimulation\a4c87170-020d-4b6b-adfe-2a756176eb57\scratchpad\ppt\img\dash-pnl.png"/>
           <p:cNvPicPr>
             <a:picLocks noChangeAspect="1"/>
           </p:cNvPicPr>
           <p:nvPr/>
         </p:nvPicPr>
         <p:blipFill>
-          <a:blip r:embed="rId2"/>
+          <a:blip r:embed="rId4"/>
           <a:stretch>
             <a:fillRect/>
           </a:stretch>
@@ -23549,7 +23611,7 @@
             <a:avLst/>
           </a:prstGeom>
           <a:effectLst>
-            <a:outerShdw sx="100000" sy="100000" kx="0" ky="0" algn="bl" rotWithShape="0" blurRad="177800" dist="38100" dir="5400000">
+            <a:outerShdw blurRad="177800" dist="38100" dir="5400000" algn="bl" rotWithShape="0">
               <a:srgbClr val="0B2545">
                 <a:alpha val="18000"/>
               </a:srgbClr>
@@ -23605,7 +23667,7 @@
           <a:bodyPr wrap="square" lIns="0" tIns="0" rIns="0" bIns="0" rtlCol="0" anchor="ctr"/>
           <a:lstStyle/>
           <a:p>
-            <a:pPr indent="0" marL="0">
+            <a:pPr marL="0" indent="0">
               <a:lnSpc>
                 <a:spcPct val="120000"/>
               </a:lnSpc>
@@ -23625,7 +23687,7 @@
             <a:endParaRPr lang="en-US" sz="1400" dirty="0"/>
           </a:p>
           <a:p>
-            <a:pPr indent="0" marL="0">
+            <a:pPr marL="0" indent="0">
               <a:lnSpc>
                 <a:spcPct val="120000"/>
               </a:lnSpc>
@@ -23667,7 +23729,7 @@
           <a:bodyPr wrap="square" lIns="0" tIns="0" rIns="0" bIns="0" rtlCol="0" anchor="ctr"/>
           <a:lstStyle/>
           <a:p>
-            <a:pPr indent="0" marL="0">
+            <a:pPr marL="0" indent="0">
               <a:lnSpc>
                 <a:spcPct val="125000"/>
               </a:lnSpc>
@@ -23687,7 +23749,7 @@
             <a:endParaRPr lang="en-US" sz="1150" dirty="0"/>
           </a:p>
           <a:p>
-            <a:pPr indent="0" marL="0">
+            <a:pPr marL="0" indent="0">
               <a:lnSpc>
                 <a:spcPct val="125000"/>
               </a:lnSpc>
@@ -23696,7 +23758,7 @@
             <a:endParaRPr lang="en-US" sz="1150" dirty="0"/>
           </a:p>
           <a:p>
-            <a:pPr indent="0" marL="0">
+            <a:pPr marL="0" indent="0">
               <a:lnSpc>
                 <a:spcPct val="125000"/>
               </a:lnSpc>
@@ -23716,7 +23778,7 @@
             <a:endParaRPr lang="en-US" sz="1150" dirty="0"/>
           </a:p>
           <a:p>
-            <a:pPr indent="0" marL="0">
+            <a:pPr marL="0" indent="0">
               <a:lnSpc>
                 <a:spcPct val="125000"/>
               </a:lnSpc>
@@ -23725,7 +23787,7 @@
             <a:endParaRPr lang="en-US" sz="1150" dirty="0"/>
           </a:p>
           <a:p>
-            <a:pPr indent="0" marL="0">
+            <a:pPr marL="0" indent="0">
               <a:lnSpc>
                 <a:spcPct val="125000"/>
               </a:lnSpc>
@@ -23745,7 +23807,7 @@
             <a:endParaRPr lang="en-US" sz="1150" dirty="0"/>
           </a:p>
           <a:p>
-            <a:pPr indent="0" marL="0">
+            <a:pPr marL="0" indent="0">
               <a:lnSpc>
                 <a:spcPct val="125000"/>
               </a:lnSpc>
@@ -23787,7 +23849,7 @@
           <a:bodyPr wrap="square" lIns="0" tIns="0" rIns="0" bIns="0" rtlCol="0" anchor="ctr"/>
           <a:lstStyle/>
           <a:p>
-            <a:pPr indent="0" marL="0">
+            <a:pPr marL="0" indent="0">
               <a:buNone/>
             </a:pPr>
             <a:r>
@@ -23821,6 +23883,7 @@
         <a:solidFill>
           <a:srgbClr val="FFFFFF"/>
         </a:solidFill>
+        <a:effectLst/>
       </p:bgPr>
     </p:bg>
     <p:spTree>
@@ -23858,11 +23921,11 @@
           <a:bodyPr wrap="square" lIns="0" tIns="0" rIns="0" bIns="0" rtlCol="0" anchor="ctr"/>
           <a:lstStyle/>
           <a:p>
-            <a:pPr indent="0" marL="0">
-              <a:buNone/>
-            </a:pPr>
-            <a:r>
-              <a:rPr lang="en-US" sz="1200" b="1" spc="200" kern="0" dirty="0">
+            <a:pPr marL="0" indent="0">
+              <a:buNone/>
+            </a:pPr>
+            <a:r>
+              <a:rPr lang="en-US" sz="1200" b="1" kern="0" spc="200" dirty="0">
                 <a:solidFill>
                   <a:srgbClr val="0B5EA8"/>
                 </a:solidFill>
@@ -23897,7 +23960,7 @@
           <a:bodyPr wrap="square" lIns="0" tIns="0" rIns="0" bIns="0" rtlCol="0" anchor="t"/>
           <a:lstStyle/>
           <a:p>
-            <a:pPr indent="0" marL="0">
+            <a:pPr marL="0" indent="0">
               <a:buNone/>
             </a:pPr>
             <a:r>
@@ -23917,14 +23980,14 @@
       </p:sp>
       <p:pic>
         <p:nvPicPr>
-          <p:cNvPr id="4" name="Image 0" descr="C:\TEMP\claude\D--SourceCode-ntust-InvestmentSimulation\a4c87170-020d-4b6b-adfe-2a756176eb57\scratchpad\ppt\img\dash-holdings.png">    </p:cNvPr>
+          <p:cNvPr id="4" name="Image 0" descr="C:\TEMP\claude\D--SourceCode-ntust-InvestmentSimulation\a4c87170-020d-4b6b-adfe-2a756176eb57\scratchpad\ppt\img\dash-holdings.png"/>
           <p:cNvPicPr>
             <a:picLocks noChangeAspect="1"/>
           </p:cNvPicPr>
           <p:nvPr/>
         </p:nvPicPr>
         <p:blipFill>
-          <a:blip r:embed="rId1"/>
+          <a:blip r:embed="rId3"/>
           <a:stretch>
             <a:fillRect/>
           </a:stretch>
@@ -23938,7 +24001,7 @@
             <a:avLst/>
           </a:prstGeom>
           <a:effectLst>
-            <a:outerShdw sx="100000" sy="100000" kx="0" ky="0" algn="bl" rotWithShape="0" blurRad="177800" dist="38100" dir="5400000">
+            <a:outerShdw blurRad="177800" dist="38100" dir="5400000" algn="bl" rotWithShape="0">
               <a:srgbClr val="0B2545">
                 <a:alpha val="18000"/>
               </a:srgbClr>
@@ -23987,7 +24050,7 @@
           <a:bodyPr wrap="square" lIns="0" tIns="0" rIns="0" bIns="0" rtlCol="0" anchor="ctr"/>
           <a:lstStyle/>
           <a:p>
-            <a:pPr indent="0" marL="0">
+            <a:pPr marL="0" indent="0">
               <a:buNone/>
             </a:pPr>
             <a:r>
@@ -24026,7 +24089,7 @@
           <a:bodyPr wrap="square" lIns="0" tIns="0" rIns="0" bIns="0" rtlCol="0" anchor="ctr"/>
           <a:lstStyle/>
           <a:p>
-            <a:pPr indent="0" marL="0">
+            <a:pPr marL="0" indent="0">
               <a:buNone/>
             </a:pPr>
             <a:r>
@@ -24085,7 +24148,7 @@
           <a:bodyPr wrap="square" lIns="0" tIns="0" rIns="0" bIns="0" rtlCol="0" anchor="ctr"/>
           <a:lstStyle/>
           <a:p>
-            <a:pPr indent="0" marL="0">
+            <a:pPr marL="0" indent="0">
               <a:buNone/>
             </a:pPr>
             <a:r>
@@ -24124,7 +24187,7 @@
           <a:bodyPr wrap="square" lIns="0" tIns="0" rIns="0" bIns="0" rtlCol="0" anchor="ctr"/>
           <a:lstStyle/>
           <a:p>
-            <a:pPr indent="0" marL="0">
+            <a:pPr marL="0" indent="0">
               <a:buNone/>
             </a:pPr>
             <a:r>
@@ -24183,7 +24246,7 @@
           <a:bodyPr wrap="square" lIns="0" tIns="0" rIns="0" bIns="0" rtlCol="0" anchor="ctr"/>
           <a:lstStyle/>
           <a:p>
-            <a:pPr indent="0" marL="0">
+            <a:pPr marL="0" indent="0">
               <a:buNone/>
             </a:pPr>
             <a:r>
@@ -24222,7 +24285,7 @@
           <a:bodyPr wrap="square" lIns="0" tIns="0" rIns="0" bIns="0" rtlCol="0" anchor="ctr"/>
           <a:lstStyle/>
           <a:p>
-            <a:pPr indent="0" marL="0">
+            <a:pPr marL="0" indent="0">
               <a:buNone/>
             </a:pPr>
             <a:r>
@@ -24281,7 +24344,7 @@
           <a:bodyPr wrap="square" lIns="0" tIns="0" rIns="0" bIns="0" rtlCol="0" anchor="ctr"/>
           <a:lstStyle/>
           <a:p>
-            <a:pPr indent="0" marL="0">
+            <a:pPr marL="0" indent="0">
               <a:buNone/>
             </a:pPr>
             <a:r>
@@ -24320,7 +24383,7 @@
           <a:bodyPr wrap="square" lIns="0" tIns="0" rIns="0" bIns="0" rtlCol="0" anchor="ctr"/>
           <a:lstStyle/>
           <a:p>
-            <a:pPr indent="0" marL="0">
+            <a:pPr marL="0" indent="0">
               <a:buNone/>
             </a:pPr>
             <a:r>
@@ -24639,4 +24702,319 @@
     </a:ext>
   </a:extLst>
 </a:theme>
+</file>
+
+<file path=ppt/theme/theme2.xml><?xml version="1.0" encoding="utf-8"?>
+<a:theme xmlns:a="http://schemas.openxmlformats.org/drawingml/2006/main" name="Office 佈景主題">
+  <a:themeElements>
+    <a:clrScheme name="Office">
+      <a:dk1>
+        <a:sysClr val="windowText" lastClr="000000"/>
+      </a:dk1>
+      <a:lt1>
+        <a:sysClr val="window" lastClr="FFFFFF"/>
+      </a:lt1>
+      <a:dk2>
+        <a:srgbClr val="0E2841"/>
+      </a:dk2>
+      <a:lt2>
+        <a:srgbClr val="E8E8E8"/>
+      </a:lt2>
+      <a:accent1>
+        <a:srgbClr val="156082"/>
+      </a:accent1>
+      <a:accent2>
+        <a:srgbClr val="E97132"/>
+      </a:accent2>
+      <a:accent3>
+        <a:srgbClr val="196B24"/>
+      </a:accent3>
+      <a:accent4>
+        <a:srgbClr val="0F9ED5"/>
+      </a:accent4>
+      <a:accent5>
+        <a:srgbClr val="A02B93"/>
+      </a:accent5>
+      <a:accent6>
+        <a:srgbClr val="4EA72E"/>
+      </a:accent6>
+      <a:hlink>
+        <a:srgbClr val="467886"/>
+      </a:hlink>
+      <a:folHlink>
+        <a:srgbClr val="96607D"/>
+      </a:folHlink>
+    </a:clrScheme>
+    <a:fontScheme name="Office">
+      <a:majorFont>
+        <a:latin typeface="Aptos Display" panose="02110004020202020204"/>
+        <a:ea typeface=""/>
+        <a:cs typeface=""/>
+        <a:font script="Jpan" typeface="游ゴシック Light"/>
+        <a:font script="Hang" typeface="맑은 고딕"/>
+        <a:font script="Hans" typeface="等线 Light"/>
+        <a:font script="Hant" typeface="新細明體"/>
+        <a:font script="Arab" typeface="Times New Roman"/>
+        <a:font script="Hebr" typeface="Times New Roman"/>
+        <a:font script="Thai" typeface="Angsana New"/>
+        <a:font script="Ethi" typeface="Nyala"/>
+        <a:font script="Beng" typeface="Vrinda"/>
+        <a:font script="Gujr" typeface="Shruti"/>
+        <a:font script="Khmr" typeface="MoolBoran"/>
+        <a:font script="Knda" typeface="Tunga"/>
+        <a:font script="Guru" typeface="Raavi"/>
+        <a:font script="Cans" typeface="Euphemia"/>
+        <a:font script="Cher" typeface="Plantagenet Cherokee"/>
+        <a:font script="Yiii" typeface="Microsoft Yi Baiti"/>
+        <a:font script="Tibt" typeface="Microsoft Himalaya"/>
+        <a:font script="Thaa" typeface="MV Boli"/>
+        <a:font script="Deva" typeface="Mangal"/>
+        <a:font script="Telu" typeface="Gautami"/>
+        <a:font script="Taml" typeface="Latha"/>
+        <a:font script="Syrc" typeface="Estrangelo Edessa"/>
+        <a:font script="Orya" typeface="Kalinga"/>
+        <a:font script="Mlym" typeface="Kartika"/>
+        <a:font script="Laoo" typeface="DokChampa"/>
+        <a:font script="Sinh" typeface="Iskoola Pota"/>
+        <a:font script="Mong" typeface="Mongolian Baiti"/>
+        <a:font script="Viet" typeface="Times New Roman"/>
+        <a:font script="Uigh" typeface="Microsoft Uighur"/>
+        <a:font script="Geor" typeface="Sylfaen"/>
+        <a:font script="Armn" typeface="Arial"/>
+        <a:font script="Bugi" typeface="Leelawadee UI"/>
+        <a:font script="Bopo" typeface="Microsoft JhengHei"/>
+        <a:font script="Java" typeface="Javanese Text"/>
+        <a:font script="Lisu" typeface="Segoe UI"/>
+        <a:font script="Mymr" typeface="Myanmar Text"/>
+        <a:font script="Nkoo" typeface="Ebrima"/>
+        <a:font script="Olck" typeface="Nirmala UI"/>
+        <a:font script="Osma" typeface="Ebrima"/>
+        <a:font script="Phag" typeface="Phagspa"/>
+        <a:font script="Syrn" typeface="Estrangelo Edessa"/>
+        <a:font script="Syrj" typeface="Estrangelo Edessa"/>
+        <a:font script="Syre" typeface="Estrangelo Edessa"/>
+        <a:font script="Sora" typeface="Nirmala UI"/>
+        <a:font script="Tale" typeface="Microsoft Tai Le"/>
+        <a:font script="Talu" typeface="Microsoft New Tai Lue"/>
+        <a:font script="Tfng" typeface="Ebrima"/>
+      </a:majorFont>
+      <a:minorFont>
+        <a:latin typeface="Aptos" panose="02110004020202020204"/>
+        <a:ea typeface=""/>
+        <a:cs typeface=""/>
+        <a:font script="Jpan" typeface="游ゴシック"/>
+        <a:font script="Hang" typeface="맑은 고딕"/>
+        <a:font script="Hans" typeface="等线"/>
+        <a:font script="Hant" typeface="新細明體"/>
+        <a:font script="Arab" typeface="Arial"/>
+        <a:font script="Hebr" typeface="Arial"/>
+        <a:font script="Thai" typeface="Cordia New"/>
+        <a:font script="Ethi" typeface="Nyala"/>
+        <a:font script="Beng" typeface="Vrinda"/>
+        <a:font script="Gujr" typeface="Shruti"/>
+        <a:font script="Khmr" typeface="DaunPenh"/>
+        <a:font script="Knda" typeface="Tunga"/>
+        <a:font script="Guru" typeface="Raavi"/>
+        <a:font script="Cans" typeface="Euphemia"/>
+        <a:font script="Cher" typeface="Plantagenet Cherokee"/>
+        <a:font script="Yiii" typeface="Microsoft Yi Baiti"/>
+        <a:font script="Tibt" typeface="Microsoft Himalaya"/>
+        <a:font script="Thaa" typeface="MV Boli"/>
+        <a:font script="Deva" typeface="Mangal"/>
+        <a:font script="Telu" typeface="Gautami"/>
+        <a:font script="Taml" typeface="Latha"/>
+        <a:font script="Syrc" typeface="Estrangelo Edessa"/>
+        <a:font script="Orya" typeface="Kalinga"/>
+        <a:font script="Mlym" typeface="Kartika"/>
+        <a:font script="Laoo" typeface="DokChampa"/>
+        <a:font script="Sinh" typeface="Iskoola Pota"/>
+        <a:font script="Mong" typeface="Mongolian Baiti"/>
+        <a:font script="Viet" typeface="Arial"/>
+        <a:font script="Uigh" typeface="Microsoft Uighur"/>
+        <a:font script="Geor" typeface="Sylfaen"/>
+        <a:font script="Armn" typeface="Arial"/>
+        <a:font script="Bugi" typeface="Leelawadee UI"/>
+        <a:font script="Bopo" typeface="Microsoft JhengHei"/>
+        <a:font script="Java" typeface="Javanese Text"/>
+        <a:font script="Lisu" typeface="Segoe UI"/>
+        <a:font script="Mymr" typeface="Myanmar Text"/>
+        <a:font script="Nkoo" typeface="Ebrima"/>
+        <a:font script="Olck" typeface="Nirmala UI"/>
+        <a:font script="Osma" typeface="Ebrima"/>
+        <a:font script="Phag" typeface="Phagspa"/>
+        <a:font script="Syrn" typeface="Estrangelo Edessa"/>
+        <a:font script="Syrj" typeface="Estrangelo Edessa"/>
+        <a:font script="Syre" typeface="Estrangelo Edessa"/>
+        <a:font script="Sora" typeface="Nirmala UI"/>
+        <a:font script="Tale" typeface="Microsoft Tai Le"/>
+        <a:font script="Talu" typeface="Microsoft New Tai Lue"/>
+        <a:font script="Tfng" typeface="Ebrima"/>
+      </a:minorFont>
+    </a:fontScheme>
+    <a:fmtScheme name="Office">
+      <a:fillStyleLst>
+        <a:solidFill>
+          <a:schemeClr val="phClr"/>
+        </a:solidFill>
+        <a:gradFill rotWithShape="1">
+          <a:gsLst>
+            <a:gs pos="0">
+              <a:schemeClr val="phClr">
+                <a:lumMod val="110000"/>
+                <a:satMod val="105000"/>
+                <a:tint val="67000"/>
+              </a:schemeClr>
+            </a:gs>
+            <a:gs pos="50000">
+              <a:schemeClr val="phClr">
+                <a:lumMod val="105000"/>
+                <a:satMod val="103000"/>
+                <a:tint val="73000"/>
+              </a:schemeClr>
+            </a:gs>
+            <a:gs pos="100000">
+              <a:schemeClr val="phClr">
+                <a:lumMod val="105000"/>
+                <a:satMod val="109000"/>
+                <a:tint val="81000"/>
+              </a:schemeClr>
+            </a:gs>
+          </a:gsLst>
+          <a:lin ang="5400000" scaled="0"/>
+        </a:gradFill>
+        <a:gradFill rotWithShape="1">
+          <a:gsLst>
+            <a:gs pos="0">
+              <a:schemeClr val="phClr">
+                <a:satMod val="103000"/>
+                <a:lumMod val="102000"/>
+                <a:tint val="94000"/>
+              </a:schemeClr>
+            </a:gs>
+            <a:gs pos="50000">
+              <a:schemeClr val="phClr">
+                <a:satMod val="110000"/>
+                <a:lumMod val="100000"/>
+                <a:shade val="100000"/>
+              </a:schemeClr>
+            </a:gs>
+            <a:gs pos="100000">
+              <a:schemeClr val="phClr">
+                <a:lumMod val="99000"/>
+                <a:satMod val="120000"/>
+                <a:shade val="78000"/>
+              </a:schemeClr>
+            </a:gs>
+          </a:gsLst>
+          <a:lin ang="5400000" scaled="0"/>
+        </a:gradFill>
+      </a:fillStyleLst>
+      <a:lnStyleLst>
+        <a:ln w="12700" cap="flat" cmpd="sng" algn="ctr">
+          <a:solidFill>
+            <a:schemeClr val="phClr"/>
+          </a:solidFill>
+          <a:prstDash val="solid"/>
+          <a:miter lim="800000"/>
+        </a:ln>
+        <a:ln w="19050" cap="flat" cmpd="sng" algn="ctr">
+          <a:solidFill>
+            <a:schemeClr val="phClr"/>
+          </a:solidFill>
+          <a:prstDash val="solid"/>
+          <a:miter lim="800000"/>
+        </a:ln>
+        <a:ln w="25400" cap="flat" cmpd="sng" algn="ctr">
+          <a:solidFill>
+            <a:schemeClr val="phClr"/>
+          </a:solidFill>
+          <a:prstDash val="solid"/>
+          <a:miter lim="800000"/>
+        </a:ln>
+      </a:lnStyleLst>
+      <a:effectStyleLst>
+        <a:effectStyle>
+          <a:effectLst/>
+        </a:effectStyle>
+        <a:effectStyle>
+          <a:effectLst/>
+        </a:effectStyle>
+        <a:effectStyle>
+          <a:effectLst>
+            <a:outerShdw blurRad="57150" dist="19050" dir="5400000" algn="ctr" rotWithShape="0">
+              <a:srgbClr val="000000">
+                <a:alpha val="63000"/>
+              </a:srgbClr>
+            </a:outerShdw>
+          </a:effectLst>
+        </a:effectStyle>
+      </a:effectStyleLst>
+      <a:bgFillStyleLst>
+        <a:solidFill>
+          <a:schemeClr val="phClr"/>
+        </a:solidFill>
+        <a:solidFill>
+          <a:schemeClr val="phClr">
+            <a:tint val="95000"/>
+            <a:satMod val="170000"/>
+          </a:schemeClr>
+        </a:solidFill>
+        <a:gradFill rotWithShape="1">
+          <a:gsLst>
+            <a:gs pos="0">
+              <a:schemeClr val="phClr">
+                <a:tint val="93000"/>
+                <a:satMod val="150000"/>
+                <a:shade val="98000"/>
+                <a:lumMod val="102000"/>
+              </a:schemeClr>
+            </a:gs>
+            <a:gs pos="50000">
+              <a:schemeClr val="phClr">
+                <a:tint val="98000"/>
+                <a:satMod val="130000"/>
+                <a:shade val="90000"/>
+                <a:lumMod val="103000"/>
+              </a:schemeClr>
+            </a:gs>
+            <a:gs pos="100000">
+              <a:schemeClr val="phClr">
+                <a:shade val="63000"/>
+                <a:satMod val="120000"/>
+              </a:schemeClr>
+            </a:gs>
+          </a:gsLst>
+          <a:lin ang="5400000" scaled="0"/>
+        </a:gradFill>
+      </a:bgFillStyleLst>
+    </a:fmtScheme>
+  </a:themeElements>
+  <a:objectDefaults>
+    <a:lnDef>
+      <a:spPr/>
+      <a:bodyPr/>
+      <a:lstStyle/>
+      <a:style>
+        <a:lnRef idx="2">
+          <a:schemeClr val="accent1"/>
+        </a:lnRef>
+        <a:fillRef idx="0">
+          <a:schemeClr val="accent1"/>
+        </a:fillRef>
+        <a:effectRef idx="1">
+          <a:schemeClr val="accent1"/>
+        </a:effectRef>
+        <a:fontRef idx="minor">
+          <a:schemeClr val="tx1"/>
+        </a:fontRef>
+      </a:style>
+    </a:lnDef>
+  </a:objectDefaults>
+  <a:extraClrSchemeLst/>
+  <a:extLst>
+    <a:ext uri="{05A4C25C-085E-4340-85A3-A5531E510DB2}">
+      <thm15:themeFamily xmlns:thm15="http://schemas.microsoft.com/office/thememl/2012/main" name="Office Theme" id="{2E142A2C-CD16-42D6-873A-C26D2A0506FA}" vid="{1BDDFF52-6CD6-40A5-AB3C-68EB2F1E4D0A}"/>
+    </a:ext>
+  </a:extLst>
+</a:theme>
 </file>